--- a/LLMA4SE_Workshop4_Slides.pptx
+++ b/LLMA4SE_Workshop4_Slides.pptx
@@ -7,6 +7,7 @@
   <p:sldIdLst>
     <p:sldId id="256" r:id="rId2"/>
     <p:sldId id="257" r:id="rId3"/>
+    <p:sldId id="274" r:id="rId25"/>
     <p:sldId id="258" r:id="rId4"/>
     <p:sldId id="259" r:id="rId5"/>
     <p:sldId id="260" r:id="rId6"/>
@@ -2520,7 +2521,7 @@
                 <a:ea typeface="Calibri" pitchFamily="34" charset="-122"/>
                 <a:cs typeface="Calibri" pitchFamily="34" charset="-120"/>
               </a:rPr>
-              <a:t>Hands-on: anti-pattern detection, code smell &amp; technical debt resolution — on a free GPU</a:t>
+              <a:t>Hands-on: anti-pattern detection, code smell &amp; technical debt resolution — one notebook, one API key</a:t>
             </a:r>
             <a:endParaRPr lang="en-US" sz="1700" dirty="0"/>
           </a:p>
@@ -2718,7 +2719,7 @@
                 <a:ea typeface="Courier New" pitchFamily="34" charset="-122"/>
                 <a:cs typeface="Courier New" pitchFamily="34" charset="-120"/>
               </a:rPr>
-              <a:t>GOOGLE COLAB · T4</a:t>
+              <a:t>COLAB · OPENAI API</a:t>
             </a:r>
             <a:endParaRPr lang="en-US" sz="1050" dirty="0"/>
           </a:p>
@@ -5912,7 +5913,7 @@
                 <a:ea typeface="Courier New" pitchFamily="34" charset="-122"/>
                 <a:cs typeface="Courier New" pitchFamily="34" charset="-120"/>
               </a:rPr>
-              <a:t>HANDS-ON · NOTEBOOK PART 2</a:t>
+              <a:t>HANDS-ON · PART 2</a:t>
             </a:r>
             <a:endParaRPr lang="en-US" sz="1300" dirty="0"/>
           </a:p>
@@ -6945,7 +6946,7 @@
                 <a:ea typeface="Courier New" pitchFamily="34" charset="-122"/>
                 <a:cs typeface="Courier New" pitchFamily="34" charset="-120"/>
               </a:rPr>
-              <a:t>HANDS-ON · NOTEBOOK PART 3</a:t>
+              <a:t>HANDS-ON · PART 3</a:t>
             </a:r>
             <a:endParaRPr lang="en-US" sz="1300" dirty="0"/>
           </a:p>
@@ -7156,7 +7157,7 @@
                 <a:ea typeface="Courier New" pitchFamily="34" charset="-122"/>
                 <a:cs typeface="Courier New" pitchFamily="34" charset="-120"/>
               </a:rPr>
-              <a:t>~45 MINUTES</a:t>
+              <a:t>~40 MINUTES</a:t>
             </a:r>
             <a:endParaRPr lang="en-US" sz="1050" dirty="0"/>
           </a:p>
@@ -7483,7 +7484,7 @@
                 <a:ea typeface="Calibri" pitchFamily="34" charset="-122"/>
                 <a:cs typeface="Calibri" pitchFamily="34" charset="-120"/>
               </a:rPr>
-              <a:t>transformers in-process</a:t>
+              <a:t>a raw API call per agent</a:t>
             </a:r>
             <a:endParaRPr lang="en-US" sz="1150" dirty="0"/>
           </a:p>
@@ -7595,7 +7596,7 @@
                 <a:ea typeface="Cambria" pitchFamily="34" charset="-122"/>
                 <a:cs typeface="Cambria" pitchFamily="34" charset="-120"/>
               </a:rPr>
-              <a:t>Ollama  </a:t>
+              <a:t>one llm() helper  </a:t>
             </a:r>
             <a:pPr indent="0" marL="0">
               <a:buNone/>
@@ -7609,7 +7610,7 @@
                 <a:ea typeface="Calibri" pitchFamily="34" charset="-122"/>
                 <a:cs typeface="Calibri" pitchFamily="34" charset="-120"/>
               </a:rPr>
-              <a:t>a local model server: 7B @ 4-bit on the same T4, one model → many agents</a:t>
+              <a:t>one client, six agents — swap gpt-4.1-mini for a gpt-5 reasoning model in one line</a:t>
             </a:r>
             <a:endParaRPr lang="en-US" sz="1300" dirty="0"/>
           </a:p>
@@ -8352,7 +8353,7 @@
                 <a:ea typeface="Courier New" pitchFamily="34" charset="-122"/>
                 <a:cs typeface="Courier New" pitchFamily="34" charset="-120"/>
               </a:rPr>
-              <a:t>HANDS-ON · NOTEBOOK PART 4</a:t>
+              <a:t>HANDS-ON · PART 4 · TAKE-HOME</a:t>
             </a:r>
             <a:endParaRPr lang="en-US" sz="1300" dirty="0"/>
           </a:p>
@@ -8391,7 +8392,7 @@
                 <a:ea typeface="Cambria" pitchFamily="34" charset="-122"/>
                 <a:cs typeface="Cambria" pitchFamily="34" charset="-120"/>
               </a:rPr>
-              <a:t>Ollama · LangGraph · Deep Agents</a:t>
+              <a:t>LangGraph · Deep Agents · debtbuster</a:t>
             </a:r>
             <a:endParaRPr lang="en-US" sz="3600" dirty="0"/>
           </a:p>
@@ -8434,7 +8435,7 @@
                 <a:ea typeface="Calibri" pitchFamily="34" charset="-122"/>
                 <a:cs typeface="Calibri" pitchFamily="34" charset="-120"/>
               </a:rPr>
-              <a:t>Install Ollama on Colab, pull qwen2.5-coder:7b (4-bit) — a stronger brain, same T4</a:t>
+              <a:t>The same QA gates, three different frameworks — and they never change a byte</a:t>
             </a:r>
             <a:endParaRPr lang="en-US" sz="1550" dirty="0"/>
           </a:p>
@@ -8563,7 +8564,7 @@
                 <a:ea typeface="Courier New" pitchFamily="34" charset="-122"/>
                 <a:cs typeface="Courier New" pitchFamily="34" charset="-120"/>
               </a:rPr>
-              <a:t>~60 MINUTES</a:t>
+              <a:t>~50 MINUTES · SELF-PACED</a:t>
             </a:r>
             <a:endParaRPr lang="en-US" sz="1050" dirty="0"/>
           </a:p>
@@ -8739,7 +8740,7 @@
                 <a:ea typeface="Cambria" pitchFamily="34" charset="-122"/>
                 <a:cs typeface="Cambria" pitchFamily="34" charset="-120"/>
               </a:rPr>
-              <a:t>A verified, cooperative agent pipeline — on a free GPU</a:t>
+              <a:t>A verified, cooperative agent pipeline — in one notebook</a:t>
             </a:r>
             <a:endParaRPr lang="en-US" sz="2800" dirty="0"/>
           </a:p>
@@ -8992,7 +8993,7 @@
                 <a:ea typeface="Calibri" pitchFamily="34" charset="-122"/>
                 <a:cs typeface="Calibri" pitchFamily="34" charset="-120"/>
               </a:rPr>
-              <a:t>Verification gates make small models useful  </a:t>
+              <a:t>Verification is what earns the trust  </a:t>
             </a:r>
             <a:pPr indent="0" marL="0">
               <a:buNone/>
@@ -9213,6 +9214,1023 @@
               <a:t>Karthik Shivashankar · karthik13sankar@outlook.com  ·  Adela Nedisan Videsjorden  ·  LLMA4SE 2026</a:t>
             </a:r>
             <a:endParaRPr lang="en-US" sz="1050" dirty="0"/>
+          </a:p>
+        </p:txBody>
+      </p:sp>
+    </p:spTree>
+  </p:cSld>
+  <p:clrMapOvr>
+    <a:masterClrMapping/>
+  </p:clrMapOvr>
+</p:sld>
+</file>
+
+<file path=ppt/slides/slide19.xml><?xml version="1.0" encoding="utf-8"?>
+<p:sld xmlns:a="http://schemas.openxmlformats.org/drawingml/2006/main" xmlns:r="http://schemas.openxmlformats.org/officeDocument/2006/relationships" xmlns:p="http://schemas.openxmlformats.org/presentationml/2006/main">
+  <p:cSld name="Slide 5">
+    <p:bg>
+      <p:bgPr>
+        <a:solidFill>
+          <a:srgbClr val="FFFFFF"/>
+        </a:solidFill>
+      </p:bgPr>
+    </p:bg>
+    <p:spTree>
+      <p:nvGrpSpPr>
+        <p:cNvPr id="1" name=""/>
+        <p:cNvGrpSpPr/>
+        <p:nvPr/>
+      </p:nvGrpSpPr>
+      <p:grpSpPr>
+        <a:xfrm>
+          <a:off x="0" y="0"/>
+          <a:ext cx="0" cy="0"/>
+          <a:chOff x="0" y="0"/>
+          <a:chExt cx="0" cy="0"/>
+        </a:xfrm>
+      </p:grpSpPr>
+      <p:sp>
+        <p:nvSpPr>
+          <p:cNvPr id="2" name="Text 0"/>
+          <p:cNvSpPr/>
+          <p:nvPr/>
+        </p:nvSpPr>
+        <p:spPr>
+          <a:xfrm>
+            <a:off x="502920" y="274320"/>
+            <a:ext cx="8138160" cy="274320"/>
+          </a:xfrm>
+          <a:prstGeom prst="rect">
+            <a:avLst/>
+          </a:prstGeom>
+          <a:noFill/>
+          <a:ln/>
+        </p:spPr>
+        <p:txBody>
+          <a:bodyPr wrap="square" lIns="0" tIns="0" rIns="0" bIns="0" rtlCol="0" anchor="ctr"/>
+          <a:lstStyle/>
+          <a:p>
+            <a:pPr indent="0" marL="0">
+              <a:buNone/>
+            </a:pPr>
+            <a:r>
+              <a:rPr lang="en-US" sz="1100" spc="300" kern="0" dirty="0">
+                <a:solidFill>
+                  <a:srgbClr val="6D28D9"/>
+                </a:solidFill>
+                <a:latin typeface="Courier New" pitchFamily="34" charset="0"/>
+                <a:ea typeface="Courier New" pitchFamily="34" charset="-122"/>
+                <a:cs typeface="Courier New" pitchFamily="34" charset="-120"/>
+              </a:rPr>
+              <a:t>SETUP · THE ONLY HARD SYNC POINT</a:t>
+            </a:r>
+            <a:endParaRPr lang="en-US" sz="1100" dirty="0"/>
+          </a:p>
+        </p:txBody>
+      </p:sp>
+      <p:sp>
+        <p:nvSpPr>
+          <p:cNvPr id="3" name="Text 1"/>
+          <p:cNvSpPr/>
+          <p:nvPr/>
+        </p:nvSpPr>
+        <p:spPr>
+          <a:xfrm>
+            <a:off x="502920" y="530352"/>
+            <a:ext cx="8138160" cy="685800"/>
+          </a:xfrm>
+          <a:prstGeom prst="rect">
+            <a:avLst/>
+          </a:prstGeom>
+          <a:noFill/>
+          <a:ln/>
+        </p:spPr>
+        <p:txBody>
+          <a:bodyPr wrap="square" lIns="0" tIns="0" rIns="0" bIns="0" rtlCol="0" anchor="ctr"/>
+          <a:lstStyle/>
+          <a:p>
+            <a:pPr indent="0" marL="0">
+              <a:buNone/>
+            </a:pPr>
+            <a:r>
+              <a:rPr lang="en-US" sz="3000" b="1" dirty="0">
+                <a:solidFill>
+                  <a:srgbClr val="2A1B3D"/>
+                </a:solidFill>
+                <a:latin typeface="Cambria" pitchFamily="34" charset="0"/>
+                <a:ea typeface="Cambria" pitchFamily="34" charset="-122"/>
+                <a:cs typeface="Cambria" pitchFamily="34" charset="-120"/>
+              </a:rPr>
+              <a:t>Your key, your budget, your brain</a:t>
+            </a:r>
+            <a:endParaRPr lang="en-US" sz="3000" dirty="0"/>
+          </a:p>
+        </p:txBody>
+      </p:sp>
+      <p:sp>
+        <p:nvSpPr>
+          <p:cNvPr id="4" name="Shape 2"/>
+          <p:cNvSpPr/>
+          <p:nvPr/>
+        </p:nvSpPr>
+        <p:spPr>
+          <a:xfrm>
+            <a:off x="502920" y="1417320"/>
+            <a:ext cx="3931920" cy="1463040"/>
+          </a:xfrm>
+          <a:prstGeom prst="roundRect">
+            <a:avLst>
+              <a:gd name="adj" fmla="val 5000"/>
+            </a:avLst>
+          </a:prstGeom>
+          <a:solidFill>
+            <a:srgbClr val="FFFFFF"/>
+          </a:solidFill>
+          <a:ln w="12700">
+            <a:solidFill>
+              <a:srgbClr val="E4DCF5"/>
+            </a:solidFill>
+            <a:prstDash val="solid"/>
+          </a:ln>
+          <a:effectLst>
+            <a:outerShdw sx="100000" sy="100000" kx="0" ky="0" algn="bl" rotWithShape="0" blurRad="88900" dist="25400" dir="5400000">
+              <a:srgbClr val="3A2A55">
+                <a:alpha val="14000"/>
+              </a:srgbClr>
+            </a:outerShdw>
+          </a:effectLst>
+        </p:spPr>
+      </p:sp>
+      <p:sp>
+        <p:nvSpPr>
+          <p:cNvPr id="5" name="Text 3"/>
+          <p:cNvSpPr/>
+          <p:nvPr/>
+        </p:nvSpPr>
+        <p:spPr>
+          <a:xfrm>
+            <a:off x="731520" y="1545336"/>
+            <a:ext cx="2103120" cy="365760"/>
+          </a:xfrm>
+          <a:prstGeom prst="rect">
+            <a:avLst/>
+          </a:prstGeom>
+          <a:noFill/>
+          <a:ln/>
+        </p:spPr>
+        <p:txBody>
+          <a:bodyPr wrap="square" lIns="0" tIns="0" rIns="0" bIns="0" rtlCol="0" anchor="ctr"/>
+          <a:lstStyle/>
+          <a:p>
+            <a:pPr indent="0" marL="0">
+              <a:buNone/>
+            </a:pPr>
+            <a:r>
+              <a:rPr lang="en-US" sz="1600" b="1" dirty="0">
+                <a:solidFill>
+                  <a:srgbClr val="2A1B3D"/>
+                </a:solidFill>
+                <a:latin typeface="Courier New" pitchFamily="34" charset="0"/>
+                <a:ea typeface="Courier New" pitchFamily="34" charset="-122"/>
+                <a:cs typeface="Courier New" pitchFamily="34" charset="-120"/>
+              </a:rPr>
+              <a:t>.env file</a:t>
+            </a:r>
+            <a:endParaRPr lang="en-US" sz="1600" dirty="0"/>
+          </a:p>
+        </p:txBody>
+      </p:sp>
+      <p:sp>
+        <p:nvSpPr>
+          <p:cNvPr id="6" name="Shape 4"/>
+          <p:cNvSpPr/>
+          <p:nvPr/>
+        </p:nvSpPr>
+        <p:spPr>
+          <a:xfrm>
+            <a:off x="2743200" y="1572768"/>
+            <a:ext cx="1508760" cy="310896"/>
+          </a:xfrm>
+          <a:prstGeom prst="roundRect">
+            <a:avLst>
+              <a:gd name="adj" fmla="val 50000"/>
+            </a:avLst>
+          </a:prstGeom>
+          <a:solidFill>
+            <a:srgbClr val="F3EFFB"/>
+          </a:solidFill>
+          <a:ln w="12700">
+            <a:solidFill>
+              <a:srgbClr val="A78BFA"/>
+            </a:solidFill>
+            <a:prstDash val="solid"/>
+          </a:ln>
+        </p:spPr>
+      </p:sp>
+      <p:sp>
+        <p:nvSpPr>
+          <p:cNvPr id="7" name="Text 5"/>
+          <p:cNvSpPr/>
+          <p:nvPr/>
+        </p:nvSpPr>
+        <p:spPr>
+          <a:xfrm>
+            <a:off x="2743200" y="1572768"/>
+            <a:ext cx="1508760" cy="310896"/>
+          </a:xfrm>
+          <a:prstGeom prst="rect">
+            <a:avLst/>
+          </a:prstGeom>
+          <a:noFill/>
+          <a:ln/>
+        </p:spPr>
+        <p:txBody>
+          <a:bodyPr wrap="square" lIns="0" tIns="0" rIns="0" bIns="0" rtlCol="0" anchor="ctr"/>
+          <a:lstStyle/>
+          <a:p>
+            <a:pPr algn="ctr" indent="0" marL="0">
+              <a:buNone/>
+            </a:pPr>
+            <a:r>
+              <a:rPr lang="en-US" sz="850" dirty="0">
+                <a:solidFill>
+                  <a:srgbClr val="6D28D9"/>
+                </a:solidFill>
+                <a:latin typeface="Courier New" pitchFamily="34" charset="0"/>
+                <a:ea typeface="Courier New" pitchFamily="34" charset="-122"/>
+                <a:cs typeface="Courier New" pitchFamily="34" charset="-120"/>
+              </a:rPr>
+              <a:t>Upload</a:t>
+            </a:r>
+            <a:endParaRPr lang="en-US" sz="850" dirty="0"/>
+          </a:p>
+        </p:txBody>
+      </p:sp>
+      <p:sp>
+        <p:nvSpPr>
+          <p:cNvPr id="8" name="Text 6"/>
+          <p:cNvSpPr/>
+          <p:nvPr/>
+        </p:nvSpPr>
+        <p:spPr>
+          <a:xfrm>
+            <a:off x="731520" y="1929384"/>
+            <a:ext cx="3520440" cy="640080"/>
+          </a:xfrm>
+          <a:prstGeom prst="rect">
+            <a:avLst/>
+          </a:prstGeom>
+          <a:noFill/>
+          <a:ln/>
+        </p:spPr>
+        <p:txBody>
+          <a:bodyPr wrap="square" lIns="0" tIns="0" rIns="0" bIns="0" rtlCol="0" anchor="ctr"/>
+          <a:lstStyle/>
+          <a:p>
+            <a:pPr indent="0" marL="0">
+              <a:buNone/>
+            </a:pPr>
+            <a:r>
+              <a:rPr lang="en-US" sz="1050" dirty="0">
+                <a:solidFill>
+                  <a:srgbClr val="3F3F49"/>
+                </a:solidFill>
+                <a:latin typeface="Calibri" pitchFamily="34" charset="0"/>
+                <a:ea typeface="Calibri" pitchFamily="34" charset="-122"/>
+                <a:cs typeface="Calibri" pitchFamily="34" charset="-120"/>
+              </a:rPr>
+              <a:t>Drop a .env into the file sidebar. The notebook parses it — and picks up OPENAI_MODEL while it is there.</a:t>
+            </a:r>
+            <a:endParaRPr lang="en-US" sz="1050" dirty="0"/>
+          </a:p>
+        </p:txBody>
+      </p:sp>
+      <p:sp>
+        <p:nvSpPr>
+          <p:cNvPr id="9" name="Text 7"/>
+          <p:cNvSpPr/>
+          <p:nvPr/>
+        </p:nvSpPr>
+        <p:spPr>
+          <a:xfrm>
+            <a:off x="731520" y="2569464"/>
+            <a:ext cx="3520440" cy="256032"/>
+          </a:xfrm>
+          <a:prstGeom prst="rect">
+            <a:avLst/>
+          </a:prstGeom>
+          <a:noFill/>
+          <a:ln/>
+        </p:spPr>
+        <p:txBody>
+          <a:bodyPr wrap="square" lIns="0" tIns="0" rIns="0" bIns="0" rtlCol="0" anchor="ctr"/>
+          <a:lstStyle/>
+          <a:p>
+            <a:pPr indent="0" marL="0">
+              <a:buNone/>
+            </a:pPr>
+            <a:r>
+              <a:rPr lang="en-US" sz="850" dirty="0">
+                <a:solidFill>
+                  <a:srgbClr val="6D28D9"/>
+                </a:solidFill>
+                <a:latin typeface="Courier New" pitchFamily="34" charset="0"/>
+                <a:ea typeface="Courier New" pitchFamily="34" charset="-122"/>
+                <a:cs typeface="Courier New" pitchFamily="34" charset="-120"/>
+              </a:rPr>
+              <a:t>OPENAI_API_KEY=sk-…</a:t>
+            </a:r>
+            <a:endParaRPr lang="en-US" sz="850" dirty="0"/>
+          </a:p>
+        </p:txBody>
+      </p:sp>
+      <p:sp>
+        <p:nvSpPr>
+          <p:cNvPr id="10" name="Shape 8"/>
+          <p:cNvSpPr/>
+          <p:nvPr/>
+        </p:nvSpPr>
+        <p:spPr>
+          <a:xfrm>
+            <a:off x="4709160" y="1417320"/>
+            <a:ext cx="3931920" cy="1463040"/>
+          </a:xfrm>
+          <a:prstGeom prst="roundRect">
+            <a:avLst>
+              <a:gd name="adj" fmla="val 5000"/>
+            </a:avLst>
+          </a:prstGeom>
+          <a:solidFill>
+            <a:srgbClr val="FFFFFF"/>
+          </a:solidFill>
+          <a:ln w="12700">
+            <a:solidFill>
+              <a:srgbClr val="E4DCF5"/>
+            </a:solidFill>
+            <a:prstDash val="solid"/>
+          </a:ln>
+          <a:effectLst>
+            <a:outerShdw sx="100000" sy="100000" kx="0" ky="0" algn="bl" rotWithShape="0" blurRad="88900" dist="25400" dir="5400000">
+              <a:srgbClr val="3A2A55">
+                <a:alpha val="14000"/>
+              </a:srgbClr>
+            </a:outerShdw>
+          </a:effectLst>
+        </p:spPr>
+      </p:sp>
+      <p:sp>
+        <p:nvSpPr>
+          <p:cNvPr id="11" name="Text 9"/>
+          <p:cNvSpPr/>
+          <p:nvPr/>
+        </p:nvSpPr>
+        <p:spPr>
+          <a:xfrm>
+            <a:off x="4937760" y="1545336"/>
+            <a:ext cx="2103120" cy="365760"/>
+          </a:xfrm>
+          <a:prstGeom prst="rect">
+            <a:avLst/>
+          </a:prstGeom>
+          <a:noFill/>
+          <a:ln/>
+        </p:spPr>
+        <p:txBody>
+          <a:bodyPr wrap="square" lIns="0" tIns="0" rIns="0" bIns="0" rtlCol="0" anchor="ctr"/>
+          <a:lstStyle/>
+          <a:p>
+            <a:pPr indent="0" marL="0">
+              <a:buNone/>
+            </a:pPr>
+            <a:r>
+              <a:rPr lang="en-US" sz="1600" b="1" dirty="0">
+                <a:solidFill>
+                  <a:srgbClr val="2A1B3D"/>
+                </a:solidFill>
+                <a:latin typeface="Courier New" pitchFamily="34" charset="0"/>
+                <a:ea typeface="Courier New" pitchFamily="34" charset="-122"/>
+                <a:cs typeface="Courier New" pitchFamily="34" charset="-120"/>
+              </a:rPr>
+              <a:t>Colab Secrets</a:t>
+            </a:r>
+            <a:endParaRPr lang="en-US" sz="1600" dirty="0"/>
+          </a:p>
+        </p:txBody>
+      </p:sp>
+      <p:sp>
+        <p:nvSpPr>
+          <p:cNvPr id="12" name="Shape 10"/>
+          <p:cNvSpPr/>
+          <p:nvPr/>
+        </p:nvSpPr>
+        <p:spPr>
+          <a:xfrm>
+            <a:off x="6949440" y="1572768"/>
+            <a:ext cx="1508760" cy="310896"/>
+          </a:xfrm>
+          <a:prstGeom prst="roundRect">
+            <a:avLst>
+              <a:gd name="adj" fmla="val 50000"/>
+            </a:avLst>
+          </a:prstGeom>
+          <a:solidFill>
+            <a:srgbClr val="F3EFFB"/>
+          </a:solidFill>
+          <a:ln w="12700">
+            <a:solidFill>
+              <a:srgbClr val="A78BFA"/>
+            </a:solidFill>
+            <a:prstDash val="solid"/>
+          </a:ln>
+        </p:spPr>
+      </p:sp>
+      <p:sp>
+        <p:nvSpPr>
+          <p:cNvPr id="13" name="Text 11"/>
+          <p:cNvSpPr/>
+          <p:nvPr/>
+        </p:nvSpPr>
+        <p:spPr>
+          <a:xfrm>
+            <a:off x="6949440" y="1572768"/>
+            <a:ext cx="1508760" cy="310896"/>
+          </a:xfrm>
+          <a:prstGeom prst="rect">
+            <a:avLst/>
+          </a:prstGeom>
+          <a:noFill/>
+          <a:ln/>
+        </p:spPr>
+        <p:txBody>
+          <a:bodyPr wrap="square" lIns="0" tIns="0" rIns="0" bIns="0" rtlCol="0" anchor="ctr"/>
+          <a:lstStyle/>
+          <a:p>
+            <a:pPr algn="ctr" indent="0" marL="0">
+              <a:buNone/>
+            </a:pPr>
+            <a:r>
+              <a:rPr lang="en-US" sz="850" dirty="0">
+                <a:solidFill>
+                  <a:srgbClr val="6D28D9"/>
+                </a:solidFill>
+                <a:latin typeface="Courier New" pitchFamily="34" charset="0"/>
+                <a:ea typeface="Courier New" pitchFamily="34" charset="-122"/>
+                <a:cs typeface="Courier New" pitchFamily="34" charset="-120"/>
+              </a:rPr>
+              <a:t>Recommended</a:t>
+            </a:r>
+            <a:endParaRPr lang="en-US" sz="850" dirty="0"/>
+          </a:p>
+        </p:txBody>
+      </p:sp>
+      <p:sp>
+        <p:nvSpPr>
+          <p:cNvPr id="14" name="Text 12"/>
+          <p:cNvSpPr/>
+          <p:nvPr/>
+        </p:nvSpPr>
+        <p:spPr>
+          <a:xfrm>
+            <a:off x="4937760" y="1929384"/>
+            <a:ext cx="3520440" cy="640080"/>
+          </a:xfrm>
+          <a:prstGeom prst="rect">
+            <a:avLst/>
+          </a:prstGeom>
+          <a:noFill/>
+          <a:ln/>
+        </p:spPr>
+        <p:txBody>
+          <a:bodyPr wrap="square" lIns="0" tIns="0" rIns="0" bIns="0" rtlCol="0" anchor="ctr"/>
+          <a:lstStyle/>
+          <a:p>
+            <a:pPr indent="0" marL="0">
+              <a:buNone/>
+            </a:pPr>
+            <a:r>
+              <a:rPr lang="en-US" sz="1050" dirty="0">
+                <a:solidFill>
+                  <a:srgbClr val="3F3F49"/>
+                </a:solidFill>
+                <a:latin typeface="Calibri" pitchFamily="34" charset="0"/>
+                <a:ea typeface="Calibri" pitchFamily="34" charset="-122"/>
+                <a:cs typeface="Calibri" pitchFamily="34" charset="-120"/>
+              </a:rPr>
+              <a:t>The 🔑 icon, left sidebar. Add the key, enable notebook access. It never lands in the file you share.</a:t>
+            </a:r>
+            <a:endParaRPr lang="en-US" sz="1050" dirty="0"/>
+          </a:p>
+        </p:txBody>
+      </p:sp>
+      <p:sp>
+        <p:nvSpPr>
+          <p:cNvPr id="15" name="Text 13"/>
+          <p:cNvSpPr/>
+          <p:nvPr/>
+        </p:nvSpPr>
+        <p:spPr>
+          <a:xfrm>
+            <a:off x="4937760" y="2569464"/>
+            <a:ext cx="3520440" cy="256032"/>
+          </a:xfrm>
+          <a:prstGeom prst="rect">
+            <a:avLst/>
+          </a:prstGeom>
+          <a:noFill/>
+          <a:ln/>
+        </p:spPr>
+        <p:txBody>
+          <a:bodyPr wrap="square" lIns="0" tIns="0" rIns="0" bIns="0" rtlCol="0" anchor="ctr"/>
+          <a:lstStyle/>
+          <a:p>
+            <a:pPr indent="0" marL="0">
+              <a:buNone/>
+            </a:pPr>
+            <a:r>
+              <a:rPr lang="en-US" sz="850" dirty="0">
+                <a:solidFill>
+                  <a:srgbClr val="6D28D9"/>
+                </a:solidFill>
+                <a:latin typeface="Courier New" pitchFamily="34" charset="0"/>
+                <a:ea typeface="Courier New" pitchFamily="34" charset="-122"/>
+                <a:cs typeface="Courier New" pitchFamily="34" charset="-120"/>
+              </a:rPr>
+              <a:t>userdata.get("OPENAI_API_KEY")</a:t>
+            </a:r>
+            <a:endParaRPr lang="en-US" sz="850" dirty="0"/>
+          </a:p>
+        </p:txBody>
+      </p:sp>
+      <p:sp>
+        <p:nvSpPr>
+          <p:cNvPr id="16" name="Shape 14"/>
+          <p:cNvSpPr/>
+          <p:nvPr/>
+        </p:nvSpPr>
+        <p:spPr>
+          <a:xfrm>
+            <a:off x="502920" y="3044952"/>
+            <a:ext cx="3931920" cy="1463040"/>
+          </a:xfrm>
+          <a:prstGeom prst="roundRect">
+            <a:avLst>
+              <a:gd name="adj" fmla="val 5000"/>
+            </a:avLst>
+          </a:prstGeom>
+          <a:solidFill>
+            <a:srgbClr val="F3EFFB"/>
+          </a:solidFill>
+          <a:ln w="12700">
+            <a:solidFill>
+              <a:srgbClr val="E4DCF5"/>
+            </a:solidFill>
+            <a:prstDash val="solid"/>
+          </a:ln>
+          <a:effectLst>
+            <a:outerShdw sx="100000" sy="100000" kx="0" ky="0" algn="bl" rotWithShape="0" blurRad="88900" dist="25400" dir="5400000">
+              <a:srgbClr val="3A2A55">
+                <a:alpha val="14000"/>
+              </a:srgbClr>
+            </a:outerShdw>
+          </a:effectLst>
+        </p:spPr>
+      </p:sp>
+      <p:sp>
+        <p:nvSpPr>
+          <p:cNvPr id="17" name="Text 15"/>
+          <p:cNvSpPr/>
+          <p:nvPr/>
+        </p:nvSpPr>
+        <p:spPr>
+          <a:xfrm>
+            <a:off x="731520" y="3172968"/>
+            <a:ext cx="2103120" cy="365760"/>
+          </a:xfrm>
+          <a:prstGeom prst="rect">
+            <a:avLst/>
+          </a:prstGeom>
+          <a:noFill/>
+          <a:ln/>
+        </p:spPr>
+        <p:txBody>
+          <a:bodyPr wrap="square" lIns="0" tIns="0" rIns="0" bIns="0" rtlCol="0" anchor="ctr"/>
+          <a:lstStyle/>
+          <a:p>
+            <a:pPr indent="0" marL="0">
+              <a:buNone/>
+            </a:pPr>
+            <a:r>
+              <a:rPr lang="en-US" sz="1600" b="1" dirty="0">
+                <a:solidFill>
+                  <a:srgbClr val="2A1B3D"/>
+                </a:solidFill>
+                <a:latin typeface="Courier New" pitchFamily="34" charset="0"/>
+                <a:ea typeface="Courier New" pitchFamily="34" charset="-122"/>
+                <a:cs typeface="Courier New" pitchFamily="34" charset="-120"/>
+              </a:rPr>
+              <a:t>Hidden prompt</a:t>
+            </a:r>
+            <a:endParaRPr lang="en-US" sz="1600" dirty="0"/>
+          </a:p>
+        </p:txBody>
+      </p:sp>
+      <p:sp>
+        <p:nvSpPr>
+          <p:cNvPr id="18" name="Shape 16"/>
+          <p:cNvSpPr/>
+          <p:nvPr/>
+        </p:nvSpPr>
+        <p:spPr>
+          <a:xfrm>
+            <a:off x="2743200" y="3200400"/>
+            <a:ext cx="1508760" cy="310896"/>
+          </a:xfrm>
+          <a:prstGeom prst="roundRect">
+            <a:avLst>
+              <a:gd name="adj" fmla="val 50000"/>
+            </a:avLst>
+          </a:prstGeom>
+          <a:solidFill>
+            <a:srgbClr val="F3EFFB"/>
+          </a:solidFill>
+          <a:ln w="12700">
+            <a:solidFill>
+              <a:srgbClr val="A78BFA"/>
+            </a:solidFill>
+            <a:prstDash val="solid"/>
+          </a:ln>
+        </p:spPr>
+      </p:sp>
+      <p:sp>
+        <p:nvSpPr>
+          <p:cNvPr id="19" name="Text 17"/>
+          <p:cNvSpPr/>
+          <p:nvPr/>
+        </p:nvSpPr>
+        <p:spPr>
+          <a:xfrm>
+            <a:off x="2743200" y="3200400"/>
+            <a:ext cx="1508760" cy="310896"/>
+          </a:xfrm>
+          <a:prstGeom prst="rect">
+            <a:avLst/>
+          </a:prstGeom>
+          <a:noFill/>
+          <a:ln/>
+        </p:spPr>
+        <p:txBody>
+          <a:bodyPr wrap="square" lIns="0" tIns="0" rIns="0" bIns="0" rtlCol="0" anchor="ctr"/>
+          <a:lstStyle/>
+          <a:p>
+            <a:pPr algn="ctr" indent="0" marL="0">
+              <a:buNone/>
+            </a:pPr>
+            <a:r>
+              <a:rPr lang="en-US" sz="850" dirty="0">
+                <a:solidFill>
+                  <a:srgbClr val="6D28D9"/>
+                </a:solidFill>
+                <a:latin typeface="Courier New" pitchFamily="34" charset="0"/>
+                <a:ea typeface="Courier New" pitchFamily="34" charset="-122"/>
+                <a:cs typeface="Courier New" pitchFamily="34" charset="-120"/>
+              </a:rPr>
+              <a:t>Fallback</a:t>
+            </a:r>
+            <a:endParaRPr lang="en-US" sz="850" dirty="0"/>
+          </a:p>
+        </p:txBody>
+      </p:sp>
+      <p:sp>
+        <p:nvSpPr>
+          <p:cNvPr id="20" name="Text 18"/>
+          <p:cNvSpPr/>
+          <p:nvPr/>
+        </p:nvSpPr>
+        <p:spPr>
+          <a:xfrm>
+            <a:off x="731520" y="3557016"/>
+            <a:ext cx="3520440" cy="640080"/>
+          </a:xfrm>
+          <a:prstGeom prst="rect">
+            <a:avLst/>
+          </a:prstGeom>
+          <a:noFill/>
+          <a:ln/>
+        </p:spPr>
+        <p:txBody>
+          <a:bodyPr wrap="square" lIns="0" tIns="0" rIns="0" bIns="0" rtlCol="0" anchor="ctr"/>
+          <a:lstStyle/>
+          <a:p>
+            <a:pPr indent="0" marL="0">
+              <a:buNone/>
+            </a:pPr>
+            <a:r>
+              <a:rPr lang="en-US" sz="1050" dirty="0">
+                <a:solidFill>
+                  <a:srgbClr val="3F3F49"/>
+                </a:solidFill>
+                <a:latin typeface="Calibri" pitchFamily="34" charset="0"/>
+                <a:ea typeface="Calibri" pitchFamily="34" charset="-122"/>
+                <a:cs typeface="Calibri" pitchFamily="34" charset="-120"/>
+              </a:rPr>
+              <a:t>No file, no secret? The notebook asks, with the input masked. Never paste a key into a code cell.</a:t>
+            </a:r>
+            <a:endParaRPr lang="en-US" sz="1050" dirty="0"/>
+          </a:p>
+        </p:txBody>
+      </p:sp>
+      <p:sp>
+        <p:nvSpPr>
+          <p:cNvPr id="21" name="Text 19"/>
+          <p:cNvSpPr/>
+          <p:nvPr/>
+        </p:nvSpPr>
+        <p:spPr>
+          <a:xfrm>
+            <a:off x="731520" y="4197096"/>
+            <a:ext cx="3520440" cy="256032"/>
+          </a:xfrm>
+          <a:prstGeom prst="rect">
+            <a:avLst/>
+          </a:prstGeom>
+          <a:noFill/>
+          <a:ln/>
+        </p:spPr>
+        <p:txBody>
+          <a:bodyPr wrap="square" lIns="0" tIns="0" rIns="0" bIns="0" rtlCol="0" anchor="ctr"/>
+          <a:lstStyle/>
+          <a:p>
+            <a:pPr indent="0" marL="0">
+              <a:buNone/>
+            </a:pPr>
+            <a:r>
+              <a:rPr lang="en-US" sz="850" dirty="0">
+                <a:solidFill>
+                  <a:srgbClr val="6D28D9"/>
+                </a:solidFill>
+                <a:latin typeface="Courier New" pitchFamily="34" charset="0"/>
+                <a:ea typeface="Courier New" pitchFamily="34" charset="-122"/>
+                <a:cs typeface="Courier New" pitchFamily="34" charset="-120"/>
+              </a:rPr>
+              <a:t>getpass.getpass()</a:t>
+            </a:r>
+            <a:endParaRPr lang="en-US" sz="850" dirty="0"/>
+          </a:p>
+        </p:txBody>
+      </p:sp>
+      <p:sp>
+        <p:nvSpPr>
+          <p:cNvPr id="22" name="Shape 20"/>
+          <p:cNvSpPr/>
+          <p:nvPr/>
+        </p:nvSpPr>
+        <p:spPr>
+          <a:xfrm>
+            <a:off x="4709160" y="3044952"/>
+            <a:ext cx="3931920" cy="1463040"/>
+          </a:xfrm>
+          <a:prstGeom prst="roundRect">
+            <a:avLst>
+              <a:gd name="adj" fmla="val 5000"/>
+            </a:avLst>
+          </a:prstGeom>
+          <a:solidFill>
+            <a:srgbClr val="F3EFFB"/>
+          </a:solidFill>
+          <a:ln w="12700">
+            <a:solidFill>
+              <a:srgbClr val="E4DCF5"/>
+            </a:solidFill>
+            <a:prstDash val="solid"/>
+          </a:ln>
+          <a:effectLst>
+            <a:outerShdw sx="100000" sy="100000" kx="0" ky="0" algn="bl" rotWithShape="0" blurRad="88900" dist="25400" dir="5400000">
+              <a:srgbClr val="3A2A55">
+                <a:alpha val="14000"/>
+              </a:srgbClr>
+            </a:outerShdw>
+          </a:effectLst>
+        </p:spPr>
+      </p:sp>
+      <p:sp>
+        <p:nvSpPr>
+          <p:cNvPr id="23" name="Text 21"/>
+          <p:cNvSpPr/>
+          <p:nvPr/>
+        </p:nvSpPr>
+        <p:spPr>
+          <a:xfrm>
+            <a:off x="4937760" y="3172968"/>
+            <a:ext cx="2103120" cy="365760"/>
+          </a:xfrm>
+          <a:prstGeom prst="rect">
+            <a:avLst/>
+          </a:prstGeom>
+          <a:noFill/>
+          <a:ln/>
+        </p:spPr>
+        <p:txBody>
+          <a:bodyPr wrap="square" lIns="0" tIns="0" rIns="0" bIns="0" rtlCol="0" anchor="ctr"/>
+          <a:lstStyle/>
+          <a:p>
+            <a:pPr indent="0" marL="0">
+              <a:buNone/>
+            </a:pPr>
+            <a:r>
+              <a:rPr lang="en-US" sz="1600" b="1" dirty="0">
+                <a:solidFill>
+                  <a:srgbClr val="2A1B3D"/>
+                </a:solidFill>
+                <a:latin typeface="Courier New" pitchFamily="34" charset="0"/>
+                <a:ea typeface="Courier New" pitchFamily="34" charset="-122"/>
+                <a:cs typeface="Courier New" pitchFamily="34" charset="-120"/>
+              </a:rPr>
+              <a:t>The cost meter</a:t>
+            </a:r>
+            <a:endParaRPr lang="en-US" sz="1600" dirty="0"/>
+          </a:p>
+        </p:txBody>
+      </p:sp>
+      <p:sp>
+        <p:nvSpPr>
+          <p:cNvPr id="24" name="Shape 22"/>
+          <p:cNvSpPr/>
+          <p:nvPr/>
+        </p:nvSpPr>
+        <p:spPr>
+          <a:xfrm>
+            <a:off x="6949440" y="3200400"/>
+            <a:ext cx="1508760" cy="310896"/>
+          </a:xfrm>
+          <a:prstGeom prst="roundRect">
+            <a:avLst>
+              <a:gd name="adj" fmla="val 50000"/>
+            </a:avLst>
+          </a:prstGeom>
+          <a:solidFill>
+            <a:srgbClr val="F3EFFB"/>
+          </a:solidFill>
+          <a:ln w="12700">
+            <a:solidFill>
+              <a:srgbClr val="A78BFA"/>
+            </a:solidFill>
+            <a:prstDash val="solid"/>
+          </a:ln>
+        </p:spPr>
+      </p:sp>
+      <p:sp>
+        <p:nvSpPr>
+          <p:cNvPr id="25" name="Text 23"/>
+          <p:cNvSpPr/>
+          <p:nvPr/>
+        </p:nvSpPr>
+        <p:spPr>
+          <a:xfrm>
+            <a:off x="6949440" y="3200400"/>
+            <a:ext cx="1508760" cy="310896"/>
+          </a:xfrm>
+          <a:prstGeom prst="rect">
+            <a:avLst/>
+          </a:prstGeom>
+          <a:noFill/>
+          <a:ln/>
+        </p:spPr>
+        <p:txBody>
+          <a:bodyPr wrap="square" lIns="0" tIns="0" rIns="0" bIns="0" rtlCol="0" anchor="ctr"/>
+          <a:lstStyle/>
+          <a:p>
+            <a:pPr algn="ctr" indent="0" marL="0">
+              <a:buNone/>
+            </a:pPr>
+            <a:r>
+              <a:rPr lang="en-US" sz="850" dirty="0">
+                <a:solidFill>
+                  <a:srgbClr val="6D28D9"/>
+                </a:solidFill>
+                <a:latin typeface="Courier New" pitchFamily="34" charset="0"/>
+                <a:ea typeface="Courier New" pitchFamily="34" charset="-122"/>
+                <a:cs typeface="Courier New" pitchFamily="34" charset="-120"/>
+              </a:rPr>
+              <a:t>Budget</a:t>
+            </a:r>
+            <a:endParaRPr lang="en-US" sz="850" dirty="0"/>
+          </a:p>
+        </p:txBody>
+      </p:sp>
+      <p:sp>
+        <p:nvSpPr>
+          <p:cNvPr id="26" name="Text 24"/>
+          <p:cNvSpPr/>
+          <p:nvPr/>
+        </p:nvSpPr>
+        <p:spPr>
+          <a:xfrm>
+            <a:off x="4937760" y="3557016"/>
+            <a:ext cx="3520440" cy="640080"/>
+          </a:xfrm>
+          <a:prstGeom prst="rect">
+            <a:avLst/>
+          </a:prstGeom>
+          <a:noFill/>
+          <a:ln/>
+        </p:spPr>
+        <p:txBody>
+          <a:bodyPr wrap="square" lIns="0" tIns="0" rIns="0" bIns="0" rtlCol="0" anchor="ctr"/>
+          <a:lstStyle/>
+          <a:p>
+            <a:pPr indent="0" marL="0">
+              <a:buNone/>
+            </a:pPr>
+            <a:r>
+              <a:rPr lang="en-US" sz="1050" dirty="0">
+                <a:solidFill>
+                  <a:srgbClr val="3F3F49"/>
+                </a:solidFill>
+                <a:latin typeface="Calibri" pitchFamily="34" charset="0"/>
+                <a:ea typeface="Calibri" pitchFamily="34" charset="-122"/>
+                <a:cs typeface="Calibri" pitchFamily="34" charset="-120"/>
+              </a:rPr>
+              <a:t>Every call is counted. The whole notebook costs roughly $0.05–0.25 on gpt-4.1-mini. Check any time.</a:t>
+            </a:r>
+            <a:endParaRPr lang="en-US" sz="1050" dirty="0"/>
+          </a:p>
+        </p:txBody>
+      </p:sp>
+      <p:sp>
+        <p:nvSpPr>
+          <p:cNvPr id="27" name="Text 25"/>
+          <p:cNvSpPr/>
+          <p:nvPr/>
+        </p:nvSpPr>
+        <p:spPr>
+          <a:xfrm>
+            <a:off x="4937760" y="4197096"/>
+            <a:ext cx="3520440" cy="256032"/>
+          </a:xfrm>
+          <a:prstGeom prst="rect">
+            <a:avLst/>
+          </a:prstGeom>
+          <a:noFill/>
+          <a:ln/>
+        </p:spPr>
+        <p:txBody>
+          <a:bodyPr wrap="square" lIns="0" tIns="0" rIns="0" bIns="0" rtlCol="0" anchor="ctr"/>
+          <a:lstStyle/>
+          <a:p>
+            <a:pPr indent="0" marL="0">
+              <a:buNone/>
+            </a:pPr>
+            <a:r>
+              <a:rPr lang="en-US" sz="850" dirty="0">
+                <a:solidFill>
+                  <a:srgbClr val="6D28D9"/>
+                </a:solidFill>
+                <a:latin typeface="Courier New" pitchFamily="34" charset="0"/>
+                <a:ea typeface="Courier New" pitchFamily="34" charset="-122"/>
+                <a:cs typeface="Courier New" pitchFamily="34" charset="-120"/>
+              </a:rPr>
+              <a:t>cost_report()</a:t>
+            </a:r>
+            <a:endParaRPr lang="en-US" sz="850" dirty="0"/>
+          </a:p>
+        </p:txBody>
+      </p:sp>
+      <p:sp>
+        <p:nvSpPr>
+          <p:cNvPr id="28" name="Text 26"/>
+          <p:cNvSpPr/>
+          <p:nvPr/>
+        </p:nvSpPr>
+        <p:spPr>
+          <a:xfrm>
+            <a:off x="502920" y="4709160"/>
+            <a:ext cx="8138160" cy="320040"/>
+          </a:xfrm>
+          <a:prstGeom prst="rect">
+            <a:avLst/>
+          </a:prstGeom>
+          <a:noFill/>
+          <a:ln/>
+        </p:spPr>
+        <p:txBody>
+          <a:bodyPr wrap="square" lIns="0" tIns="0" rIns="0" bIns="0" rtlCol="0" anchor="ctr"/>
+          <a:lstStyle/>
+          <a:p>
+            <a:pPr algn="ctr" indent="0" marL="0">
+              <a:buNone/>
+            </a:pPr>
+            <a:r>
+              <a:rPr lang="en-US" sz="1400" i="1" dirty="0">
+                <a:solidFill>
+                  <a:srgbClr val="6D28D9"/>
+                </a:solidFill>
+                <a:latin typeface="Calibri" pitchFamily="34" charset="0"/>
+                <a:ea typeface="Calibri" pitchFamily="34" charset="-122"/>
+                <a:cs typeface="Calibri" pitchFamily="34" charset="-120"/>
+              </a:rPr>
+              <a:t>No GPU required. The brain is an API call — one llm() function that all six of today's agents go through.</a:t>
+            </a:r>
+            <a:endParaRPr lang="en-US" sz="1400" dirty="0"/>
           </a:p>
         </p:txBody>
       </p:sp>
@@ -9530,7 +10548,7 @@
                 <a:ea typeface="Courier New" pitchFamily="34" charset="-122"/>
                 <a:cs typeface="Courier New" pitchFamily="34" charset="-120"/>
               </a:rPr>
-              <a:t>15:00 – 16:00</a:t>
+              <a:t>15:15 – 16:05</a:t>
             </a:r>
             <a:endParaRPr lang="en-US" sz="1200" dirty="0"/>
           </a:p>
@@ -9569,7 +10587,7 @@
                 <a:ea typeface="Courier New" pitchFamily="34" charset="-122"/>
                 <a:cs typeface="Courier New" pitchFamily="34" charset="-120"/>
               </a:rPr>
-              <a:t>notebook · Part 1</a:t>
+              <a:t>one notebook · Part 1</a:t>
             </a:r>
             <a:endParaRPr lang="en-US" sz="950" dirty="0"/>
           </a:p>
@@ -9779,7 +10797,7 @@
                 <a:ea typeface="Courier New" pitchFamily="34" charset="-122"/>
                 <a:cs typeface="Courier New" pitchFamily="34" charset="-120"/>
               </a:rPr>
-              <a:t>16:05 – 17:15</a:t>
+              <a:t>16:10 – 17:15</a:t>
             </a:r>
             <a:endParaRPr lang="en-US" sz="1200" dirty="0"/>
           </a:p>
@@ -9818,7 +10836,7 @@
                 <a:ea typeface="Courier New" pitchFamily="34" charset="-122"/>
                 <a:cs typeface="Courier New" pitchFamily="34" charset="-120"/>
               </a:rPr>
-              <a:t>notebook · Part 2</a:t>
+              <a:t>one notebook · Part 2</a:t>
             </a:r>
             <a:endParaRPr lang="en-US" sz="950" dirty="0"/>
           </a:p>
@@ -10028,7 +11046,7 @@
                 <a:ea typeface="Courier New" pitchFamily="34" charset="-122"/>
                 <a:cs typeface="Courier New" pitchFamily="34" charset="-120"/>
               </a:rPr>
-              <a:t>17:20 – 18:00</a:t>
+              <a:t>17:20 – 17:55</a:t>
             </a:r>
             <a:endParaRPr lang="en-US" sz="1200" dirty="0"/>
           </a:p>
@@ -10067,7 +11085,7 @@
                 <a:ea typeface="Courier New" pitchFamily="34" charset="-122"/>
                 <a:cs typeface="Courier New" pitchFamily="34" charset="-120"/>
               </a:rPr>
-              <a:t>notebook · Part 3</a:t>
+              <a:t>one notebook · Part 3</a:t>
             </a:r>
             <a:endParaRPr lang="en-US" sz="950" dirty="0"/>
           </a:p>
@@ -10106,7 +11124,7 @@
                 <a:ea typeface="Courier New" pitchFamily="34" charset="-122"/>
                 <a:cs typeface="Courier New" pitchFamily="34" charset="-120"/>
               </a:rPr>
-              <a:t>Setup now: colab.research.google.com → open Part 1 → Runtime → Change runtime type → T4 GPU</a:t>
+              <a:t>Setup now: colab.research.google.com → upload the notebook → run Part 0. No GPU needed.</a:t>
             </a:r>
             <a:endParaRPr lang="en-US" sz="1050" dirty="0"/>
           </a:p>
@@ -12239,7 +13257,7 @@
                 <a:ea typeface="Courier New" pitchFamily="34" charset="-122"/>
                 <a:cs typeface="Courier New" pitchFamily="34" charset="-120"/>
               </a:rPr>
-              <a:t>github.com/KarthikShivasankar</a:t>
+              <a:t>pip install ml-code-smell-detector</a:t>
             </a:r>
             <a:endParaRPr lang="en-US" sz="850" dirty="0"/>
           </a:p>
@@ -12730,7 +13748,7 @@
                 <a:ea typeface="Calibri" pitchFamily="34" charset="-122"/>
                 <a:cs typeface="Calibri" pitchFamily="34" charset="-120"/>
               </a:rPr>
-              <a:t>Any LLM behind one function call. Today: Qwen2.5-Coder-1.5B — small enough for a free Colab T4.</a:t>
+              <a:t>Any LLM behind one function call. Today: the OpenAI API — change the model on line one, nothing else.</a:t>
             </a:r>
             <a:endParaRPr lang="en-US" sz="1080" dirty="0"/>
           </a:p>
@@ -13658,7 +14676,7 @@
                 <a:ea typeface="Calibri" pitchFamily="34" charset="-122"/>
                 <a:cs typeface="Calibri" pitchFamily="34" charset="-120"/>
               </a:rPr>
-              <a:t>This split is what lets a 1.5-billion-parameter model do useful engineering work.</a:t>
+              <a:t>This split is what makes an agent auditable: every claim traces back to a tool that measured it.</a:t>
             </a:r>
             <a:endParaRPr lang="en-US" sz="1400" dirty="0"/>
           </a:p>
@@ -13765,7 +14783,7 @@
                 <a:ea typeface="Courier New" pitchFamily="34" charset="-122"/>
                 <a:cs typeface="Courier New" pitchFamily="34" charset="-120"/>
               </a:rPr>
-              <a:t>HANDS-ON · NOTEBOOK PART 1</a:t>
+              <a:t>HANDS-ON · PART 1</a:t>
             </a:r>
             <a:endParaRPr lang="en-US" sz="1300" dirty="0"/>
           </a:p>
@@ -13889,7 +14907,7 @@
                 <a:ea typeface="Calibri" pitchFamily="34" charset="-122"/>
                 <a:cs typeface="Calibri" pitchFamily="34" charset="-120"/>
               </a:rPr>
-              <a:t>Load the 1.5B model, build the Agent class, run your first audit</a:t>
+              <a:t>One llm() helper, the Agent class, and your first structured JSON audit</a:t>
             </a:r>
             <a:endParaRPr lang="en-US" sz="1550" dirty="0"/>
           </a:p>
@@ -13997,7 +15015,7 @@
                 <a:ea typeface="Courier New" pitchFamily="34" charset="-122"/>
                 <a:cs typeface="Courier New" pitchFamily="34" charset="-120"/>
               </a:rPr>
-              <a:t>~45 MINUTES</a:t>
+              <a:t>~50 MINUTES</a:t>
             </a:r>
             <a:endParaRPr lang="en-US" sz="1050" dirty="0"/>
           </a:p>

--- a/LLMA4SE_Workshop4_Slides.pptx
+++ b/LLMA4SE_Workshop4_Slides.pptx
@@ -8,6 +8,7 @@
     <p:sldId id="256" r:id="rId2"/>
     <p:sldId id="257" r:id="rId3"/>
     <p:sldId id="274" r:id="rId25"/>
+    <p:sldId id="275" r:id="rId26"/>
     <p:sldId id="258" r:id="rId4"/>
     <p:sldId id="259" r:id="rId5"/>
     <p:sldId id="260" r:id="rId6"/>
@@ -2797,6 +2798,1382 @@
 
 <file path=ppt/slides/slide10.xml><?xml version="1.0" encoding="utf-8"?>
 <p:sld xmlns:a="http://schemas.openxmlformats.org/drawingml/2006/main" xmlns:r="http://schemas.openxmlformats.org/officeDocument/2006/relationships" xmlns:p="http://schemas.openxmlformats.org/presentationml/2006/main">
+  <p:cSld name="Slide 8">
+    <p:bg>
+      <p:bgPr>
+        <a:solidFill>
+          <a:srgbClr val="2A1B3D"/>
+        </a:solidFill>
+      </p:bgPr>
+    </p:bg>
+    <p:spTree>
+      <p:nvGrpSpPr>
+        <p:cNvPr id="1" name=""/>
+        <p:cNvGrpSpPr/>
+        <p:nvPr/>
+      </p:nvGrpSpPr>
+      <p:grpSpPr>
+        <a:xfrm>
+          <a:off x="0" y="0"/>
+          <a:ext cx="0" cy="0"/>
+          <a:chOff x="0" y="0"/>
+          <a:chExt cx="0" cy="0"/>
+        </a:xfrm>
+      </p:grpSpPr>
+      <p:sp>
+        <p:nvSpPr>
+          <p:cNvPr id="2" name="Text 0"/>
+          <p:cNvSpPr/>
+          <p:nvPr/>
+        </p:nvSpPr>
+        <p:spPr>
+          <a:xfrm>
+            <a:off x="548640" y="685800"/>
+            <a:ext cx="914400" cy="731520"/>
+          </a:xfrm>
+          <a:prstGeom prst="rect">
+            <a:avLst/>
+          </a:prstGeom>
+          <a:noFill/>
+          <a:ln/>
+        </p:spPr>
+        <p:txBody>
+          <a:bodyPr wrap="square" lIns="0" tIns="0" rIns="0" bIns="0" rtlCol="0" anchor="ctr"/>
+          <a:lstStyle/>
+          <a:p>
+            <a:pPr indent="0" marL="0">
+              <a:buNone/>
+            </a:pPr>
+            <a:r>
+              <a:rPr lang="en-US" sz="4000" dirty="0">
+                <a:solidFill>
+                  <a:srgbClr val="000000"/>
+                </a:solidFill>
+              </a:rPr>
+              <a:t>⌨️</a:t>
+            </a:r>
+            <a:endParaRPr lang="en-US" sz="4000" dirty="0"/>
+          </a:p>
+        </p:txBody>
+      </p:sp>
+      <p:sp>
+        <p:nvSpPr>
+          <p:cNvPr id="3" name="Text 1"/>
+          <p:cNvSpPr/>
+          <p:nvPr/>
+        </p:nvSpPr>
+        <p:spPr>
+          <a:xfrm>
+            <a:off x="548640" y="1463040"/>
+            <a:ext cx="8046720" cy="320040"/>
+          </a:xfrm>
+          <a:prstGeom prst="rect">
+            <a:avLst/>
+          </a:prstGeom>
+          <a:noFill/>
+          <a:ln/>
+        </p:spPr>
+        <p:txBody>
+          <a:bodyPr wrap="square" lIns="0" tIns="0" rIns="0" bIns="0" rtlCol="0" anchor="ctr"/>
+          <a:lstStyle/>
+          <a:p>
+            <a:pPr indent="0" marL="0">
+              <a:buNone/>
+            </a:pPr>
+            <a:r>
+              <a:rPr lang="en-US" sz="1300" spc="300" kern="0" dirty="0">
+                <a:solidFill>
+                  <a:srgbClr val="A78BFA"/>
+                </a:solidFill>
+                <a:latin typeface="Courier New" pitchFamily="34" charset="0"/>
+                <a:ea typeface="Courier New" pitchFamily="34" charset="-122"/>
+                <a:cs typeface="Courier New" pitchFamily="34" charset="-120"/>
+              </a:rPr>
+              <a:t>HANDS-ON · PART 1</a:t>
+            </a:r>
+            <a:endParaRPr lang="en-US" sz="1300" dirty="0"/>
+          </a:p>
+        </p:txBody>
+      </p:sp>
+      <p:sp>
+        <p:nvSpPr>
+          <p:cNvPr id="4" name="Text 2"/>
+          <p:cNvSpPr/>
+          <p:nvPr/>
+        </p:nvSpPr>
+        <p:spPr>
+          <a:xfrm>
+            <a:off x="548640" y="1828800"/>
+            <a:ext cx="8046720" cy="777240"/>
+          </a:xfrm>
+          <a:prstGeom prst="rect">
+            <a:avLst/>
+          </a:prstGeom>
+          <a:noFill/>
+          <a:ln/>
+        </p:spPr>
+        <p:txBody>
+          <a:bodyPr wrap="square" lIns="0" tIns="0" rIns="0" bIns="0" rtlCol="0" anchor="ctr"/>
+          <a:lstStyle/>
+          <a:p>
+            <a:pPr indent="0" marL="0">
+              <a:buNone/>
+            </a:pPr>
+            <a:r>
+              <a:rPr lang="en-US" sz="3600" b="1" dirty="0">
+                <a:solidFill>
+                  <a:srgbClr val="FFFFFF"/>
+                </a:solidFill>
+                <a:latin typeface="Cambria" pitchFamily="34" charset="0"/>
+                <a:ea typeface="Cambria" pitchFamily="34" charset="-122"/>
+                <a:cs typeface="Cambria" pitchFamily="34" charset="-120"/>
+              </a:rPr>
+              <a:t>Build the Code Auditor</a:t>
+            </a:r>
+            <a:endParaRPr lang="en-US" sz="3600" dirty="0"/>
+          </a:p>
+        </p:txBody>
+      </p:sp>
+      <p:sp>
+        <p:nvSpPr>
+          <p:cNvPr id="5" name="Text 3"/>
+          <p:cNvSpPr/>
+          <p:nvPr/>
+        </p:nvSpPr>
+        <p:spPr>
+          <a:xfrm>
+            <a:off x="594360" y="2697480"/>
+            <a:ext cx="6949440" cy="1463040"/>
+          </a:xfrm>
+          <a:prstGeom prst="rect">
+            <a:avLst/>
+          </a:prstGeom>
+          <a:noFill/>
+          <a:ln/>
+        </p:spPr>
+        <p:txBody>
+          <a:bodyPr wrap="square" lIns="0" tIns="0" rIns="0" bIns="0" rtlCol="0" anchor="ctr"/>
+          <a:lstStyle/>
+          <a:p>
+            <a:pPr marL="342900" indent="-342900">
+              <a:lnSpc>
+                <a:spcPts val="2600"/>
+              </a:lnSpc>
+              <a:buSzPct val="100000"/>
+              <a:buChar char="→"/>
+            </a:pPr>
+            <a:r>
+              <a:rPr lang="en-US" sz="1550" dirty="0">
+                <a:solidFill>
+                  <a:srgbClr val="E4DAF6"/>
+                </a:solidFill>
+                <a:latin typeface="Calibri" pitchFamily="34" charset="0"/>
+                <a:ea typeface="Calibri" pitchFamily="34" charset="-122"/>
+                <a:cs typeface="Calibri" pitchFamily="34" charset="-120"/>
+              </a:rPr>
+              <a:t>Meet the patient: a working-but-smelly inventory module (+ its test safety-net)</a:t>
+            </a:r>
+            <a:endParaRPr lang="en-US" sz="1550" dirty="0"/>
+          </a:p>
+          <a:p>
+            <a:pPr marL="342900" indent="-342900">
+              <a:lnSpc>
+                <a:spcPts val="2600"/>
+              </a:lnSpc>
+              <a:buSzPct val="100000"/>
+              <a:buChar char="→"/>
+            </a:pPr>
+            <a:r>
+              <a:rPr lang="en-US" sz="1550" dirty="0">
+                <a:solidFill>
+                  <a:srgbClr val="E4DAF6"/>
+                </a:solidFill>
+                <a:latin typeface="Calibri" pitchFamily="34" charset="0"/>
+                <a:ea typeface="Calibri" pitchFamily="34" charset="-122"/>
+                <a:cs typeface="Calibri" pitchFamily="34" charset="-120"/>
+              </a:rPr>
+              <a:t>Wrap radon, pylint, PyExamine &amp; MLScent as agent tools</a:t>
+            </a:r>
+            <a:endParaRPr lang="en-US" sz="1550" dirty="0"/>
+          </a:p>
+          <a:p>
+            <a:pPr marL="342900" indent="-342900">
+              <a:lnSpc>
+                <a:spcPts val="2600"/>
+              </a:lnSpc>
+              <a:buSzPct val="100000"/>
+              <a:buChar char="→"/>
+            </a:pPr>
+            <a:r>
+              <a:rPr lang="en-US" sz="1550" dirty="0">
+                <a:solidFill>
+                  <a:srgbClr val="E4DAF6"/>
+                </a:solidFill>
+                <a:latin typeface="Calibri" pitchFamily="34" charset="0"/>
+                <a:ea typeface="Calibri" pitchFamily="34" charset="-122"/>
+                <a:cs typeface="Calibri" pitchFamily="34" charset="-120"/>
+              </a:rPr>
+              <a:t>One llm() helper, the Agent class, and your first structured JSON audit</a:t>
+            </a:r>
+            <a:endParaRPr lang="en-US" sz="1550" dirty="0"/>
+          </a:p>
+          <a:p>
+            <a:pPr marL="342900" indent="-342900">
+              <a:lnSpc>
+                <a:spcPts val="2600"/>
+              </a:lnSpc>
+              <a:buSzPct val="100000"/>
+              <a:buChar char="→"/>
+            </a:pPr>
+            <a:r>
+              <a:rPr lang="en-US" sz="1550" dirty="0">
+                <a:solidFill>
+                  <a:srgbClr val="E4DAF6"/>
+                </a:solidFill>
+                <a:latin typeface="Calibri" pitchFamily="34" charset="0"/>
+                <a:ea typeface="Calibri" pitchFamily="34" charset="-122"/>
+                <a:cs typeface="Calibri" pitchFamily="34" charset="-120"/>
+              </a:rPr>
+              <a:t>Same skeleton, new eyes: an ML Auditor that catches == np.nan &amp; missing zero_grad()</a:t>
+            </a:r>
+            <a:endParaRPr lang="en-US" sz="1550" dirty="0"/>
+          </a:p>
+          <a:p>
+            <a:pPr marL="342900" indent="-342900">
+              <a:lnSpc>
+                <a:spcPts val="2600"/>
+              </a:lnSpc>
+              <a:buSzPct val="100000"/>
+              <a:buChar char="→"/>
+            </a:pPr>
+            <a:r>
+              <a:rPr lang="en-US" sz="1550" dirty="0">
+                <a:solidFill>
+                  <a:srgbClr val="E4DAF6"/>
+                </a:solidFill>
+                <a:latin typeface="Calibri" pitchFamily="34" charset="0"/>
+                <a:ea typeface="Calibri" pitchFamily="34" charset="-122"/>
+                <a:cs typeface="Calibri" pitchFamily="34" charset="-120"/>
+              </a:rPr>
+              <a:t>Exercise 1: give the auditor a magic-number AST detector</a:t>
+            </a:r>
+            <a:endParaRPr lang="en-US" sz="1550" dirty="0"/>
+          </a:p>
+        </p:txBody>
+      </p:sp>
+      <p:sp>
+        <p:nvSpPr>
+          <p:cNvPr id="6" name="Shape 4"/>
+          <p:cNvSpPr/>
+          <p:nvPr/>
+        </p:nvSpPr>
+        <p:spPr>
+          <a:xfrm>
+            <a:off x="548640" y="4434840"/>
+            <a:ext cx="1554480" cy="310896"/>
+          </a:xfrm>
+          <a:prstGeom prst="roundRect">
+            <a:avLst>
+              <a:gd name="adj" fmla="val 50000"/>
+            </a:avLst>
+          </a:prstGeom>
+          <a:solidFill>
+            <a:srgbClr val="3D2A5C"/>
+          </a:solidFill>
+          <a:ln w="12700">
+            <a:solidFill>
+              <a:srgbClr val="6D28D9"/>
+            </a:solidFill>
+            <a:prstDash val="solid"/>
+          </a:ln>
+        </p:spPr>
+        <p:txBody>
+          <a:bodyPr/>
+          <a:p/>
+        </p:txBody>
+      </p:sp>
+      <p:sp>
+        <p:nvSpPr>
+          <p:cNvPr id="7" name="Text 5"/>
+          <p:cNvSpPr/>
+          <p:nvPr/>
+        </p:nvSpPr>
+        <p:spPr>
+          <a:xfrm>
+            <a:off x="548640" y="4434840"/>
+            <a:ext cx="1554480" cy="310896"/>
+          </a:xfrm>
+          <a:prstGeom prst="rect">
+            <a:avLst/>
+          </a:prstGeom>
+          <a:noFill/>
+          <a:ln/>
+        </p:spPr>
+        <p:txBody>
+          <a:bodyPr wrap="square" lIns="0" tIns="0" rIns="0" bIns="0" rtlCol="0" anchor="ctr"/>
+          <a:lstStyle/>
+          <a:p>
+            <a:pPr algn="ctr" indent="0" marL="0">
+              <a:buNone/>
+            </a:pPr>
+            <a:r>
+              <a:rPr lang="en-US" sz="1050" b="1" dirty="0">
+                <a:solidFill>
+                  <a:srgbClr val="E9DFFF"/>
+                </a:solidFill>
+                <a:latin typeface="Courier New" pitchFamily="34" charset="0"/>
+                <a:ea typeface="Courier New" pitchFamily="34" charset="-122"/>
+                <a:cs typeface="Courier New" pitchFamily="34" charset="-120"/>
+              </a:rPr>
+              <a:t>~50 MINUTES</a:t>
+            </a:r>
+            <a:endParaRPr lang="en-US" sz="1050" dirty="0"/>
+          </a:p>
+        </p:txBody>
+      </p:sp>
+      <p:sp>
+        <p:nvSpPr>
+          <p:cNvPr id="8" name="Shape 6"/>
+          <p:cNvSpPr/>
+          <p:nvPr/>
+        </p:nvSpPr>
+        <p:spPr>
+          <a:xfrm>
+            <a:off x="2240280" y="4434840"/>
+            <a:ext cx="3749040" cy="310896"/>
+          </a:xfrm>
+          <a:prstGeom prst="roundRect">
+            <a:avLst>
+              <a:gd name="adj" fmla="val 50000"/>
+            </a:avLst>
+          </a:prstGeom>
+          <a:solidFill>
+            <a:srgbClr val="3D2A5C"/>
+          </a:solidFill>
+          <a:ln w="12700">
+            <a:solidFill>
+              <a:srgbClr val="6D28D9"/>
+            </a:solidFill>
+            <a:prstDash val="solid"/>
+          </a:ln>
+        </p:spPr>
+        <p:txBody>
+          <a:bodyPr/>
+          <a:p/>
+        </p:txBody>
+      </p:sp>
+      <p:sp>
+        <p:nvSpPr>
+          <p:cNvPr id="9" name="Text 7"/>
+          <p:cNvSpPr/>
+          <p:nvPr/>
+        </p:nvSpPr>
+        <p:spPr>
+          <a:xfrm>
+            <a:off x="2240280" y="4434840"/>
+            <a:ext cx="3749040" cy="310896"/>
+          </a:xfrm>
+          <a:prstGeom prst="rect">
+            <a:avLst/>
+          </a:prstGeom>
+          <a:noFill/>
+          <a:ln/>
+        </p:spPr>
+        <p:txBody>
+          <a:bodyPr wrap="square" lIns="0" tIns="0" rIns="0" bIns="0" rtlCol="0" anchor="ctr"/>
+          <a:lstStyle/>
+          <a:p>
+            <a:pPr algn="ctr" indent="0" marL="0">
+              <a:buNone/>
+            </a:pPr>
+            <a:r>
+              <a:rPr lang="en-US" sz="1050" dirty="0">
+                <a:solidFill>
+                  <a:srgbClr val="E9DFFF"/>
+                </a:solidFill>
+                <a:latin typeface="Courier New" pitchFamily="34" charset="0"/>
+                <a:ea typeface="Courier New" pitchFamily="34" charset="-122"/>
+                <a:cs typeface="Courier New" pitchFamily="34" charset="-120"/>
+              </a:rPr>
+              <a:t>🎯 PREDICT IN §1.2 · STUCK? HAND UP ✋</a:t>
+            </a:r>
+            <a:endParaRPr lang="en-US" sz="1050" dirty="0"/>
+          </a:p>
+        </p:txBody>
+      </p:sp>
+    </p:spTree>
+  </p:cSld>
+  <p:clrMapOvr>
+    <a:masterClrMapping/>
+  </p:clrMapOvr>
+</p:sld>
+</file>
+
+<file path=ppt/slides/slide11.xml><?xml version="1.0" encoding="utf-8"?>
+<p:sld xmlns:a="http://schemas.openxmlformats.org/drawingml/2006/main" xmlns:r="http://schemas.openxmlformats.org/officeDocument/2006/relationships" xmlns:p="http://schemas.openxmlformats.org/presentationml/2006/main">
+  <p:cSld name="Slide 9">
+    <p:bg>
+      <p:bgPr>
+        <a:solidFill>
+          <a:srgbClr val="FFFFFF"/>
+        </a:solidFill>
+      </p:bgPr>
+    </p:bg>
+    <p:spTree>
+      <p:nvGrpSpPr>
+        <p:cNvPr id="1" name=""/>
+        <p:cNvGrpSpPr/>
+        <p:nvPr/>
+      </p:nvGrpSpPr>
+      <p:grpSpPr>
+        <a:xfrm>
+          <a:off x="0" y="0"/>
+          <a:ext cx="0" cy="0"/>
+          <a:chOff x="0" y="0"/>
+          <a:chExt cx="0" cy="0"/>
+        </a:xfrm>
+      </p:grpSpPr>
+      <p:sp>
+        <p:nvSpPr>
+          <p:cNvPr id="2" name="Text 0"/>
+          <p:cNvSpPr/>
+          <p:nvPr/>
+        </p:nvSpPr>
+        <p:spPr>
+          <a:xfrm>
+            <a:off x="502920" y="274320"/>
+            <a:ext cx="8138160" cy="274320"/>
+          </a:xfrm>
+          <a:prstGeom prst="rect">
+            <a:avLst/>
+          </a:prstGeom>
+          <a:noFill/>
+          <a:ln/>
+        </p:spPr>
+        <p:txBody>
+          <a:bodyPr wrap="square" lIns="0" tIns="0" rIns="0" bIns="0" rtlCol="0" anchor="ctr"/>
+          <a:lstStyle/>
+          <a:p>
+            <a:pPr indent="0" marL="0">
+              <a:buNone/>
+            </a:pPr>
+            <a:r>
+              <a:rPr lang="en-US" sz="1100" spc="300" kern="0" dirty="0">
+                <a:solidFill>
+                  <a:srgbClr val="6D28D9"/>
+                </a:solidFill>
+                <a:latin typeface="Courier New" pitchFamily="34" charset="0"/>
+                <a:ea typeface="Courier New" pitchFamily="34" charset="-122"/>
+                <a:cs typeface="Courier New" pitchFamily="34" charset="-120"/>
+              </a:rPr>
+              <a:t>PART 2 PREVIEW</a:t>
+            </a:r>
+            <a:endParaRPr lang="en-US" sz="1100" dirty="0"/>
+          </a:p>
+        </p:txBody>
+      </p:sp>
+      <p:sp>
+        <p:nvSpPr>
+          <p:cNvPr id="3" name="Text 1"/>
+          <p:cNvSpPr/>
+          <p:nvPr/>
+        </p:nvSpPr>
+        <p:spPr>
+          <a:xfrm>
+            <a:off x="502920" y="530352"/>
+            <a:ext cx="8138160" cy="685800"/>
+          </a:xfrm>
+          <a:prstGeom prst="rect">
+            <a:avLst/>
+          </a:prstGeom>
+          <a:noFill/>
+          <a:ln/>
+        </p:spPr>
+        <p:txBody>
+          <a:bodyPr wrap="square" lIns="0" tIns="0" rIns="0" bIns="0" rtlCol="0" anchor="ctr"/>
+          <a:lstStyle/>
+          <a:p>
+            <a:pPr indent="0" marL="0">
+              <a:buNone/>
+            </a:pPr>
+            <a:r>
+              <a:rPr lang="en-US" sz="3000" b="1" dirty="0">
+                <a:solidFill>
+                  <a:srgbClr val="2A1B3D"/>
+                </a:solidFill>
+                <a:latin typeface="Cambria" pitchFamily="34" charset="0"/>
+                <a:ea typeface="Cambria" pitchFamily="34" charset="-122"/>
+                <a:cs typeface="Cambria" pitchFamily="34" charset="-120"/>
+              </a:rPr>
+              <a:t>From one agent to a cooperating team</a:t>
+            </a:r>
+            <a:endParaRPr lang="en-US" sz="3000" dirty="0"/>
+          </a:p>
+        </p:txBody>
+      </p:sp>
+      <p:sp>
+        <p:nvSpPr>
+          <p:cNvPr id="4" name="Shape 2"/>
+          <p:cNvSpPr/>
+          <p:nvPr/>
+        </p:nvSpPr>
+        <p:spPr>
+          <a:xfrm>
+            <a:off x="502920" y="1828800"/>
+            <a:ext cx="2286000" cy="1143000"/>
+          </a:xfrm>
+          <a:prstGeom prst="roundRect">
+            <a:avLst>
+              <a:gd name="adj" fmla="val 6400"/>
+            </a:avLst>
+          </a:prstGeom>
+          <a:solidFill>
+            <a:srgbClr val="FFFFFF"/>
+          </a:solidFill>
+          <a:ln w="12700">
+            <a:solidFill>
+              <a:srgbClr val="E4DCF5"/>
+            </a:solidFill>
+            <a:prstDash val="solid"/>
+          </a:ln>
+          <a:effectLst>
+            <a:outerShdw sx="100000" sy="100000" kx="0" ky="0" algn="bl" rotWithShape="0" blurRad="88900" dist="25400" dir="5400000">
+              <a:srgbClr val="3A2A55">
+                <a:alpha val="14000"/>
+              </a:srgbClr>
+            </a:outerShdw>
+          </a:effectLst>
+        </p:spPr>
+      </p:sp>
+      <p:sp>
+        <p:nvSpPr>
+          <p:cNvPr id="5" name="Text 3"/>
+          <p:cNvSpPr/>
+          <p:nvPr/>
+        </p:nvSpPr>
+        <p:spPr>
+          <a:xfrm>
+            <a:off x="502920" y="1956816"/>
+            <a:ext cx="2286000" cy="320040"/>
+          </a:xfrm>
+          <a:prstGeom prst="rect">
+            <a:avLst/>
+          </a:prstGeom>
+          <a:noFill/>
+          <a:ln/>
+        </p:spPr>
+        <p:txBody>
+          <a:bodyPr wrap="square" lIns="0" tIns="0" rIns="0" bIns="0" rtlCol="0" anchor="ctr"/>
+          <a:lstStyle/>
+          <a:p>
+            <a:pPr algn="ctr" indent="0" marL="0">
+              <a:buNone/>
+            </a:pPr>
+            <a:r>
+              <a:rPr lang="en-US" sz="1500" b="1" dirty="0">
+                <a:solidFill>
+                  <a:srgbClr val="2A1B3D"/>
+                </a:solidFill>
+                <a:latin typeface="Cambria" pitchFamily="34" charset="0"/>
+                <a:ea typeface="Cambria" pitchFamily="34" charset="-122"/>
+                <a:cs typeface="Cambria" pitchFamily="34" charset="-120"/>
+              </a:rPr>
+              <a:t>🕵️ Auditor</a:t>
+            </a:r>
+            <a:endParaRPr lang="en-US" sz="1500" dirty="0"/>
+          </a:p>
+        </p:txBody>
+      </p:sp>
+      <p:sp>
+        <p:nvSpPr>
+          <p:cNvPr id="6" name="Text 4"/>
+          <p:cNvSpPr/>
+          <p:nvPr/>
+        </p:nvSpPr>
+        <p:spPr>
+          <a:xfrm>
+            <a:off x="612648" y="2286000"/>
+            <a:ext cx="2066544" cy="594360"/>
+          </a:xfrm>
+          <a:prstGeom prst="rect">
+            <a:avLst/>
+          </a:prstGeom>
+          <a:noFill/>
+          <a:ln/>
+        </p:spPr>
+        <p:txBody>
+          <a:bodyPr wrap="square" lIns="0" tIns="0" rIns="0" bIns="0" rtlCol="0" anchor="ctr"/>
+          <a:lstStyle/>
+          <a:p>
+            <a:pPr algn="ctr" indent="0" marL="0">
+              <a:buNone/>
+            </a:pPr>
+            <a:r>
+              <a:rPr lang="en-US" sz="950" dirty="0">
+                <a:solidFill>
+                  <a:srgbClr val="6B6B76"/>
+                </a:solidFill>
+                <a:latin typeface="Calibri" pitchFamily="34" charset="0"/>
+                <a:ea typeface="Calibri" pitchFamily="34" charset="-122"/>
+                <a:cs typeface="Calibri" pitchFamily="34" charset="-120"/>
+              </a:rPr>
+              <a:t>tools + LLM →</a:t>
+            </a:r>
+            <a:endParaRPr lang="en-US" sz="950" dirty="0"/>
+          </a:p>
+          <a:p>
+            <a:pPr algn="ctr" indent="0" marL="0">
+              <a:buNone/>
+            </a:pPr>
+            <a:r>
+              <a:rPr lang="en-US" sz="950" dirty="0">
+                <a:solidFill>
+                  <a:srgbClr val="6B6B76"/>
+                </a:solidFill>
+                <a:latin typeface="Calibri" pitchFamily="34" charset="0"/>
+                <a:ea typeface="Calibri" pitchFamily="34" charset="-122"/>
+                <a:cs typeface="Calibri" pitchFamily="34" charset="-120"/>
+              </a:rPr>
+              <a:t>JSON findings</a:t>
+            </a:r>
+            <a:endParaRPr lang="en-US" sz="950" dirty="0"/>
+          </a:p>
+        </p:txBody>
+      </p:sp>
+      <p:sp>
+        <p:nvSpPr>
+          <p:cNvPr id="7" name="Shape 5"/>
+          <p:cNvSpPr/>
+          <p:nvPr/>
+        </p:nvSpPr>
+        <p:spPr>
+          <a:xfrm>
+            <a:off x="3429000" y="1828800"/>
+            <a:ext cx="2286000" cy="1143000"/>
+          </a:xfrm>
+          <a:prstGeom prst="roundRect">
+            <a:avLst>
+              <a:gd name="adj" fmla="val 6400"/>
+            </a:avLst>
+          </a:prstGeom>
+          <a:solidFill>
+            <a:srgbClr val="FFFFFF"/>
+          </a:solidFill>
+          <a:ln w="12700">
+            <a:solidFill>
+              <a:srgbClr val="E4DCF5"/>
+            </a:solidFill>
+            <a:prstDash val="solid"/>
+          </a:ln>
+          <a:effectLst>
+            <a:outerShdw sx="100000" sy="100000" kx="0" ky="0" algn="bl" rotWithShape="0" blurRad="88900" dist="25400" dir="5400000">
+              <a:srgbClr val="3A2A55">
+                <a:alpha val="14000"/>
+              </a:srgbClr>
+            </a:outerShdw>
+          </a:effectLst>
+        </p:spPr>
+      </p:sp>
+      <p:sp>
+        <p:nvSpPr>
+          <p:cNvPr id="8" name="Text 6"/>
+          <p:cNvSpPr/>
+          <p:nvPr/>
+        </p:nvSpPr>
+        <p:spPr>
+          <a:xfrm>
+            <a:off x="3429000" y="1956816"/>
+            <a:ext cx="2286000" cy="320040"/>
+          </a:xfrm>
+          <a:prstGeom prst="rect">
+            <a:avLst/>
+          </a:prstGeom>
+          <a:noFill/>
+          <a:ln/>
+        </p:spPr>
+        <p:txBody>
+          <a:bodyPr wrap="square" lIns="0" tIns="0" rIns="0" bIns="0" rtlCol="0" anchor="ctr"/>
+          <a:lstStyle/>
+          <a:p>
+            <a:pPr algn="ctr" indent="0" marL="0">
+              <a:buNone/>
+            </a:pPr>
+            <a:r>
+              <a:rPr lang="en-US" sz="1500" b="1" dirty="0">
+                <a:solidFill>
+                  <a:srgbClr val="2A1B3D"/>
+                </a:solidFill>
+                <a:latin typeface="Cambria" pitchFamily="34" charset="0"/>
+                <a:ea typeface="Cambria" pitchFamily="34" charset="-122"/>
+                <a:cs typeface="Cambria" pitchFamily="34" charset="-120"/>
+              </a:rPr>
+              <a:t>🔧 Refactorer</a:t>
+            </a:r>
+            <a:endParaRPr lang="en-US" sz="1500" dirty="0"/>
+          </a:p>
+        </p:txBody>
+      </p:sp>
+      <p:sp>
+        <p:nvSpPr>
+          <p:cNvPr id="9" name="Text 7"/>
+          <p:cNvSpPr/>
+          <p:nvPr/>
+        </p:nvSpPr>
+        <p:spPr>
+          <a:xfrm>
+            <a:off x="3538728" y="2286000"/>
+            <a:ext cx="2066544" cy="594360"/>
+          </a:xfrm>
+          <a:prstGeom prst="rect">
+            <a:avLst/>
+          </a:prstGeom>
+          <a:noFill/>
+          <a:ln/>
+        </p:spPr>
+        <p:txBody>
+          <a:bodyPr wrap="square" lIns="0" tIns="0" rIns="0" bIns="0" rtlCol="0" anchor="ctr"/>
+          <a:lstStyle/>
+          <a:p>
+            <a:pPr algn="ctr" indent="0" marL="0">
+              <a:buNone/>
+            </a:pPr>
+            <a:r>
+              <a:rPr lang="en-US" sz="950" dirty="0">
+                <a:solidFill>
+                  <a:srgbClr val="6B6B76"/>
+                </a:solidFill>
+                <a:latin typeface="Calibri" pitchFamily="34" charset="0"/>
+                <a:ea typeface="Calibri" pitchFamily="34" charset="-122"/>
+                <a:cs typeface="Calibri" pitchFamily="34" charset="-120"/>
+              </a:rPr>
+              <a:t>rewrites module</a:t>
+            </a:r>
+            <a:endParaRPr lang="en-US" sz="950" dirty="0"/>
+          </a:p>
+          <a:p>
+            <a:pPr algn="ctr" indent="0" marL="0">
+              <a:buNone/>
+            </a:pPr>
+            <a:r>
+              <a:rPr lang="en-US" sz="950" dirty="0">
+                <a:solidFill>
+                  <a:srgbClr val="6B6B76"/>
+                </a:solidFill>
+                <a:latin typeface="Calibri" pitchFamily="34" charset="0"/>
+                <a:ea typeface="Calibri" pitchFamily="34" charset="-122"/>
+                <a:cs typeface="Calibri" pitchFamily="34" charset="-120"/>
+              </a:rPr>
+              <a:t>under hard invariants</a:t>
+            </a:r>
+            <a:endParaRPr lang="en-US" sz="950" dirty="0"/>
+          </a:p>
+        </p:txBody>
+      </p:sp>
+      <p:sp>
+        <p:nvSpPr>
+          <p:cNvPr id="10" name="Shape 8"/>
+          <p:cNvSpPr/>
+          <p:nvPr/>
+        </p:nvSpPr>
+        <p:spPr>
+          <a:xfrm>
+            <a:off x="6355080" y="1828800"/>
+            <a:ext cx="2286000" cy="1143000"/>
+          </a:xfrm>
+          <a:prstGeom prst="roundRect">
+            <a:avLst>
+              <a:gd name="adj" fmla="val 6400"/>
+            </a:avLst>
+          </a:prstGeom>
+          <a:solidFill>
+            <a:srgbClr val="F3EFFB"/>
+          </a:solidFill>
+          <a:ln w="12700">
+            <a:solidFill>
+              <a:srgbClr val="E4DCF5"/>
+            </a:solidFill>
+            <a:prstDash val="solid"/>
+          </a:ln>
+          <a:effectLst>
+            <a:outerShdw sx="100000" sy="100000" kx="0" ky="0" algn="bl" rotWithShape="0" blurRad="88900" dist="25400" dir="5400000">
+              <a:srgbClr val="3A2A55">
+                <a:alpha val="14000"/>
+              </a:srgbClr>
+            </a:outerShdw>
+          </a:effectLst>
+        </p:spPr>
+      </p:sp>
+      <p:sp>
+        <p:nvSpPr>
+          <p:cNvPr id="11" name="Text 9"/>
+          <p:cNvSpPr/>
+          <p:nvPr/>
+        </p:nvSpPr>
+        <p:spPr>
+          <a:xfrm>
+            <a:off x="6355080" y="1956816"/>
+            <a:ext cx="2286000" cy="320040"/>
+          </a:xfrm>
+          <a:prstGeom prst="rect">
+            <a:avLst/>
+          </a:prstGeom>
+          <a:noFill/>
+          <a:ln/>
+        </p:spPr>
+        <p:txBody>
+          <a:bodyPr wrap="square" lIns="0" tIns="0" rIns="0" bIns="0" rtlCol="0" anchor="ctr"/>
+          <a:lstStyle/>
+          <a:p>
+            <a:pPr algn="ctr" indent="0" marL="0">
+              <a:buNone/>
+            </a:pPr>
+            <a:r>
+              <a:rPr lang="en-US" sz="1500" b="1" dirty="0">
+                <a:solidFill>
+                  <a:srgbClr val="2A1B3D"/>
+                </a:solidFill>
+                <a:latin typeface="Cambria" pitchFamily="34" charset="0"/>
+                <a:ea typeface="Cambria" pitchFamily="34" charset="-122"/>
+                <a:cs typeface="Cambria" pitchFamily="34" charset="-120"/>
+              </a:rPr>
+              <a:t>🛡️ QA Verifier</a:t>
+            </a:r>
+            <a:endParaRPr lang="en-US" sz="1500" dirty="0"/>
+          </a:p>
+        </p:txBody>
+      </p:sp>
+      <p:sp>
+        <p:nvSpPr>
+          <p:cNvPr id="12" name="Text 10"/>
+          <p:cNvSpPr/>
+          <p:nvPr/>
+        </p:nvSpPr>
+        <p:spPr>
+          <a:xfrm>
+            <a:off x="6464808" y="2286000"/>
+            <a:ext cx="2066544" cy="594360"/>
+          </a:xfrm>
+          <a:prstGeom prst="rect">
+            <a:avLst/>
+          </a:prstGeom>
+          <a:noFill/>
+          <a:ln/>
+        </p:spPr>
+        <p:txBody>
+          <a:bodyPr wrap="square" lIns="0" tIns="0" rIns="0" bIns="0" rtlCol="0" anchor="ctr"/>
+          <a:lstStyle/>
+          <a:p>
+            <a:pPr algn="ctr" indent="0" marL="0">
+              <a:buNone/>
+            </a:pPr>
+            <a:r>
+              <a:rPr lang="en-US" sz="950" dirty="0">
+                <a:solidFill>
+                  <a:srgbClr val="6B6B76"/>
+                </a:solidFill>
+                <a:latin typeface="Calibri" pitchFamily="34" charset="0"/>
+                <a:ea typeface="Calibri" pitchFamily="34" charset="-122"/>
+                <a:cs typeface="Calibri" pitchFamily="34" charset="-120"/>
+              </a:rPr>
+              <a:t>syntax → tests → metrics</a:t>
+            </a:r>
+            <a:endParaRPr lang="en-US" sz="950" dirty="0"/>
+          </a:p>
+          <a:p>
+            <a:pPr algn="ctr" indent="0" marL="0">
+              <a:buNone/>
+            </a:pPr>
+            <a:r>
+              <a:rPr lang="en-US" sz="950" dirty="0">
+                <a:solidFill>
+                  <a:srgbClr val="6B6B76"/>
+                </a:solidFill>
+                <a:latin typeface="Calibri" pitchFamily="34" charset="0"/>
+                <a:ea typeface="Calibri" pitchFamily="34" charset="-122"/>
+                <a:cs typeface="Calibri" pitchFamily="34" charset="-120"/>
+              </a:rPr>
+              <a:t>NO LLM inside</a:t>
+            </a:r>
+            <a:endParaRPr lang="en-US" sz="950" dirty="0"/>
+          </a:p>
+        </p:txBody>
+      </p:sp>
+      <p:sp>
+        <p:nvSpPr>
+          <p:cNvPr id="13" name="Shape 11"/>
+          <p:cNvSpPr/>
+          <p:nvPr/>
+        </p:nvSpPr>
+        <p:spPr>
+          <a:xfrm>
+            <a:off x="2788920" y="2395728"/>
+            <a:ext cx="640080" cy="0"/>
+          </a:xfrm>
+          <a:prstGeom prst="line">
+            <a:avLst/>
+          </a:prstGeom>
+          <a:noFill/>
+          <a:ln w="31750">
+            <a:solidFill>
+              <a:srgbClr val="6D28D9"/>
+            </a:solidFill>
+            <a:prstDash val="solid"/>
+            <a:tailEnd type="arrow"/>
+          </a:ln>
+        </p:spPr>
+      </p:sp>
+      <p:sp>
+        <p:nvSpPr>
+          <p:cNvPr id="14" name="Shape 12"/>
+          <p:cNvSpPr/>
+          <p:nvPr/>
+        </p:nvSpPr>
+        <p:spPr>
+          <a:xfrm>
+            <a:off x="5715000" y="2395728"/>
+            <a:ext cx="640080" cy="0"/>
+          </a:xfrm>
+          <a:prstGeom prst="line">
+            <a:avLst/>
+          </a:prstGeom>
+          <a:noFill/>
+          <a:ln w="31750">
+            <a:solidFill>
+              <a:srgbClr val="6D28D9"/>
+            </a:solidFill>
+            <a:prstDash val="solid"/>
+            <a:tailEnd type="arrow"/>
+          </a:ln>
+        </p:spPr>
+      </p:sp>
+      <p:sp>
+        <p:nvSpPr>
+          <p:cNvPr id="15" name="Text 13"/>
+          <p:cNvSpPr/>
+          <p:nvPr/>
+        </p:nvSpPr>
+        <p:spPr>
+          <a:xfrm>
+            <a:off x="2697480" y="2048256"/>
+            <a:ext cx="868680" cy="228600"/>
+          </a:xfrm>
+          <a:prstGeom prst="rect">
+            <a:avLst/>
+          </a:prstGeom>
+          <a:noFill/>
+          <a:ln/>
+        </p:spPr>
+        <p:txBody>
+          <a:bodyPr wrap="square" lIns="0" tIns="0" rIns="0" bIns="0" rtlCol="0" anchor="ctr"/>
+          <a:lstStyle/>
+          <a:p>
+            <a:pPr algn="ctr" indent="0" marL="0">
+              <a:buNone/>
+            </a:pPr>
+            <a:r>
+              <a:rPr lang="en-US" sz="850" dirty="0">
+                <a:solidFill>
+                  <a:srgbClr val="6B6B76"/>
+                </a:solidFill>
+                <a:latin typeface="Courier New" pitchFamily="34" charset="0"/>
+                <a:ea typeface="Courier New" pitchFamily="34" charset="-122"/>
+                <a:cs typeface="Courier New" pitchFamily="34" charset="-120"/>
+              </a:rPr>
+              <a:t>findings</a:t>
+            </a:r>
+            <a:endParaRPr lang="en-US" sz="850" dirty="0"/>
+          </a:p>
+        </p:txBody>
+      </p:sp>
+      <p:sp>
+        <p:nvSpPr>
+          <p:cNvPr id="16" name="Text 14"/>
+          <p:cNvSpPr/>
+          <p:nvPr/>
+        </p:nvSpPr>
+        <p:spPr>
+          <a:xfrm>
+            <a:off x="5605272" y="2048256"/>
+            <a:ext cx="868680" cy="228600"/>
+          </a:xfrm>
+          <a:prstGeom prst="rect">
+            <a:avLst/>
+          </a:prstGeom>
+          <a:noFill/>
+          <a:ln/>
+        </p:spPr>
+        <p:txBody>
+          <a:bodyPr wrap="square" lIns="0" tIns="0" rIns="0" bIns="0" rtlCol="0" anchor="ctr"/>
+          <a:lstStyle/>
+          <a:p>
+            <a:pPr algn="ctr" indent="0" marL="0">
+              <a:buNone/>
+            </a:pPr>
+            <a:r>
+              <a:rPr lang="en-US" sz="850" dirty="0">
+                <a:solidFill>
+                  <a:srgbClr val="6B6B76"/>
+                </a:solidFill>
+                <a:latin typeface="Courier New" pitchFamily="34" charset="0"/>
+                <a:ea typeface="Courier New" pitchFamily="34" charset="-122"/>
+                <a:cs typeface="Courier New" pitchFamily="34" charset="-120"/>
+              </a:rPr>
+              <a:t>candidate</a:t>
+            </a:r>
+            <a:endParaRPr lang="en-US" sz="850" dirty="0"/>
+          </a:p>
+        </p:txBody>
+      </p:sp>
+      <p:sp>
+        <p:nvSpPr>
+          <p:cNvPr id="17" name="Shape 15"/>
+          <p:cNvSpPr/>
+          <p:nvPr/>
+        </p:nvSpPr>
+        <p:spPr>
+          <a:xfrm>
+            <a:off x="3429000" y="3657600"/>
+            <a:ext cx="2286000" cy="914400"/>
+          </a:xfrm>
+          <a:prstGeom prst="roundRect">
+            <a:avLst>
+              <a:gd name="adj" fmla="val 8000"/>
+            </a:avLst>
+          </a:prstGeom>
+          <a:solidFill>
+            <a:srgbClr val="EFE9FA"/>
+          </a:solidFill>
+          <a:ln w="12700">
+            <a:solidFill>
+              <a:srgbClr val="E4DCF5"/>
+            </a:solidFill>
+            <a:prstDash val="solid"/>
+          </a:ln>
+          <a:effectLst>
+            <a:outerShdw sx="100000" sy="100000" kx="0" ky="0" algn="bl" rotWithShape="0" blurRad="88900" dist="25400" dir="5400000">
+              <a:srgbClr val="3A2A55">
+                <a:alpha val="14000"/>
+              </a:srgbClr>
+            </a:outerShdw>
+          </a:effectLst>
+        </p:spPr>
+      </p:sp>
+      <p:sp>
+        <p:nvSpPr>
+          <p:cNvPr id="18" name="Text 16"/>
+          <p:cNvSpPr/>
+          <p:nvPr/>
+        </p:nvSpPr>
+        <p:spPr>
+          <a:xfrm>
+            <a:off x="3429000" y="3785616"/>
+            <a:ext cx="2286000" cy="320040"/>
+          </a:xfrm>
+          <a:prstGeom prst="rect">
+            <a:avLst/>
+          </a:prstGeom>
+          <a:noFill/>
+          <a:ln/>
+        </p:spPr>
+        <p:txBody>
+          <a:bodyPr wrap="square" lIns="0" tIns="0" rIns="0" bIns="0" rtlCol="0" anchor="ctr"/>
+          <a:lstStyle/>
+          <a:p>
+            <a:pPr algn="ctr" indent="0" marL="0">
+              <a:buNone/>
+            </a:pPr>
+            <a:r>
+              <a:rPr lang="en-US" sz="1500" b="1" dirty="0">
+                <a:solidFill>
+                  <a:srgbClr val="2A1B3D"/>
+                </a:solidFill>
+                <a:latin typeface="Cambria" pitchFamily="34" charset="0"/>
+                <a:ea typeface="Cambria" pitchFamily="34" charset="-122"/>
+                <a:cs typeface="Cambria" pitchFamily="34" charset="-120"/>
+              </a:rPr>
+              <a:t>🎛️ Orchestrator</a:t>
+            </a:r>
+            <a:endParaRPr lang="en-US" sz="1500" dirty="0"/>
+          </a:p>
+        </p:txBody>
+      </p:sp>
+      <p:sp>
+        <p:nvSpPr>
+          <p:cNvPr id="19" name="Text 17"/>
+          <p:cNvSpPr/>
+          <p:nvPr/>
+        </p:nvSpPr>
+        <p:spPr>
+          <a:xfrm>
+            <a:off x="3538728" y="4114800"/>
+            <a:ext cx="2066544" cy="365760"/>
+          </a:xfrm>
+          <a:prstGeom prst="rect">
+            <a:avLst/>
+          </a:prstGeom>
+          <a:noFill/>
+          <a:ln/>
+        </p:spPr>
+        <p:txBody>
+          <a:bodyPr wrap="square" lIns="0" tIns="0" rIns="0" bIns="0" rtlCol="0" anchor="ctr"/>
+          <a:lstStyle/>
+          <a:p>
+            <a:pPr algn="ctr" indent="0" marL="0">
+              <a:buNone/>
+            </a:pPr>
+            <a:r>
+              <a:rPr lang="en-US" sz="950" dirty="0">
+                <a:solidFill>
+                  <a:srgbClr val="6B6B76"/>
+                </a:solidFill>
+                <a:latin typeface="Calibri" pitchFamily="34" charset="0"/>
+                <a:ea typeface="Calibri" pitchFamily="34" charset="-122"/>
+                <a:cs typeface="Calibri" pitchFamily="34" charset="-120"/>
+              </a:rPr>
+              <a:t>retry loop + iteration budget</a:t>
+            </a:r>
+            <a:endParaRPr lang="en-US" sz="950" dirty="0"/>
+          </a:p>
+          <a:p>
+            <a:pPr algn="ctr" indent="0" marL="0">
+              <a:buNone/>
+            </a:pPr>
+            <a:r>
+              <a:rPr lang="en-US" sz="950" dirty="0">
+                <a:solidFill>
+                  <a:srgbClr val="6B6B76"/>
+                </a:solidFill>
+                <a:latin typeface="Calibri" pitchFamily="34" charset="0"/>
+                <a:ea typeface="Calibri" pitchFamily="34" charset="-122"/>
+                <a:cs typeface="Calibri" pitchFamily="34" charset="-120"/>
+              </a:rPr>
+              <a:t>+ audit trail</a:t>
+            </a:r>
+            <a:endParaRPr lang="en-US" sz="950" dirty="0"/>
+          </a:p>
+        </p:txBody>
+      </p:sp>
+      <p:sp>
+        <p:nvSpPr>
+          <p:cNvPr id="20" name="Shape 18"/>
+          <p:cNvSpPr/>
+          <p:nvPr/>
+        </p:nvSpPr>
+        <p:spPr>
+          <a:xfrm>
+            <a:off x="7498080" y="2971800"/>
+            <a:ext cx="0" cy="1143000"/>
+          </a:xfrm>
+          <a:prstGeom prst="line">
+            <a:avLst/>
+          </a:prstGeom>
+          <a:noFill/>
+          <a:ln w="25400">
+            <a:solidFill>
+              <a:srgbClr val="C0392B"/>
+            </a:solidFill>
+            <a:prstDash val="dash"/>
+          </a:ln>
+        </p:spPr>
+      </p:sp>
+      <p:sp>
+        <p:nvSpPr>
+          <p:cNvPr id="21" name="Shape 19"/>
+          <p:cNvSpPr/>
+          <p:nvPr/>
+        </p:nvSpPr>
+        <p:spPr>
+          <a:xfrm>
+            <a:off x="5715000" y="4114800"/>
+            <a:ext cx="1783080" cy="0"/>
+          </a:xfrm>
+          <a:prstGeom prst="line">
+            <a:avLst/>
+          </a:prstGeom>
+          <a:noFill/>
+          <a:ln w="25400">
+            <a:solidFill>
+              <a:srgbClr val="C0392B"/>
+            </a:solidFill>
+            <a:prstDash val="dash"/>
+            <a:headEnd type="arrow"/>
+          </a:ln>
+        </p:spPr>
+      </p:sp>
+      <p:sp>
+        <p:nvSpPr>
+          <p:cNvPr id="22" name="Shape 20"/>
+          <p:cNvSpPr/>
+          <p:nvPr/>
+        </p:nvSpPr>
+        <p:spPr>
+          <a:xfrm>
+            <a:off x="2560320" y="4114800"/>
+            <a:ext cx="868680" cy="0"/>
+          </a:xfrm>
+          <a:prstGeom prst="line">
+            <a:avLst/>
+          </a:prstGeom>
+          <a:noFill/>
+          <a:ln w="25400">
+            <a:solidFill>
+              <a:srgbClr val="1E8E5A"/>
+            </a:solidFill>
+            <a:prstDash val="solid"/>
+            <a:headEnd type="arrow"/>
+          </a:ln>
+        </p:spPr>
+      </p:sp>
+      <p:sp>
+        <p:nvSpPr>
+          <p:cNvPr id="23" name="Shape 21"/>
+          <p:cNvSpPr/>
+          <p:nvPr/>
+        </p:nvSpPr>
+        <p:spPr>
+          <a:xfrm>
+            <a:off x="2560320" y="2971800"/>
+            <a:ext cx="0" cy="1143000"/>
+          </a:xfrm>
+          <a:prstGeom prst="line">
+            <a:avLst/>
+          </a:prstGeom>
+          <a:noFill/>
+          <a:ln w="25400">
+            <a:solidFill>
+              <a:srgbClr val="1E8E5A"/>
+            </a:solidFill>
+            <a:prstDash val="solid"/>
+          </a:ln>
+        </p:spPr>
+      </p:sp>
+      <p:sp>
+        <p:nvSpPr>
+          <p:cNvPr id="24" name="Text 22"/>
+          <p:cNvSpPr/>
+          <p:nvPr/>
+        </p:nvSpPr>
+        <p:spPr>
+          <a:xfrm>
+            <a:off x="5806440" y="4160520"/>
+            <a:ext cx="1737360" cy="228600"/>
+          </a:xfrm>
+          <a:prstGeom prst="rect">
+            <a:avLst/>
+          </a:prstGeom>
+          <a:noFill/>
+          <a:ln/>
+        </p:spPr>
+        <p:txBody>
+          <a:bodyPr wrap="square" lIns="0" tIns="0" rIns="0" bIns="0" rtlCol="0" anchor="ctr"/>
+          <a:lstStyle/>
+          <a:p>
+            <a:pPr algn="ctr" indent="0" marL="0">
+              <a:buNone/>
+            </a:pPr>
+            <a:r>
+              <a:rPr lang="en-US" sz="850" dirty="0">
+                <a:solidFill>
+                  <a:srgbClr val="C0392B"/>
+                </a:solidFill>
+                <a:latin typeface="Courier New" pitchFamily="34" charset="0"/>
+                <a:ea typeface="Courier New" pitchFamily="34" charset="-122"/>
+                <a:cs typeface="Courier New" pitchFamily="34" charset="-120"/>
+              </a:rPr>
+              <a:t>❌ reject + failure notes</a:t>
+            </a:r>
+            <a:endParaRPr lang="en-US" sz="850" dirty="0"/>
+          </a:p>
+        </p:txBody>
+      </p:sp>
+      <p:sp>
+        <p:nvSpPr>
+          <p:cNvPr id="25" name="Text 23"/>
+          <p:cNvSpPr/>
+          <p:nvPr/>
+        </p:nvSpPr>
+        <p:spPr>
+          <a:xfrm>
+            <a:off x="1051560" y="4160520"/>
+            <a:ext cx="1554480" cy="228600"/>
+          </a:xfrm>
+          <a:prstGeom prst="rect">
+            <a:avLst/>
+          </a:prstGeom>
+          <a:noFill/>
+          <a:ln/>
+        </p:spPr>
+        <p:txBody>
+          <a:bodyPr wrap="square" lIns="0" tIns="0" rIns="0" bIns="0" rtlCol="0" anchor="ctr"/>
+          <a:lstStyle/>
+          <a:p>
+            <a:pPr algn="ctr" indent="0" marL="0">
+              <a:buNone/>
+            </a:pPr>
+            <a:r>
+              <a:rPr lang="en-US" sz="850" dirty="0">
+                <a:solidFill>
+                  <a:srgbClr val="1E8E5A"/>
+                </a:solidFill>
+                <a:latin typeface="Courier New" pitchFamily="34" charset="0"/>
+                <a:ea typeface="Courier New" pitchFamily="34" charset="-122"/>
+                <a:cs typeface="Courier New" pitchFamily="34" charset="-120"/>
+              </a:rPr>
+              <a:t>✅ accept / retry</a:t>
+            </a:r>
+            <a:endParaRPr lang="en-US" sz="850" dirty="0"/>
+          </a:p>
+        </p:txBody>
+      </p:sp>
+      <p:sp>
+        <p:nvSpPr>
+          <p:cNvPr id="26" name="Text 24"/>
+          <p:cNvSpPr/>
+          <p:nvPr/>
+        </p:nvSpPr>
+        <p:spPr>
+          <a:xfrm>
+            <a:off x="502920" y="4754880"/>
+            <a:ext cx="8138160" cy="320040"/>
+          </a:xfrm>
+          <a:prstGeom prst="rect">
+            <a:avLst/>
+          </a:prstGeom>
+          <a:noFill/>
+          <a:ln/>
+        </p:spPr>
+        <p:txBody>
+          <a:bodyPr wrap="square" lIns="0" tIns="0" rIns="0" bIns="0" rtlCol="0" anchor="ctr"/>
+          <a:lstStyle/>
+          <a:p>
+            <a:pPr algn="ctr" indent="0" marL="0">
+              <a:buNone/>
+            </a:pPr>
+            <a:r>
+              <a:rPr lang="en-US" sz="1350" i="1" dirty="0">
+                <a:solidFill>
+                  <a:srgbClr val="6D28D9"/>
+                </a:solidFill>
+                <a:latin typeface="Calibri" pitchFamily="34" charset="0"/>
+                <a:ea typeface="Calibri" pitchFamily="34" charset="-122"/>
+                <a:cs typeface="Calibri" pitchFamily="34" charset="-120"/>
+              </a:rPr>
+              <a:t>The QA agent is deliberately NOT an LLM — never let the fox audit the henhouse.</a:t>
+            </a:r>
+            <a:endParaRPr lang="en-US" sz="1350" dirty="0"/>
+          </a:p>
+        </p:txBody>
+      </p:sp>
+    </p:spTree>
+  </p:cSld>
+  <p:clrMapOvr>
+    <a:masterClrMapping/>
+  </p:clrMapOvr>
+</p:sld>
+</file>
+
+<file path=ppt/slides/slide12.xml><?xml version="1.0" encoding="utf-8"?>
+<p:sld xmlns:a="http://schemas.openxmlformats.org/drawingml/2006/main" xmlns:r="http://schemas.openxmlformats.org/officeDocument/2006/relationships" xmlns:p="http://schemas.openxmlformats.org/presentationml/2006/main">
   <p:cSld name="Slide 10">
     <p:bg>
       <p:bgPr>
@@ -3302,7 +4679,7 @@
 </p:sld>
 </file>
 
-<file path=ppt/slides/slide11.xml><?xml version="1.0" encoding="utf-8"?>
+<file path=ppt/slides/slide13.xml><?xml version="1.0" encoding="utf-8"?>
 <p:sld xmlns:a="http://schemas.openxmlformats.org/drawingml/2006/main" xmlns:r="http://schemas.openxmlformats.org/officeDocument/2006/relationships" xmlns:p="http://schemas.openxmlformats.org/presentationml/2006/main">
   <p:cSld name="Slide 11">
     <p:bg>
@@ -4198,7 +5575,7 @@
 </p:sld>
 </file>
 
-<file path=ppt/slides/slide12.xml><?xml version="1.0" encoding="utf-8"?>
+<file path=ppt/slides/slide14.xml><?xml version="1.0" encoding="utf-8"?>
 <p:sld xmlns:a="http://schemas.openxmlformats.org/drawingml/2006/main" xmlns:r="http://schemas.openxmlformats.org/officeDocument/2006/relationships" xmlns:p="http://schemas.openxmlformats.org/presentationml/2006/main">
   <p:cSld name="Slide 12">
     <p:bg>
@@ -5806,7 +7183,7 @@
                 <a:ea typeface="Calibri" pitchFamily="34" charset="-122"/>
                 <a:cs typeface="Calibri" pitchFamily="34" charset="-120"/>
               </a:rPr>
-              <a:t>You will meet at least two of these live in Part 2 — on purpose.</a:t>
+              <a:t>You will meet at least two of these live in Part 2 — on purpose. A seventh, contract drift, already bit us in §1.2.</a:t>
             </a:r>
             <a:endParaRPr lang="en-US" sz="1250" dirty="0"/>
           </a:p>
@@ -5820,7 +7197,7 @@
 </p:sld>
 </file>
 
-<file path=ppt/slides/slide13.xml><?xml version="1.0" encoding="utf-8"?>
+<file path=ppt/slides/slide15.xml><?xml version="1.0" encoding="utf-8"?>
 <p:sld xmlns:a="http://schemas.openxmlformats.org/drawingml/2006/main" xmlns:r="http://schemas.openxmlformats.org/officeDocument/2006/relationships" xmlns:p="http://schemas.openxmlformats.org/presentationml/2006/main">
   <p:cSld name="Slide 13">
     <p:bg>
@@ -6090,6 +7467,10 @@
             <a:prstDash val="solid"/>
           </a:ln>
         </p:spPr>
+        <p:txBody>
+          <a:bodyPr/>
+          <a:p/>
+        </p:txBody>
       </p:sp>
       <p:sp>
         <p:nvSpPr>
@@ -6156,6 +7537,10 @@
             <a:prstDash val="solid"/>
           </a:ln>
         </p:spPr>
+        <p:txBody>
+          <a:bodyPr/>
+          <a:p/>
+        </p:txBody>
       </p:sp>
       <p:sp>
         <p:nvSpPr>
@@ -6190,7 +7575,7 @@
                 <a:ea typeface="Courier New" pitchFamily="34" charset="-122"/>
                 <a:cs typeface="Courier New" pitchFamily="34" charset="-120"/>
               </a:rPr>
-              <a:t>STUCK &gt; 3 MIN? RAISE YOUR HAND ✋</a:t>
+              <a:t>🎯 PREDICT IN §2.7 · STUCK? HAND UP ✋</a:t>
             </a:r>
             <a:endParaRPr lang="en-US" sz="1050" dirty="0"/>
           </a:p>
@@ -6204,7 +7589,7 @@
 </p:sld>
 </file>
 
-<file path=ppt/slides/slide14.xml><?xml version="1.0" encoding="utf-8"?>
+<file path=ppt/slides/slide16.xml><?xml version="1.0" encoding="utf-8"?>
 <p:sld xmlns:a="http://schemas.openxmlformats.org/drawingml/2006/main" xmlns:r="http://schemas.openxmlformats.org/officeDocument/2006/relationships" xmlns:p="http://schemas.openxmlformats.org/presentationml/2006/main">
   <p:cSld name="Slide 14">
     <p:bg>
@@ -6853,7 +8238,7 @@
 </p:sld>
 </file>
 
-<file path=ppt/slides/slide15.xml><?xml version="1.0" encoding="utf-8"?>
+<file path=ppt/slides/slide17.xml><?xml version="1.0" encoding="utf-8"?>
 <p:sld xmlns:a="http://schemas.openxmlformats.org/drawingml/2006/main" xmlns:r="http://schemas.openxmlformats.org/officeDocument/2006/relationships" xmlns:p="http://schemas.openxmlformats.org/presentationml/2006/main">
   <p:cSld name="Slide 15">
     <p:bg>
@@ -7123,6 +8508,10 @@
             <a:prstDash val="solid"/>
           </a:ln>
         </p:spPr>
+        <p:txBody>
+          <a:bodyPr/>
+          <a:p/>
+        </p:txBody>
       </p:sp>
       <p:sp>
         <p:nvSpPr>
@@ -7189,6 +8578,10 @@
             <a:prstDash val="solid"/>
           </a:ln>
         </p:spPr>
+        <p:txBody>
+          <a:bodyPr/>
+          <a:p/>
+        </p:txBody>
       </p:sp>
       <p:sp>
         <p:nvSpPr>
@@ -7223,7 +8616,7 @@
                 <a:ea typeface="Courier New" pitchFamily="34" charset="-122"/>
                 <a:cs typeface="Courier New" pitchFamily="34" charset="-120"/>
               </a:rPr>
-              <a:t>STUCK &gt; 3 MIN? RAISE YOUR HAND ✋</a:t>
+              <a:t>🎯 PREDICT IN §3.2 · STUCK? HAND UP ✋</a:t>
             </a:r>
             <a:endParaRPr lang="en-US" sz="1050" dirty="0"/>
           </a:p>
@@ -7237,7 +8630,7 @@
 </p:sld>
 </file>
 
-<file path=ppt/slides/slide16.xml><?xml version="1.0" encoding="utf-8"?>
+<file path=ppt/slides/slide18.xml><?xml version="1.0" encoding="utf-8"?>
 <p:sld xmlns:a="http://schemas.openxmlformats.org/drawingml/2006/main" xmlns:r="http://schemas.openxmlformats.org/officeDocument/2006/relationships" xmlns:p="http://schemas.openxmlformats.org/presentationml/2006/main">
   <p:cSld name="Slide 16">
     <p:bg>
@@ -7450,6 +8843,10 @@
             </a:outerShdw>
           </a:effectLst>
         </p:spPr>
+        <p:txBody>
+          <a:bodyPr/>
+          <a:p/>
+        </p:txBody>
       </p:sp>
       <p:sp>
         <p:nvSpPr>
@@ -7562,6 +8959,10 @@
             </a:outerShdw>
           </a:effectLst>
         </p:spPr>
+        <p:txBody>
+          <a:bodyPr/>
+          <a:p/>
+        </p:txBody>
       </p:sp>
       <p:sp>
         <p:nvSpPr>
@@ -7649,6 +9050,10 @@
             </a:outerShdw>
           </a:effectLst>
         </p:spPr>
+        <p:txBody>
+          <a:bodyPr/>
+          <a:p/>
+        </p:txBody>
       </p:sp>
       <p:sp>
         <p:nvSpPr>
@@ -7761,6 +9166,10 @@
             </a:outerShdw>
           </a:effectLst>
         </p:spPr>
+        <p:txBody>
+          <a:bodyPr/>
+          <a:p/>
+        </p:txBody>
       </p:sp>
       <p:sp>
         <p:nvSpPr>
@@ -7848,6 +9257,10 @@
             </a:outerShdw>
           </a:effectLst>
         </p:spPr>
+        <p:txBody>
+          <a:bodyPr/>
+          <a:p/>
+        </p:txBody>
       </p:sp>
       <p:sp>
         <p:nvSpPr>
@@ -7960,6 +9373,10 @@
             </a:outerShdw>
           </a:effectLst>
         </p:spPr>
+        <p:txBody>
+          <a:bodyPr/>
+          <a:p/>
+        </p:txBody>
       </p:sp>
       <p:sp>
         <p:nvSpPr>
@@ -8047,6 +9464,10 @@
             </a:outerShdw>
           </a:effectLst>
         </p:spPr>
+        <p:txBody>
+          <a:bodyPr/>
+          <a:p/>
+        </p:txBody>
       </p:sp>
       <p:sp>
         <p:nvSpPr>
@@ -8159,6 +9580,10 @@
             </a:outerShdw>
           </a:effectLst>
         </p:spPr>
+        <p:txBody>
+          <a:bodyPr/>
+          <a:p/>
+        </p:txBody>
       </p:sp>
       <p:sp>
         <p:nvSpPr>
@@ -8207,7 +9632,7 @@
                 <a:ea typeface="Calibri" pitchFamily="34" charset="-122"/>
                 <a:cs typeface="Calibri" pitchFamily="34" charset="-120"/>
               </a:rPr>
-              <a:t>a lean pip-installable harness: 5 files, its own tests, exit-code-1 when the gate rejects</a:t>
+              <a:t>pip install from GitHub — 6 files, exactly one of which can hallucinate; exit code 1 when the gate rejects</a:t>
             </a:r>
             <a:endParaRPr lang="en-US" sz="1300" dirty="0"/>
           </a:p>
@@ -8260,7 +9685,7 @@
 </p:sld>
 </file>
 
-<file path=ppt/slides/slide17.xml><?xml version="1.0" encoding="utf-8"?>
+<file path=ppt/slides/slide19.xml><?xml version="1.0" encoding="utf-8"?>
 <p:sld xmlns:a="http://schemas.openxmlformats.org/drawingml/2006/main" xmlns:r="http://schemas.openxmlformats.org/officeDocument/2006/relationships" xmlns:p="http://schemas.openxmlformats.org/presentationml/2006/main">
   <p:cSld name="Slide 17">
     <p:bg>
@@ -8498,7 +9923,7 @@
                 <a:ea typeface="Calibri" pitchFamily="34" charset="-122"/>
                 <a:cs typeface="Calibri" pitchFamily="34" charset="-120"/>
               </a:rPr>
-              <a:t>Package it: the debtbuster CLI harness — 5 files, tests, pip install -e, CI-ready</a:t>
+              <a:t>pip install debtbuster from GitHub and drive it: audit, fix, and the exit code CI depends on</a:t>
             </a:r>
             <a:endParaRPr lang="en-US" sz="1550" dirty="0"/>
           </a:p>
@@ -8530,6 +9955,10 @@
             <a:prstDash val="solid"/>
           </a:ln>
         </p:spPr>
+        <p:txBody>
+          <a:bodyPr/>
+          <a:p/>
+        </p:txBody>
       </p:sp>
       <p:sp>
         <p:nvSpPr>
@@ -8596,6 +10025,10 @@
             <a:prstDash val="solid"/>
           </a:ln>
         </p:spPr>
+        <p:txBody>
+          <a:bodyPr/>
+          <a:p/>
+        </p:txBody>
       </p:sp>
       <p:sp>
         <p:nvSpPr>
@@ -8630,1607 +10063,9 @@
                 <a:ea typeface="Courier New" pitchFamily="34" charset="-122"/>
                 <a:cs typeface="Courier New" pitchFamily="34" charset="-120"/>
               </a:rPr>
-              <a:t>STUCK &gt; 3 MIN? RAISE YOUR HAND ✋</a:t>
+              <a:t>🎯 PREDICT IN §4.5 · STUCK? HAND UP ✋</a:t>
             </a:r>
             <a:endParaRPr lang="en-US" sz="1050" dirty="0"/>
-          </a:p>
-        </p:txBody>
-      </p:sp>
-    </p:spTree>
-  </p:cSld>
-  <p:clrMapOvr>
-    <a:masterClrMapping/>
-  </p:clrMapOvr>
-</p:sld>
-</file>
-
-<file path=ppt/slides/slide18.xml><?xml version="1.0" encoding="utf-8"?>
-<p:sld xmlns:a="http://schemas.openxmlformats.org/drawingml/2006/main" xmlns:r="http://schemas.openxmlformats.org/officeDocument/2006/relationships" xmlns:p="http://schemas.openxmlformats.org/presentationml/2006/main">
-  <p:cSld name="Slide 18">
-    <p:bg>
-      <p:bgPr>
-        <a:solidFill>
-          <a:srgbClr val="2A1B3D"/>
-        </a:solidFill>
-      </p:bgPr>
-    </p:bg>
-    <p:spTree>
-      <p:nvGrpSpPr>
-        <p:cNvPr id="1" name=""/>
-        <p:cNvGrpSpPr/>
-        <p:nvPr/>
-      </p:nvGrpSpPr>
-      <p:grpSpPr>
-        <a:xfrm>
-          <a:off x="0" y="0"/>
-          <a:ext cx="0" cy="0"/>
-          <a:chOff x="0" y="0"/>
-          <a:chExt cx="0" cy="0"/>
-        </a:xfrm>
-      </p:grpSpPr>
-      <p:sp>
-        <p:nvSpPr>
-          <p:cNvPr id="2" name="Text 0"/>
-          <p:cNvSpPr/>
-          <p:nvPr/>
-        </p:nvSpPr>
-        <p:spPr>
-          <a:xfrm>
-            <a:off x="548640" y="411480"/>
-            <a:ext cx="8046720" cy="320040"/>
-          </a:xfrm>
-          <a:prstGeom prst="rect">
-            <a:avLst/>
-          </a:prstGeom>
-          <a:noFill/>
-          <a:ln/>
-        </p:spPr>
-        <p:txBody>
-          <a:bodyPr wrap="square" lIns="0" tIns="0" rIns="0" bIns="0" rtlCol="0" anchor="ctr"/>
-          <a:lstStyle/>
-          <a:p>
-            <a:pPr indent="0" marL="0">
-              <a:buNone/>
-            </a:pPr>
-            <a:r>
-              <a:rPr lang="en-US" sz="1200" spc="300" kern="0" dirty="0">
-                <a:solidFill>
-                  <a:srgbClr val="A78BFA"/>
-                </a:solidFill>
-                <a:latin typeface="Courier New" pitchFamily="34" charset="0"/>
-                <a:ea typeface="Courier New" pitchFamily="34" charset="-122"/>
-                <a:cs typeface="Courier New" pitchFamily="34" charset="-120"/>
-              </a:rPr>
-              <a:t>WHAT YOU BUILT TODAY</a:t>
-            </a:r>
-            <a:endParaRPr lang="en-US" sz="1200" dirty="0"/>
-          </a:p>
-        </p:txBody>
-      </p:sp>
-      <p:sp>
-        <p:nvSpPr>
-          <p:cNvPr id="3" name="Text 1"/>
-          <p:cNvSpPr/>
-          <p:nvPr/>
-        </p:nvSpPr>
-        <p:spPr>
-          <a:xfrm>
-            <a:off x="548640" y="777240"/>
-            <a:ext cx="8046720" cy="777240"/>
-          </a:xfrm>
-          <a:prstGeom prst="rect">
-            <a:avLst/>
-          </a:prstGeom>
-          <a:noFill/>
-          <a:ln/>
-        </p:spPr>
-        <p:txBody>
-          <a:bodyPr wrap="square" lIns="0" tIns="0" rIns="0" bIns="0" rtlCol="0" anchor="ctr"/>
-          <a:lstStyle/>
-          <a:p>
-            <a:pPr indent="0" marL="0">
-              <a:buNone/>
-            </a:pPr>
-            <a:r>
-              <a:rPr lang="en-US" sz="2800" b="1" dirty="0">
-                <a:solidFill>
-                  <a:srgbClr val="FFFFFF"/>
-                </a:solidFill>
-                <a:latin typeface="Cambria" pitchFamily="34" charset="0"/>
-                <a:ea typeface="Cambria" pitchFamily="34" charset="-122"/>
-                <a:cs typeface="Cambria" pitchFamily="34" charset="-120"/>
-              </a:rPr>
-              <a:t>A verified, cooperative agent pipeline — in one notebook</a:t>
-            </a:r>
-            <a:endParaRPr lang="en-US" sz="2800" dirty="0"/>
-          </a:p>
-        </p:txBody>
-      </p:sp>
-      <p:sp>
-        <p:nvSpPr>
-          <p:cNvPr id="4" name="Text 2"/>
-          <p:cNvSpPr/>
-          <p:nvPr/>
-        </p:nvSpPr>
-        <p:spPr>
-          <a:xfrm>
-            <a:off x="594360" y="1691640"/>
-            <a:ext cx="457200" cy="457200"/>
-          </a:xfrm>
-          <a:prstGeom prst="rect">
-            <a:avLst/>
-          </a:prstGeom>
-          <a:noFill/>
-          <a:ln/>
-        </p:spPr>
-        <p:txBody>
-          <a:bodyPr wrap="square" lIns="0" tIns="0" rIns="0" bIns="0" rtlCol="0" anchor="ctr"/>
-          <a:lstStyle/>
-          <a:p>
-            <a:pPr indent="0" marL="0">
-              <a:buNone/>
-            </a:pPr>
-            <a:r>
-              <a:rPr lang="en-US" sz="2000" dirty="0">
-                <a:solidFill>
-                  <a:srgbClr val="000000"/>
-                </a:solidFill>
-              </a:rPr>
-              <a:t>🧠</a:t>
-            </a:r>
-            <a:endParaRPr lang="en-US" sz="2000" dirty="0"/>
-          </a:p>
-        </p:txBody>
-      </p:sp>
-      <p:sp>
-        <p:nvSpPr>
-          <p:cNvPr id="5" name="Text 3"/>
-          <p:cNvSpPr/>
-          <p:nvPr/>
-        </p:nvSpPr>
-        <p:spPr>
-          <a:xfrm>
-            <a:off x="1143000" y="1719072"/>
-            <a:ext cx="7406640" cy="457200"/>
-          </a:xfrm>
-          <a:prstGeom prst="rect">
-            <a:avLst/>
-          </a:prstGeom>
-          <a:noFill/>
-          <a:ln/>
-        </p:spPr>
-        <p:txBody>
-          <a:bodyPr wrap="square" lIns="0" tIns="0" rIns="0" bIns="0" rtlCol="0" anchor="ctr"/>
-          <a:lstStyle/>
-          <a:p>
-            <a:pPr indent="0" marL="0">
-              <a:buNone/>
-            </a:pPr>
-            <a:r>
-              <a:rPr lang="en-US" sz="1450" b="1" dirty="0">
-                <a:solidFill>
-                  <a:srgbClr val="FFFFFF"/>
-                </a:solidFill>
-                <a:latin typeface="Calibri" pitchFamily="34" charset="0"/>
-                <a:ea typeface="Calibri" pitchFamily="34" charset="-122"/>
-                <a:cs typeface="Calibri" pitchFamily="34" charset="-120"/>
-              </a:rPr>
-              <a:t>Agents = role + brain + tools + contract  </a:t>
-            </a:r>
-            <a:pPr indent="0" marL="0">
-              <a:buNone/>
-            </a:pPr>
-            <a:r>
-              <a:rPr lang="en-US" sz="1450" dirty="0">
-                <a:solidFill>
-                  <a:srgbClr val="BBA9DE"/>
-                </a:solidFill>
-                <a:latin typeface="Calibri" pitchFamily="34" charset="0"/>
-                <a:ea typeface="Calibri" pitchFamily="34" charset="-122"/>
-                <a:cs typeface="Calibri" pitchFamily="34" charset="-120"/>
-              </a:rPr>
-              <a:t>— no framework magic required</a:t>
-            </a:r>
-            <a:endParaRPr lang="en-US" sz="1450" dirty="0"/>
-          </a:p>
-        </p:txBody>
-      </p:sp>
-      <p:sp>
-        <p:nvSpPr>
-          <p:cNvPr id="6" name="Text 4"/>
-          <p:cNvSpPr/>
-          <p:nvPr/>
-        </p:nvSpPr>
-        <p:spPr>
-          <a:xfrm>
-            <a:off x="594360" y="2313432"/>
-            <a:ext cx="457200" cy="457200"/>
-          </a:xfrm>
-          <a:prstGeom prst="rect">
-            <a:avLst/>
-          </a:prstGeom>
-          <a:noFill/>
-          <a:ln/>
-        </p:spPr>
-        <p:txBody>
-          <a:bodyPr wrap="square" lIns="0" tIns="0" rIns="0" bIns="0" rtlCol="0" anchor="ctr"/>
-          <a:lstStyle/>
-          <a:p>
-            <a:pPr indent="0" marL="0">
-              <a:buNone/>
-            </a:pPr>
-            <a:r>
-              <a:rPr lang="en-US" sz="2000" dirty="0">
-                <a:solidFill>
-                  <a:srgbClr val="000000"/>
-                </a:solidFill>
-              </a:rPr>
-              <a:t>⚖️</a:t>
-            </a:r>
-            <a:endParaRPr lang="en-US" sz="2000" dirty="0"/>
-          </a:p>
-        </p:txBody>
-      </p:sp>
-      <p:sp>
-        <p:nvSpPr>
-          <p:cNvPr id="7" name="Text 5"/>
-          <p:cNvSpPr/>
-          <p:nvPr/>
-        </p:nvSpPr>
-        <p:spPr>
-          <a:xfrm>
-            <a:off x="1143000" y="2340864"/>
-            <a:ext cx="7406640" cy="457200"/>
-          </a:xfrm>
-          <a:prstGeom prst="rect">
-            <a:avLst/>
-          </a:prstGeom>
-          <a:noFill/>
-          <a:ln/>
-        </p:spPr>
-        <p:txBody>
-          <a:bodyPr wrap="square" lIns="0" tIns="0" rIns="0" bIns="0" rtlCol="0" anchor="ctr"/>
-          <a:lstStyle/>
-          <a:p>
-            <a:pPr indent="0" marL="0">
-              <a:buNone/>
-            </a:pPr>
-            <a:r>
-              <a:rPr lang="en-US" sz="1450" b="1" dirty="0">
-                <a:solidFill>
-                  <a:srgbClr val="FFFFFF"/>
-                </a:solidFill>
-                <a:latin typeface="Calibri" pitchFamily="34" charset="0"/>
-                <a:ea typeface="Calibri" pitchFamily="34" charset="-122"/>
-                <a:cs typeface="Calibri" pitchFamily="34" charset="-120"/>
-              </a:rPr>
-              <a:t>Tools measure, LLMs interpret  </a:t>
-            </a:r>
-            <a:pPr indent="0" marL="0">
-              <a:buNone/>
-            </a:pPr>
-            <a:r>
-              <a:rPr lang="en-US" sz="1450" dirty="0">
-                <a:solidFill>
-                  <a:srgbClr val="BBA9DE"/>
-                </a:solidFill>
-                <a:latin typeface="Calibri" pitchFamily="34" charset="0"/>
-                <a:ea typeface="Calibri" pitchFamily="34" charset="-122"/>
-                <a:cs typeface="Calibri" pitchFamily="34" charset="-120"/>
-              </a:rPr>
-              <a:t>— grounding beats guessing</a:t>
-            </a:r>
-            <a:endParaRPr lang="en-US" sz="1450" dirty="0"/>
-          </a:p>
-        </p:txBody>
-      </p:sp>
-      <p:sp>
-        <p:nvSpPr>
-          <p:cNvPr id="8" name="Text 6"/>
-          <p:cNvSpPr/>
-          <p:nvPr/>
-        </p:nvSpPr>
-        <p:spPr>
-          <a:xfrm>
-            <a:off x="594360" y="2935224"/>
-            <a:ext cx="457200" cy="457200"/>
-          </a:xfrm>
-          <a:prstGeom prst="rect">
-            <a:avLst/>
-          </a:prstGeom>
-          <a:noFill/>
-          <a:ln/>
-        </p:spPr>
-        <p:txBody>
-          <a:bodyPr wrap="square" lIns="0" tIns="0" rIns="0" bIns="0" rtlCol="0" anchor="ctr"/>
-          <a:lstStyle/>
-          <a:p>
-            <a:pPr indent="0" marL="0">
-              <a:buNone/>
-            </a:pPr>
-            <a:r>
-              <a:rPr lang="en-US" sz="2000" dirty="0">
-                <a:solidFill>
-                  <a:srgbClr val="000000"/>
-                </a:solidFill>
-              </a:rPr>
-              <a:t>🛡️</a:t>
-            </a:r>
-            <a:endParaRPr lang="en-US" sz="2000" dirty="0"/>
-          </a:p>
-        </p:txBody>
-      </p:sp>
-      <p:sp>
-        <p:nvSpPr>
-          <p:cNvPr id="9" name="Text 7"/>
-          <p:cNvSpPr/>
-          <p:nvPr/>
-        </p:nvSpPr>
-        <p:spPr>
-          <a:xfrm>
-            <a:off x="1143000" y="2962656"/>
-            <a:ext cx="7406640" cy="457200"/>
-          </a:xfrm>
-          <a:prstGeom prst="rect">
-            <a:avLst/>
-          </a:prstGeom>
-          <a:noFill/>
-          <a:ln/>
-        </p:spPr>
-        <p:txBody>
-          <a:bodyPr wrap="square" lIns="0" tIns="0" rIns="0" bIns="0" rtlCol="0" anchor="ctr"/>
-          <a:lstStyle/>
-          <a:p>
-            <a:pPr indent="0" marL="0">
-              <a:buNone/>
-            </a:pPr>
-            <a:r>
-              <a:rPr lang="en-US" sz="1450" b="1" dirty="0">
-                <a:solidFill>
-                  <a:srgbClr val="FFFFFF"/>
-                </a:solidFill>
-                <a:latin typeface="Calibri" pitchFamily="34" charset="0"/>
-                <a:ea typeface="Calibri" pitchFamily="34" charset="-122"/>
-                <a:cs typeface="Calibri" pitchFamily="34" charset="-120"/>
-              </a:rPr>
-              <a:t>Verification is what earns the trust  </a:t>
-            </a:r>
-            <a:pPr indent="0" marL="0">
-              <a:buNone/>
-            </a:pPr>
-            <a:r>
-              <a:rPr lang="en-US" sz="1450" dirty="0">
-                <a:solidFill>
-                  <a:srgbClr val="BBA9DE"/>
-                </a:solidFill>
-                <a:latin typeface="Calibri" pitchFamily="34" charset="0"/>
-                <a:ea typeface="Calibri" pitchFamily="34" charset="-122"/>
-                <a:cs typeface="Calibri" pitchFamily="34" charset="-120"/>
-              </a:rPr>
-              <a:t>— syntax → tests → metrics, cheapest first</a:t>
-            </a:r>
-            <a:endParaRPr lang="en-US" sz="1450" dirty="0"/>
-          </a:p>
-        </p:txBody>
-      </p:sp>
-      <p:sp>
-        <p:nvSpPr>
-          <p:cNvPr id="10" name="Text 8"/>
-          <p:cNvSpPr/>
-          <p:nvPr/>
-        </p:nvSpPr>
-        <p:spPr>
-          <a:xfrm>
-            <a:off x="594360" y="3557016"/>
-            <a:ext cx="457200" cy="457200"/>
-          </a:xfrm>
-          <a:prstGeom prst="rect">
-            <a:avLst/>
-          </a:prstGeom>
-          <a:noFill/>
-          <a:ln/>
-        </p:spPr>
-        <p:txBody>
-          <a:bodyPr wrap="square" lIns="0" tIns="0" rIns="0" bIns="0" rtlCol="0" anchor="ctr"/>
-          <a:lstStyle/>
-          <a:p>
-            <a:pPr indent="0" marL="0">
-              <a:buNone/>
-            </a:pPr>
-            <a:r>
-              <a:rPr lang="en-US" sz="2000" dirty="0">
-                <a:solidFill>
-                  <a:srgbClr val="000000"/>
-                </a:solidFill>
-              </a:rPr>
-              <a:t>💳</a:t>
-            </a:r>
-            <a:endParaRPr lang="en-US" sz="2000" dirty="0"/>
-          </a:p>
-        </p:txBody>
-      </p:sp>
-      <p:sp>
-        <p:nvSpPr>
-          <p:cNvPr id="11" name="Text 9"/>
-          <p:cNvSpPr/>
-          <p:nvPr/>
-        </p:nvSpPr>
-        <p:spPr>
-          <a:xfrm>
-            <a:off x="1143000" y="3584448"/>
-            <a:ext cx="7406640" cy="457200"/>
-          </a:xfrm>
-          <a:prstGeom prst="rect">
-            <a:avLst/>
-          </a:prstGeom>
-          <a:noFill/>
-          <a:ln/>
-        </p:spPr>
-        <p:txBody>
-          <a:bodyPr wrap="square" lIns="0" tIns="0" rIns="0" bIns="0" rtlCol="0" anchor="ctr"/>
-          <a:lstStyle/>
-          <a:p>
-            <a:pPr indent="0" marL="0">
-              <a:buNone/>
-            </a:pPr>
-            <a:r>
-              <a:rPr lang="en-US" sz="1450" b="1" dirty="0">
-                <a:solidFill>
-                  <a:srgbClr val="FFFFFF"/>
-                </a:solidFill>
-                <a:latin typeface="Calibri" pitchFamily="34" charset="0"/>
-                <a:ea typeface="Calibri" pitchFamily="34" charset="-122"/>
-                <a:cs typeface="Calibri" pitchFamily="34" charset="-120"/>
-              </a:rPr>
-              <a:t>Debt is a portfolio to manage  </a:t>
-            </a:r>
-            <a:pPr indent="0" marL="0">
-              <a:buNone/>
-            </a:pPr>
-            <a:r>
-              <a:rPr lang="en-US" sz="1450" dirty="0">
-                <a:solidFill>
-                  <a:srgbClr val="BBA9DE"/>
-                </a:solidFill>
-                <a:latin typeface="Calibri" pitchFamily="34" charset="0"/>
-                <a:ea typeface="Calibri" pitchFamily="34" charset="-122"/>
-                <a:cs typeface="Calibri" pitchFamily="34" charset="-120"/>
-              </a:rPr>
-              <a:t>— classify (BEACon-TD) → triage (interest ÷ principal) → resolve</a:t>
-            </a:r>
-            <a:endParaRPr lang="en-US" sz="1450" dirty="0"/>
-          </a:p>
-        </p:txBody>
-      </p:sp>
-      <p:sp>
-        <p:nvSpPr>
-          <p:cNvPr id="12" name="Shape 10"/>
-          <p:cNvSpPr/>
-          <p:nvPr/>
-        </p:nvSpPr>
-        <p:spPr>
-          <a:xfrm>
-            <a:off x="548640" y="4224528"/>
-            <a:ext cx="8046720" cy="0"/>
-          </a:xfrm>
-          <a:prstGeom prst="line">
-            <a:avLst/>
-          </a:prstGeom>
-          <a:noFill/>
-          <a:ln w="12700">
-            <a:solidFill>
-              <a:srgbClr val="4A3868"/>
-            </a:solidFill>
-            <a:prstDash val="solid"/>
-          </a:ln>
-        </p:spPr>
-      </p:sp>
-      <p:sp>
-        <p:nvSpPr>
-          <p:cNvPr id="13" name="Text 11"/>
-          <p:cNvSpPr/>
-          <p:nvPr/>
-        </p:nvSpPr>
-        <p:spPr>
-          <a:xfrm>
-            <a:off x="548640" y="4343400"/>
-            <a:ext cx="8046720" cy="274320"/>
-          </a:xfrm>
-          <a:prstGeom prst="rect">
-            <a:avLst/>
-          </a:prstGeom>
-          <a:noFill/>
-          <a:ln/>
-        </p:spPr>
-        <p:txBody>
-          <a:bodyPr wrap="square" lIns="0" tIns="0" rIns="0" bIns="0" rtlCol="0" anchor="ctr"/>
-          <a:lstStyle/>
-          <a:p>
-            <a:pPr indent="0" marL="0">
-              <a:buNone/>
-            </a:pPr>
-            <a:r>
-              <a:rPr lang="en-US" sz="1200" b="1" dirty="0">
-                <a:solidFill>
-                  <a:srgbClr val="A78BFA"/>
-                </a:solidFill>
-                <a:latin typeface="Calibri" pitchFamily="34" charset="0"/>
-                <a:ea typeface="Calibri" pitchFamily="34" charset="-122"/>
-                <a:cs typeface="Calibri" pitchFamily="34" charset="-120"/>
-              </a:rPr>
-              <a:t>Tools &amp; papers:  </a:t>
-            </a:r>
-            <a:pPr indent="0" marL="0">
-              <a:buNone/>
-            </a:pPr>
-            <a:r>
-              <a:rPr lang="en-US" sz="1200" dirty="0">
-                <a:solidFill>
-                  <a:srgbClr val="D8CDEE"/>
-                </a:solidFill>
-                <a:latin typeface="Calibri" pitchFamily="34" charset="0"/>
-                <a:ea typeface="Calibri" pitchFamily="34" charset="-122"/>
-                <a:cs typeface="Calibri" pitchFamily="34" charset="-120"/>
-              </a:rPr>
-              <a:t>PyExamine (MSR'25) · MLScent (CAIN'25) · BEACon-TD (JSS'25) · TD-Suite  —  github.com/KarthikShivasankar</a:t>
-            </a:r>
-            <a:endParaRPr lang="en-US" sz="1200" dirty="0"/>
-          </a:p>
-        </p:txBody>
-      </p:sp>
-      <p:sp>
-        <p:nvSpPr>
-          <p:cNvPr id="14" name="Text 12"/>
-          <p:cNvSpPr/>
-          <p:nvPr/>
-        </p:nvSpPr>
-        <p:spPr>
-          <a:xfrm>
-            <a:off x="548640" y="4681728"/>
-            <a:ext cx="8046720" cy="274320"/>
-          </a:xfrm>
-          <a:prstGeom prst="rect">
-            <a:avLst/>
-          </a:prstGeom>
-          <a:noFill/>
-          <a:ln/>
-        </p:spPr>
-        <p:txBody>
-          <a:bodyPr wrap="square" lIns="0" tIns="0" rIns="0" bIns="0" rtlCol="0" anchor="ctr"/>
-          <a:lstStyle/>
-          <a:p>
-            <a:pPr indent="0" marL="0">
-              <a:buNone/>
-            </a:pPr>
-            <a:r>
-              <a:rPr lang="en-US" sz="1050" dirty="0">
-                <a:solidFill>
-                  <a:srgbClr val="9C86C8"/>
-                </a:solidFill>
-                <a:latin typeface="Courier New" pitchFamily="34" charset="0"/>
-                <a:ea typeface="Courier New" pitchFamily="34" charset="-122"/>
-                <a:cs typeface="Courier New" pitchFamily="34" charset="-120"/>
-              </a:rPr>
-              <a:t>Karthik Shivashankar · karthik13sankar@outlook.com  ·  Adela Nedisan Videsjorden  ·  LLMA4SE 2026</a:t>
-            </a:r>
-            <a:endParaRPr lang="en-US" sz="1050" dirty="0"/>
-          </a:p>
-        </p:txBody>
-      </p:sp>
-    </p:spTree>
-  </p:cSld>
-  <p:clrMapOvr>
-    <a:masterClrMapping/>
-  </p:clrMapOvr>
-</p:sld>
-</file>
-
-<file path=ppt/slides/slide19.xml><?xml version="1.0" encoding="utf-8"?>
-<p:sld xmlns:a="http://schemas.openxmlformats.org/drawingml/2006/main" xmlns:r="http://schemas.openxmlformats.org/officeDocument/2006/relationships" xmlns:p="http://schemas.openxmlformats.org/presentationml/2006/main">
-  <p:cSld name="Slide 5">
-    <p:bg>
-      <p:bgPr>
-        <a:solidFill>
-          <a:srgbClr val="FFFFFF"/>
-        </a:solidFill>
-      </p:bgPr>
-    </p:bg>
-    <p:spTree>
-      <p:nvGrpSpPr>
-        <p:cNvPr id="1" name=""/>
-        <p:cNvGrpSpPr/>
-        <p:nvPr/>
-      </p:nvGrpSpPr>
-      <p:grpSpPr>
-        <a:xfrm>
-          <a:off x="0" y="0"/>
-          <a:ext cx="0" cy="0"/>
-          <a:chOff x="0" y="0"/>
-          <a:chExt cx="0" cy="0"/>
-        </a:xfrm>
-      </p:grpSpPr>
-      <p:sp>
-        <p:nvSpPr>
-          <p:cNvPr id="2" name="Text 0"/>
-          <p:cNvSpPr/>
-          <p:nvPr/>
-        </p:nvSpPr>
-        <p:spPr>
-          <a:xfrm>
-            <a:off x="502920" y="274320"/>
-            <a:ext cx="8138160" cy="274320"/>
-          </a:xfrm>
-          <a:prstGeom prst="rect">
-            <a:avLst/>
-          </a:prstGeom>
-          <a:noFill/>
-          <a:ln/>
-        </p:spPr>
-        <p:txBody>
-          <a:bodyPr wrap="square" lIns="0" tIns="0" rIns="0" bIns="0" rtlCol="0" anchor="ctr"/>
-          <a:lstStyle/>
-          <a:p>
-            <a:pPr indent="0" marL="0">
-              <a:buNone/>
-            </a:pPr>
-            <a:r>
-              <a:rPr lang="en-US" sz="1100" spc="300" kern="0" dirty="0">
-                <a:solidFill>
-                  <a:srgbClr val="6D28D9"/>
-                </a:solidFill>
-                <a:latin typeface="Courier New" pitchFamily="34" charset="0"/>
-                <a:ea typeface="Courier New" pitchFamily="34" charset="-122"/>
-                <a:cs typeface="Courier New" pitchFamily="34" charset="-120"/>
-              </a:rPr>
-              <a:t>SETUP · THE ONLY HARD SYNC POINT</a:t>
-            </a:r>
-            <a:endParaRPr lang="en-US" sz="1100" dirty="0"/>
-          </a:p>
-        </p:txBody>
-      </p:sp>
-      <p:sp>
-        <p:nvSpPr>
-          <p:cNvPr id="3" name="Text 1"/>
-          <p:cNvSpPr/>
-          <p:nvPr/>
-        </p:nvSpPr>
-        <p:spPr>
-          <a:xfrm>
-            <a:off x="502920" y="530352"/>
-            <a:ext cx="8138160" cy="685800"/>
-          </a:xfrm>
-          <a:prstGeom prst="rect">
-            <a:avLst/>
-          </a:prstGeom>
-          <a:noFill/>
-          <a:ln/>
-        </p:spPr>
-        <p:txBody>
-          <a:bodyPr wrap="square" lIns="0" tIns="0" rIns="0" bIns="0" rtlCol="0" anchor="ctr"/>
-          <a:lstStyle/>
-          <a:p>
-            <a:pPr indent="0" marL="0">
-              <a:buNone/>
-            </a:pPr>
-            <a:r>
-              <a:rPr lang="en-US" sz="3000" b="1" dirty="0">
-                <a:solidFill>
-                  <a:srgbClr val="2A1B3D"/>
-                </a:solidFill>
-                <a:latin typeface="Cambria" pitchFamily="34" charset="0"/>
-                <a:ea typeface="Cambria" pitchFamily="34" charset="-122"/>
-                <a:cs typeface="Cambria" pitchFamily="34" charset="-120"/>
-              </a:rPr>
-              <a:t>Your key, your budget, your brain</a:t>
-            </a:r>
-            <a:endParaRPr lang="en-US" sz="3000" dirty="0"/>
-          </a:p>
-        </p:txBody>
-      </p:sp>
-      <p:sp>
-        <p:nvSpPr>
-          <p:cNvPr id="4" name="Shape 2"/>
-          <p:cNvSpPr/>
-          <p:nvPr/>
-        </p:nvSpPr>
-        <p:spPr>
-          <a:xfrm>
-            <a:off x="502920" y="1417320"/>
-            <a:ext cx="3931920" cy="1463040"/>
-          </a:xfrm>
-          <a:prstGeom prst="roundRect">
-            <a:avLst>
-              <a:gd name="adj" fmla="val 5000"/>
-            </a:avLst>
-          </a:prstGeom>
-          <a:solidFill>
-            <a:srgbClr val="FFFFFF"/>
-          </a:solidFill>
-          <a:ln w="12700">
-            <a:solidFill>
-              <a:srgbClr val="E4DCF5"/>
-            </a:solidFill>
-            <a:prstDash val="solid"/>
-          </a:ln>
-          <a:effectLst>
-            <a:outerShdw sx="100000" sy="100000" kx="0" ky="0" algn="bl" rotWithShape="0" blurRad="88900" dist="25400" dir="5400000">
-              <a:srgbClr val="3A2A55">
-                <a:alpha val="14000"/>
-              </a:srgbClr>
-            </a:outerShdw>
-          </a:effectLst>
-        </p:spPr>
-      </p:sp>
-      <p:sp>
-        <p:nvSpPr>
-          <p:cNvPr id="5" name="Text 3"/>
-          <p:cNvSpPr/>
-          <p:nvPr/>
-        </p:nvSpPr>
-        <p:spPr>
-          <a:xfrm>
-            <a:off x="731520" y="1545336"/>
-            <a:ext cx="2103120" cy="365760"/>
-          </a:xfrm>
-          <a:prstGeom prst="rect">
-            <a:avLst/>
-          </a:prstGeom>
-          <a:noFill/>
-          <a:ln/>
-        </p:spPr>
-        <p:txBody>
-          <a:bodyPr wrap="square" lIns="0" tIns="0" rIns="0" bIns="0" rtlCol="0" anchor="ctr"/>
-          <a:lstStyle/>
-          <a:p>
-            <a:pPr indent="0" marL="0">
-              <a:buNone/>
-            </a:pPr>
-            <a:r>
-              <a:rPr lang="en-US" sz="1600" b="1" dirty="0">
-                <a:solidFill>
-                  <a:srgbClr val="2A1B3D"/>
-                </a:solidFill>
-                <a:latin typeface="Courier New" pitchFamily="34" charset="0"/>
-                <a:ea typeface="Courier New" pitchFamily="34" charset="-122"/>
-                <a:cs typeface="Courier New" pitchFamily="34" charset="-120"/>
-              </a:rPr>
-              <a:t>.env file</a:t>
-            </a:r>
-            <a:endParaRPr lang="en-US" sz="1600" dirty="0"/>
-          </a:p>
-        </p:txBody>
-      </p:sp>
-      <p:sp>
-        <p:nvSpPr>
-          <p:cNvPr id="6" name="Shape 4"/>
-          <p:cNvSpPr/>
-          <p:nvPr/>
-        </p:nvSpPr>
-        <p:spPr>
-          <a:xfrm>
-            <a:off x="2743200" y="1572768"/>
-            <a:ext cx="1508760" cy="310896"/>
-          </a:xfrm>
-          <a:prstGeom prst="roundRect">
-            <a:avLst>
-              <a:gd name="adj" fmla="val 50000"/>
-            </a:avLst>
-          </a:prstGeom>
-          <a:solidFill>
-            <a:srgbClr val="F3EFFB"/>
-          </a:solidFill>
-          <a:ln w="12700">
-            <a:solidFill>
-              <a:srgbClr val="A78BFA"/>
-            </a:solidFill>
-            <a:prstDash val="solid"/>
-          </a:ln>
-        </p:spPr>
-      </p:sp>
-      <p:sp>
-        <p:nvSpPr>
-          <p:cNvPr id="7" name="Text 5"/>
-          <p:cNvSpPr/>
-          <p:nvPr/>
-        </p:nvSpPr>
-        <p:spPr>
-          <a:xfrm>
-            <a:off x="2743200" y="1572768"/>
-            <a:ext cx="1508760" cy="310896"/>
-          </a:xfrm>
-          <a:prstGeom prst="rect">
-            <a:avLst/>
-          </a:prstGeom>
-          <a:noFill/>
-          <a:ln/>
-        </p:spPr>
-        <p:txBody>
-          <a:bodyPr wrap="square" lIns="0" tIns="0" rIns="0" bIns="0" rtlCol="0" anchor="ctr"/>
-          <a:lstStyle/>
-          <a:p>
-            <a:pPr algn="ctr" indent="0" marL="0">
-              <a:buNone/>
-            </a:pPr>
-            <a:r>
-              <a:rPr lang="en-US" sz="850" dirty="0">
-                <a:solidFill>
-                  <a:srgbClr val="6D28D9"/>
-                </a:solidFill>
-                <a:latin typeface="Courier New" pitchFamily="34" charset="0"/>
-                <a:ea typeface="Courier New" pitchFamily="34" charset="-122"/>
-                <a:cs typeface="Courier New" pitchFamily="34" charset="-120"/>
-              </a:rPr>
-              <a:t>Upload</a:t>
-            </a:r>
-            <a:endParaRPr lang="en-US" sz="850" dirty="0"/>
-          </a:p>
-        </p:txBody>
-      </p:sp>
-      <p:sp>
-        <p:nvSpPr>
-          <p:cNvPr id="8" name="Text 6"/>
-          <p:cNvSpPr/>
-          <p:nvPr/>
-        </p:nvSpPr>
-        <p:spPr>
-          <a:xfrm>
-            <a:off x="731520" y="1929384"/>
-            <a:ext cx="3520440" cy="640080"/>
-          </a:xfrm>
-          <a:prstGeom prst="rect">
-            <a:avLst/>
-          </a:prstGeom>
-          <a:noFill/>
-          <a:ln/>
-        </p:spPr>
-        <p:txBody>
-          <a:bodyPr wrap="square" lIns="0" tIns="0" rIns="0" bIns="0" rtlCol="0" anchor="ctr"/>
-          <a:lstStyle/>
-          <a:p>
-            <a:pPr indent="0" marL="0">
-              <a:buNone/>
-            </a:pPr>
-            <a:r>
-              <a:rPr lang="en-US" sz="1050" dirty="0">
-                <a:solidFill>
-                  <a:srgbClr val="3F3F49"/>
-                </a:solidFill>
-                <a:latin typeface="Calibri" pitchFamily="34" charset="0"/>
-                <a:ea typeface="Calibri" pitchFamily="34" charset="-122"/>
-                <a:cs typeface="Calibri" pitchFamily="34" charset="-120"/>
-              </a:rPr>
-              <a:t>Drop a .env into the file sidebar. The notebook parses it — and picks up OPENAI_MODEL while it is there.</a:t>
-            </a:r>
-            <a:endParaRPr lang="en-US" sz="1050" dirty="0"/>
-          </a:p>
-        </p:txBody>
-      </p:sp>
-      <p:sp>
-        <p:nvSpPr>
-          <p:cNvPr id="9" name="Text 7"/>
-          <p:cNvSpPr/>
-          <p:nvPr/>
-        </p:nvSpPr>
-        <p:spPr>
-          <a:xfrm>
-            <a:off x="731520" y="2569464"/>
-            <a:ext cx="3520440" cy="256032"/>
-          </a:xfrm>
-          <a:prstGeom prst="rect">
-            <a:avLst/>
-          </a:prstGeom>
-          <a:noFill/>
-          <a:ln/>
-        </p:spPr>
-        <p:txBody>
-          <a:bodyPr wrap="square" lIns="0" tIns="0" rIns="0" bIns="0" rtlCol="0" anchor="ctr"/>
-          <a:lstStyle/>
-          <a:p>
-            <a:pPr indent="0" marL="0">
-              <a:buNone/>
-            </a:pPr>
-            <a:r>
-              <a:rPr lang="en-US" sz="850" dirty="0">
-                <a:solidFill>
-                  <a:srgbClr val="6D28D9"/>
-                </a:solidFill>
-                <a:latin typeface="Courier New" pitchFamily="34" charset="0"/>
-                <a:ea typeface="Courier New" pitchFamily="34" charset="-122"/>
-                <a:cs typeface="Courier New" pitchFamily="34" charset="-120"/>
-              </a:rPr>
-              <a:t>OPENAI_API_KEY=sk-…</a:t>
-            </a:r>
-            <a:endParaRPr lang="en-US" sz="850" dirty="0"/>
-          </a:p>
-        </p:txBody>
-      </p:sp>
-      <p:sp>
-        <p:nvSpPr>
-          <p:cNvPr id="10" name="Shape 8"/>
-          <p:cNvSpPr/>
-          <p:nvPr/>
-        </p:nvSpPr>
-        <p:spPr>
-          <a:xfrm>
-            <a:off x="4709160" y="1417320"/>
-            <a:ext cx="3931920" cy="1463040"/>
-          </a:xfrm>
-          <a:prstGeom prst="roundRect">
-            <a:avLst>
-              <a:gd name="adj" fmla="val 5000"/>
-            </a:avLst>
-          </a:prstGeom>
-          <a:solidFill>
-            <a:srgbClr val="FFFFFF"/>
-          </a:solidFill>
-          <a:ln w="12700">
-            <a:solidFill>
-              <a:srgbClr val="E4DCF5"/>
-            </a:solidFill>
-            <a:prstDash val="solid"/>
-          </a:ln>
-          <a:effectLst>
-            <a:outerShdw sx="100000" sy="100000" kx="0" ky="0" algn="bl" rotWithShape="0" blurRad="88900" dist="25400" dir="5400000">
-              <a:srgbClr val="3A2A55">
-                <a:alpha val="14000"/>
-              </a:srgbClr>
-            </a:outerShdw>
-          </a:effectLst>
-        </p:spPr>
-      </p:sp>
-      <p:sp>
-        <p:nvSpPr>
-          <p:cNvPr id="11" name="Text 9"/>
-          <p:cNvSpPr/>
-          <p:nvPr/>
-        </p:nvSpPr>
-        <p:spPr>
-          <a:xfrm>
-            <a:off x="4937760" y="1545336"/>
-            <a:ext cx="2103120" cy="365760"/>
-          </a:xfrm>
-          <a:prstGeom prst="rect">
-            <a:avLst/>
-          </a:prstGeom>
-          <a:noFill/>
-          <a:ln/>
-        </p:spPr>
-        <p:txBody>
-          <a:bodyPr wrap="square" lIns="0" tIns="0" rIns="0" bIns="0" rtlCol="0" anchor="ctr"/>
-          <a:lstStyle/>
-          <a:p>
-            <a:pPr indent="0" marL="0">
-              <a:buNone/>
-            </a:pPr>
-            <a:r>
-              <a:rPr lang="en-US" sz="1600" b="1" dirty="0">
-                <a:solidFill>
-                  <a:srgbClr val="2A1B3D"/>
-                </a:solidFill>
-                <a:latin typeface="Courier New" pitchFamily="34" charset="0"/>
-                <a:ea typeface="Courier New" pitchFamily="34" charset="-122"/>
-                <a:cs typeface="Courier New" pitchFamily="34" charset="-120"/>
-              </a:rPr>
-              <a:t>Colab Secrets</a:t>
-            </a:r>
-            <a:endParaRPr lang="en-US" sz="1600" dirty="0"/>
-          </a:p>
-        </p:txBody>
-      </p:sp>
-      <p:sp>
-        <p:nvSpPr>
-          <p:cNvPr id="12" name="Shape 10"/>
-          <p:cNvSpPr/>
-          <p:nvPr/>
-        </p:nvSpPr>
-        <p:spPr>
-          <a:xfrm>
-            <a:off x="6949440" y="1572768"/>
-            <a:ext cx="1508760" cy="310896"/>
-          </a:xfrm>
-          <a:prstGeom prst="roundRect">
-            <a:avLst>
-              <a:gd name="adj" fmla="val 50000"/>
-            </a:avLst>
-          </a:prstGeom>
-          <a:solidFill>
-            <a:srgbClr val="F3EFFB"/>
-          </a:solidFill>
-          <a:ln w="12700">
-            <a:solidFill>
-              <a:srgbClr val="A78BFA"/>
-            </a:solidFill>
-            <a:prstDash val="solid"/>
-          </a:ln>
-        </p:spPr>
-      </p:sp>
-      <p:sp>
-        <p:nvSpPr>
-          <p:cNvPr id="13" name="Text 11"/>
-          <p:cNvSpPr/>
-          <p:nvPr/>
-        </p:nvSpPr>
-        <p:spPr>
-          <a:xfrm>
-            <a:off x="6949440" y="1572768"/>
-            <a:ext cx="1508760" cy="310896"/>
-          </a:xfrm>
-          <a:prstGeom prst="rect">
-            <a:avLst/>
-          </a:prstGeom>
-          <a:noFill/>
-          <a:ln/>
-        </p:spPr>
-        <p:txBody>
-          <a:bodyPr wrap="square" lIns="0" tIns="0" rIns="0" bIns="0" rtlCol="0" anchor="ctr"/>
-          <a:lstStyle/>
-          <a:p>
-            <a:pPr algn="ctr" indent="0" marL="0">
-              <a:buNone/>
-            </a:pPr>
-            <a:r>
-              <a:rPr lang="en-US" sz="850" dirty="0">
-                <a:solidFill>
-                  <a:srgbClr val="6D28D9"/>
-                </a:solidFill>
-                <a:latin typeface="Courier New" pitchFamily="34" charset="0"/>
-                <a:ea typeface="Courier New" pitchFamily="34" charset="-122"/>
-                <a:cs typeface="Courier New" pitchFamily="34" charset="-120"/>
-              </a:rPr>
-              <a:t>Recommended</a:t>
-            </a:r>
-            <a:endParaRPr lang="en-US" sz="850" dirty="0"/>
-          </a:p>
-        </p:txBody>
-      </p:sp>
-      <p:sp>
-        <p:nvSpPr>
-          <p:cNvPr id="14" name="Text 12"/>
-          <p:cNvSpPr/>
-          <p:nvPr/>
-        </p:nvSpPr>
-        <p:spPr>
-          <a:xfrm>
-            <a:off x="4937760" y="1929384"/>
-            <a:ext cx="3520440" cy="640080"/>
-          </a:xfrm>
-          <a:prstGeom prst="rect">
-            <a:avLst/>
-          </a:prstGeom>
-          <a:noFill/>
-          <a:ln/>
-        </p:spPr>
-        <p:txBody>
-          <a:bodyPr wrap="square" lIns="0" tIns="0" rIns="0" bIns="0" rtlCol="0" anchor="ctr"/>
-          <a:lstStyle/>
-          <a:p>
-            <a:pPr indent="0" marL="0">
-              <a:buNone/>
-            </a:pPr>
-            <a:r>
-              <a:rPr lang="en-US" sz="1050" dirty="0">
-                <a:solidFill>
-                  <a:srgbClr val="3F3F49"/>
-                </a:solidFill>
-                <a:latin typeface="Calibri" pitchFamily="34" charset="0"/>
-                <a:ea typeface="Calibri" pitchFamily="34" charset="-122"/>
-                <a:cs typeface="Calibri" pitchFamily="34" charset="-120"/>
-              </a:rPr>
-              <a:t>The 🔑 icon, left sidebar. Add the key, enable notebook access. It never lands in the file you share.</a:t>
-            </a:r>
-            <a:endParaRPr lang="en-US" sz="1050" dirty="0"/>
-          </a:p>
-        </p:txBody>
-      </p:sp>
-      <p:sp>
-        <p:nvSpPr>
-          <p:cNvPr id="15" name="Text 13"/>
-          <p:cNvSpPr/>
-          <p:nvPr/>
-        </p:nvSpPr>
-        <p:spPr>
-          <a:xfrm>
-            <a:off x="4937760" y="2569464"/>
-            <a:ext cx="3520440" cy="256032"/>
-          </a:xfrm>
-          <a:prstGeom prst="rect">
-            <a:avLst/>
-          </a:prstGeom>
-          <a:noFill/>
-          <a:ln/>
-        </p:spPr>
-        <p:txBody>
-          <a:bodyPr wrap="square" lIns="0" tIns="0" rIns="0" bIns="0" rtlCol="0" anchor="ctr"/>
-          <a:lstStyle/>
-          <a:p>
-            <a:pPr indent="0" marL="0">
-              <a:buNone/>
-            </a:pPr>
-            <a:r>
-              <a:rPr lang="en-US" sz="850" dirty="0">
-                <a:solidFill>
-                  <a:srgbClr val="6D28D9"/>
-                </a:solidFill>
-                <a:latin typeface="Courier New" pitchFamily="34" charset="0"/>
-                <a:ea typeface="Courier New" pitchFamily="34" charset="-122"/>
-                <a:cs typeface="Courier New" pitchFamily="34" charset="-120"/>
-              </a:rPr>
-              <a:t>userdata.get("OPENAI_API_KEY")</a:t>
-            </a:r>
-            <a:endParaRPr lang="en-US" sz="850" dirty="0"/>
-          </a:p>
-        </p:txBody>
-      </p:sp>
-      <p:sp>
-        <p:nvSpPr>
-          <p:cNvPr id="16" name="Shape 14"/>
-          <p:cNvSpPr/>
-          <p:nvPr/>
-        </p:nvSpPr>
-        <p:spPr>
-          <a:xfrm>
-            <a:off x="502920" y="3044952"/>
-            <a:ext cx="3931920" cy="1463040"/>
-          </a:xfrm>
-          <a:prstGeom prst="roundRect">
-            <a:avLst>
-              <a:gd name="adj" fmla="val 5000"/>
-            </a:avLst>
-          </a:prstGeom>
-          <a:solidFill>
-            <a:srgbClr val="F3EFFB"/>
-          </a:solidFill>
-          <a:ln w="12700">
-            <a:solidFill>
-              <a:srgbClr val="E4DCF5"/>
-            </a:solidFill>
-            <a:prstDash val="solid"/>
-          </a:ln>
-          <a:effectLst>
-            <a:outerShdw sx="100000" sy="100000" kx="0" ky="0" algn="bl" rotWithShape="0" blurRad="88900" dist="25400" dir="5400000">
-              <a:srgbClr val="3A2A55">
-                <a:alpha val="14000"/>
-              </a:srgbClr>
-            </a:outerShdw>
-          </a:effectLst>
-        </p:spPr>
-      </p:sp>
-      <p:sp>
-        <p:nvSpPr>
-          <p:cNvPr id="17" name="Text 15"/>
-          <p:cNvSpPr/>
-          <p:nvPr/>
-        </p:nvSpPr>
-        <p:spPr>
-          <a:xfrm>
-            <a:off x="731520" y="3172968"/>
-            <a:ext cx="2103120" cy="365760"/>
-          </a:xfrm>
-          <a:prstGeom prst="rect">
-            <a:avLst/>
-          </a:prstGeom>
-          <a:noFill/>
-          <a:ln/>
-        </p:spPr>
-        <p:txBody>
-          <a:bodyPr wrap="square" lIns="0" tIns="0" rIns="0" bIns="0" rtlCol="0" anchor="ctr"/>
-          <a:lstStyle/>
-          <a:p>
-            <a:pPr indent="0" marL="0">
-              <a:buNone/>
-            </a:pPr>
-            <a:r>
-              <a:rPr lang="en-US" sz="1600" b="1" dirty="0">
-                <a:solidFill>
-                  <a:srgbClr val="2A1B3D"/>
-                </a:solidFill>
-                <a:latin typeface="Courier New" pitchFamily="34" charset="0"/>
-                <a:ea typeface="Courier New" pitchFamily="34" charset="-122"/>
-                <a:cs typeface="Courier New" pitchFamily="34" charset="-120"/>
-              </a:rPr>
-              <a:t>Hidden prompt</a:t>
-            </a:r>
-            <a:endParaRPr lang="en-US" sz="1600" dirty="0"/>
-          </a:p>
-        </p:txBody>
-      </p:sp>
-      <p:sp>
-        <p:nvSpPr>
-          <p:cNvPr id="18" name="Shape 16"/>
-          <p:cNvSpPr/>
-          <p:nvPr/>
-        </p:nvSpPr>
-        <p:spPr>
-          <a:xfrm>
-            <a:off x="2743200" y="3200400"/>
-            <a:ext cx="1508760" cy="310896"/>
-          </a:xfrm>
-          <a:prstGeom prst="roundRect">
-            <a:avLst>
-              <a:gd name="adj" fmla="val 50000"/>
-            </a:avLst>
-          </a:prstGeom>
-          <a:solidFill>
-            <a:srgbClr val="F3EFFB"/>
-          </a:solidFill>
-          <a:ln w="12700">
-            <a:solidFill>
-              <a:srgbClr val="A78BFA"/>
-            </a:solidFill>
-            <a:prstDash val="solid"/>
-          </a:ln>
-        </p:spPr>
-      </p:sp>
-      <p:sp>
-        <p:nvSpPr>
-          <p:cNvPr id="19" name="Text 17"/>
-          <p:cNvSpPr/>
-          <p:nvPr/>
-        </p:nvSpPr>
-        <p:spPr>
-          <a:xfrm>
-            <a:off x="2743200" y="3200400"/>
-            <a:ext cx="1508760" cy="310896"/>
-          </a:xfrm>
-          <a:prstGeom prst="rect">
-            <a:avLst/>
-          </a:prstGeom>
-          <a:noFill/>
-          <a:ln/>
-        </p:spPr>
-        <p:txBody>
-          <a:bodyPr wrap="square" lIns="0" tIns="0" rIns="0" bIns="0" rtlCol="0" anchor="ctr"/>
-          <a:lstStyle/>
-          <a:p>
-            <a:pPr algn="ctr" indent="0" marL="0">
-              <a:buNone/>
-            </a:pPr>
-            <a:r>
-              <a:rPr lang="en-US" sz="850" dirty="0">
-                <a:solidFill>
-                  <a:srgbClr val="6D28D9"/>
-                </a:solidFill>
-                <a:latin typeface="Courier New" pitchFamily="34" charset="0"/>
-                <a:ea typeface="Courier New" pitchFamily="34" charset="-122"/>
-                <a:cs typeface="Courier New" pitchFamily="34" charset="-120"/>
-              </a:rPr>
-              <a:t>Fallback</a:t>
-            </a:r>
-            <a:endParaRPr lang="en-US" sz="850" dirty="0"/>
-          </a:p>
-        </p:txBody>
-      </p:sp>
-      <p:sp>
-        <p:nvSpPr>
-          <p:cNvPr id="20" name="Text 18"/>
-          <p:cNvSpPr/>
-          <p:nvPr/>
-        </p:nvSpPr>
-        <p:spPr>
-          <a:xfrm>
-            <a:off x="731520" y="3557016"/>
-            <a:ext cx="3520440" cy="640080"/>
-          </a:xfrm>
-          <a:prstGeom prst="rect">
-            <a:avLst/>
-          </a:prstGeom>
-          <a:noFill/>
-          <a:ln/>
-        </p:spPr>
-        <p:txBody>
-          <a:bodyPr wrap="square" lIns="0" tIns="0" rIns="0" bIns="0" rtlCol="0" anchor="ctr"/>
-          <a:lstStyle/>
-          <a:p>
-            <a:pPr indent="0" marL="0">
-              <a:buNone/>
-            </a:pPr>
-            <a:r>
-              <a:rPr lang="en-US" sz="1050" dirty="0">
-                <a:solidFill>
-                  <a:srgbClr val="3F3F49"/>
-                </a:solidFill>
-                <a:latin typeface="Calibri" pitchFamily="34" charset="0"/>
-                <a:ea typeface="Calibri" pitchFamily="34" charset="-122"/>
-                <a:cs typeface="Calibri" pitchFamily="34" charset="-120"/>
-              </a:rPr>
-              <a:t>No file, no secret? The notebook asks, with the input masked. Never paste a key into a code cell.</a:t>
-            </a:r>
-            <a:endParaRPr lang="en-US" sz="1050" dirty="0"/>
-          </a:p>
-        </p:txBody>
-      </p:sp>
-      <p:sp>
-        <p:nvSpPr>
-          <p:cNvPr id="21" name="Text 19"/>
-          <p:cNvSpPr/>
-          <p:nvPr/>
-        </p:nvSpPr>
-        <p:spPr>
-          <a:xfrm>
-            <a:off x="731520" y="4197096"/>
-            <a:ext cx="3520440" cy="256032"/>
-          </a:xfrm>
-          <a:prstGeom prst="rect">
-            <a:avLst/>
-          </a:prstGeom>
-          <a:noFill/>
-          <a:ln/>
-        </p:spPr>
-        <p:txBody>
-          <a:bodyPr wrap="square" lIns="0" tIns="0" rIns="0" bIns="0" rtlCol="0" anchor="ctr"/>
-          <a:lstStyle/>
-          <a:p>
-            <a:pPr indent="0" marL="0">
-              <a:buNone/>
-            </a:pPr>
-            <a:r>
-              <a:rPr lang="en-US" sz="850" dirty="0">
-                <a:solidFill>
-                  <a:srgbClr val="6D28D9"/>
-                </a:solidFill>
-                <a:latin typeface="Courier New" pitchFamily="34" charset="0"/>
-                <a:ea typeface="Courier New" pitchFamily="34" charset="-122"/>
-                <a:cs typeface="Courier New" pitchFamily="34" charset="-120"/>
-              </a:rPr>
-              <a:t>getpass.getpass()</a:t>
-            </a:r>
-            <a:endParaRPr lang="en-US" sz="850" dirty="0"/>
-          </a:p>
-        </p:txBody>
-      </p:sp>
-      <p:sp>
-        <p:nvSpPr>
-          <p:cNvPr id="22" name="Shape 20"/>
-          <p:cNvSpPr/>
-          <p:nvPr/>
-        </p:nvSpPr>
-        <p:spPr>
-          <a:xfrm>
-            <a:off x="4709160" y="3044952"/>
-            <a:ext cx="3931920" cy="1463040"/>
-          </a:xfrm>
-          <a:prstGeom prst="roundRect">
-            <a:avLst>
-              <a:gd name="adj" fmla="val 5000"/>
-            </a:avLst>
-          </a:prstGeom>
-          <a:solidFill>
-            <a:srgbClr val="F3EFFB"/>
-          </a:solidFill>
-          <a:ln w="12700">
-            <a:solidFill>
-              <a:srgbClr val="E4DCF5"/>
-            </a:solidFill>
-            <a:prstDash val="solid"/>
-          </a:ln>
-          <a:effectLst>
-            <a:outerShdw sx="100000" sy="100000" kx="0" ky="0" algn="bl" rotWithShape="0" blurRad="88900" dist="25400" dir="5400000">
-              <a:srgbClr val="3A2A55">
-                <a:alpha val="14000"/>
-              </a:srgbClr>
-            </a:outerShdw>
-          </a:effectLst>
-        </p:spPr>
-      </p:sp>
-      <p:sp>
-        <p:nvSpPr>
-          <p:cNvPr id="23" name="Text 21"/>
-          <p:cNvSpPr/>
-          <p:nvPr/>
-        </p:nvSpPr>
-        <p:spPr>
-          <a:xfrm>
-            <a:off x="4937760" y="3172968"/>
-            <a:ext cx="2103120" cy="365760"/>
-          </a:xfrm>
-          <a:prstGeom prst="rect">
-            <a:avLst/>
-          </a:prstGeom>
-          <a:noFill/>
-          <a:ln/>
-        </p:spPr>
-        <p:txBody>
-          <a:bodyPr wrap="square" lIns="0" tIns="0" rIns="0" bIns="0" rtlCol="0" anchor="ctr"/>
-          <a:lstStyle/>
-          <a:p>
-            <a:pPr indent="0" marL="0">
-              <a:buNone/>
-            </a:pPr>
-            <a:r>
-              <a:rPr lang="en-US" sz="1600" b="1" dirty="0">
-                <a:solidFill>
-                  <a:srgbClr val="2A1B3D"/>
-                </a:solidFill>
-                <a:latin typeface="Courier New" pitchFamily="34" charset="0"/>
-                <a:ea typeface="Courier New" pitchFamily="34" charset="-122"/>
-                <a:cs typeface="Courier New" pitchFamily="34" charset="-120"/>
-              </a:rPr>
-              <a:t>The cost meter</a:t>
-            </a:r>
-            <a:endParaRPr lang="en-US" sz="1600" dirty="0"/>
-          </a:p>
-        </p:txBody>
-      </p:sp>
-      <p:sp>
-        <p:nvSpPr>
-          <p:cNvPr id="24" name="Shape 22"/>
-          <p:cNvSpPr/>
-          <p:nvPr/>
-        </p:nvSpPr>
-        <p:spPr>
-          <a:xfrm>
-            <a:off x="6949440" y="3200400"/>
-            <a:ext cx="1508760" cy="310896"/>
-          </a:xfrm>
-          <a:prstGeom prst="roundRect">
-            <a:avLst>
-              <a:gd name="adj" fmla="val 50000"/>
-            </a:avLst>
-          </a:prstGeom>
-          <a:solidFill>
-            <a:srgbClr val="F3EFFB"/>
-          </a:solidFill>
-          <a:ln w="12700">
-            <a:solidFill>
-              <a:srgbClr val="A78BFA"/>
-            </a:solidFill>
-            <a:prstDash val="solid"/>
-          </a:ln>
-        </p:spPr>
-      </p:sp>
-      <p:sp>
-        <p:nvSpPr>
-          <p:cNvPr id="25" name="Text 23"/>
-          <p:cNvSpPr/>
-          <p:nvPr/>
-        </p:nvSpPr>
-        <p:spPr>
-          <a:xfrm>
-            <a:off x="6949440" y="3200400"/>
-            <a:ext cx="1508760" cy="310896"/>
-          </a:xfrm>
-          <a:prstGeom prst="rect">
-            <a:avLst/>
-          </a:prstGeom>
-          <a:noFill/>
-          <a:ln/>
-        </p:spPr>
-        <p:txBody>
-          <a:bodyPr wrap="square" lIns="0" tIns="0" rIns="0" bIns="0" rtlCol="0" anchor="ctr"/>
-          <a:lstStyle/>
-          <a:p>
-            <a:pPr algn="ctr" indent="0" marL="0">
-              <a:buNone/>
-            </a:pPr>
-            <a:r>
-              <a:rPr lang="en-US" sz="850" dirty="0">
-                <a:solidFill>
-                  <a:srgbClr val="6D28D9"/>
-                </a:solidFill>
-                <a:latin typeface="Courier New" pitchFamily="34" charset="0"/>
-                <a:ea typeface="Courier New" pitchFamily="34" charset="-122"/>
-                <a:cs typeface="Courier New" pitchFamily="34" charset="-120"/>
-              </a:rPr>
-              <a:t>Budget</a:t>
-            </a:r>
-            <a:endParaRPr lang="en-US" sz="850" dirty="0"/>
-          </a:p>
-        </p:txBody>
-      </p:sp>
-      <p:sp>
-        <p:nvSpPr>
-          <p:cNvPr id="26" name="Text 24"/>
-          <p:cNvSpPr/>
-          <p:nvPr/>
-        </p:nvSpPr>
-        <p:spPr>
-          <a:xfrm>
-            <a:off x="4937760" y="3557016"/>
-            <a:ext cx="3520440" cy="640080"/>
-          </a:xfrm>
-          <a:prstGeom prst="rect">
-            <a:avLst/>
-          </a:prstGeom>
-          <a:noFill/>
-          <a:ln/>
-        </p:spPr>
-        <p:txBody>
-          <a:bodyPr wrap="square" lIns="0" tIns="0" rIns="0" bIns="0" rtlCol="0" anchor="ctr"/>
-          <a:lstStyle/>
-          <a:p>
-            <a:pPr indent="0" marL="0">
-              <a:buNone/>
-            </a:pPr>
-            <a:r>
-              <a:rPr lang="en-US" sz="1050" dirty="0">
-                <a:solidFill>
-                  <a:srgbClr val="3F3F49"/>
-                </a:solidFill>
-                <a:latin typeface="Calibri" pitchFamily="34" charset="0"/>
-                <a:ea typeface="Calibri" pitchFamily="34" charset="-122"/>
-                <a:cs typeface="Calibri" pitchFamily="34" charset="-120"/>
-              </a:rPr>
-              <a:t>Every call is counted. The whole notebook costs roughly $0.05–0.25 on gpt-4.1-mini. Check any time.</a:t>
-            </a:r>
-            <a:endParaRPr lang="en-US" sz="1050" dirty="0"/>
-          </a:p>
-        </p:txBody>
-      </p:sp>
-      <p:sp>
-        <p:nvSpPr>
-          <p:cNvPr id="27" name="Text 25"/>
-          <p:cNvSpPr/>
-          <p:nvPr/>
-        </p:nvSpPr>
-        <p:spPr>
-          <a:xfrm>
-            <a:off x="4937760" y="4197096"/>
-            <a:ext cx="3520440" cy="256032"/>
-          </a:xfrm>
-          <a:prstGeom prst="rect">
-            <a:avLst/>
-          </a:prstGeom>
-          <a:noFill/>
-          <a:ln/>
-        </p:spPr>
-        <p:txBody>
-          <a:bodyPr wrap="square" lIns="0" tIns="0" rIns="0" bIns="0" rtlCol="0" anchor="ctr"/>
-          <a:lstStyle/>
-          <a:p>
-            <a:pPr indent="0" marL="0">
-              <a:buNone/>
-            </a:pPr>
-            <a:r>
-              <a:rPr lang="en-US" sz="850" dirty="0">
-                <a:solidFill>
-                  <a:srgbClr val="6D28D9"/>
-                </a:solidFill>
-                <a:latin typeface="Courier New" pitchFamily="34" charset="0"/>
-                <a:ea typeface="Courier New" pitchFamily="34" charset="-122"/>
-                <a:cs typeface="Courier New" pitchFamily="34" charset="-120"/>
-              </a:rPr>
-              <a:t>cost_report()</a:t>
-            </a:r>
-            <a:endParaRPr lang="en-US" sz="850" dirty="0"/>
-          </a:p>
-        </p:txBody>
-      </p:sp>
-      <p:sp>
-        <p:nvSpPr>
-          <p:cNvPr id="28" name="Text 26"/>
-          <p:cNvSpPr/>
-          <p:nvPr/>
-        </p:nvSpPr>
-        <p:spPr>
-          <a:xfrm>
-            <a:off x="502920" y="4709160"/>
-            <a:ext cx="8138160" cy="320040"/>
-          </a:xfrm>
-          <a:prstGeom prst="rect">
-            <a:avLst/>
-          </a:prstGeom>
-          <a:noFill/>
-          <a:ln/>
-        </p:spPr>
-        <p:txBody>
-          <a:bodyPr wrap="square" lIns="0" tIns="0" rIns="0" bIns="0" rtlCol="0" anchor="ctr"/>
-          <a:lstStyle/>
-          <a:p>
-            <a:pPr algn="ctr" indent="0" marL="0">
-              <a:buNone/>
-            </a:pPr>
-            <a:r>
-              <a:rPr lang="en-US" sz="1400" i="1" dirty="0">
-                <a:solidFill>
-                  <a:srgbClr val="6D28D9"/>
-                </a:solidFill>
-                <a:latin typeface="Calibri" pitchFamily="34" charset="0"/>
-                <a:ea typeface="Calibri" pitchFamily="34" charset="-122"/>
-                <a:cs typeface="Calibri" pitchFamily="34" charset="-120"/>
-              </a:rPr>
-              <a:t>No GPU required. The brain is an API call — one llm() function that all six of today's agents go through.</a:t>
-            </a:r>
-            <a:endParaRPr lang="en-US" sz="1400" dirty="0"/>
           </a:p>
         </p:txBody>
       </p:sp>
@@ -10377,6 +10212,10 @@
             </a:outerShdw>
           </a:effectLst>
         </p:spPr>
+        <p:txBody>
+          <a:bodyPr/>
+          <a:p/>
+        </p:txBody>
       </p:sp>
       <p:sp>
         <p:nvSpPr>
@@ -10397,6 +10236,10 @@
           </a:solidFill>
           <a:ln/>
         </p:spPr>
+        <p:txBody>
+          <a:bodyPr/>
+          <a:p/>
+        </p:txBody>
       </p:sp>
       <p:sp>
         <p:nvSpPr>
@@ -10626,6 +10469,10 @@
             </a:outerShdw>
           </a:effectLst>
         </p:spPr>
+        <p:txBody>
+          <a:bodyPr/>
+          <a:p/>
+        </p:txBody>
       </p:sp>
       <p:sp>
         <p:nvSpPr>
@@ -10646,6 +10493,10 @@
           </a:solidFill>
           <a:ln/>
         </p:spPr>
+        <p:txBody>
+          <a:bodyPr/>
+          <a:p/>
+        </p:txBody>
       </p:sp>
       <p:sp>
         <p:nvSpPr>
@@ -10875,6 +10726,10 @@
             </a:outerShdw>
           </a:effectLst>
         </p:spPr>
+        <p:txBody>
+          <a:bodyPr/>
+          <a:p/>
+        </p:txBody>
       </p:sp>
       <p:sp>
         <p:nvSpPr>
@@ -10895,6 +10750,10 @@
           </a:solidFill>
           <a:ln/>
         </p:spPr>
+        <p:txBody>
+          <a:bodyPr/>
+          <a:p/>
+        </p:txBody>
       </p:sp>
       <p:sp>
         <p:nvSpPr>
@@ -11124,7 +10983,588 @@
                 <a:ea typeface="Courier New" pitchFamily="34" charset="-122"/>
                 <a:cs typeface="Courier New" pitchFamily="34" charset="-120"/>
               </a:rPr>
-              <a:t>Setup now: colab.research.google.com → upload the notebook → run Part 0. No GPU needed.</a:t>
+              <a:t>Setup now: colab.research.google.com → run Part 0. No GPU. The notebook paces you: pit_stop().</a:t>
+            </a:r>
+            <a:endParaRPr lang="en-US" sz="1050" dirty="0"/>
+          </a:p>
+        </p:txBody>
+      </p:sp>
+    </p:spTree>
+  </p:cSld>
+  <p:clrMapOvr>
+    <a:masterClrMapping/>
+  </p:clrMapOvr>
+</p:sld>
+</file>
+
+<file path=ppt/slides/slide20.xml><?xml version="1.0" encoding="utf-8"?>
+<p:sld xmlns:a="http://schemas.openxmlformats.org/drawingml/2006/main" xmlns:r="http://schemas.openxmlformats.org/officeDocument/2006/relationships" xmlns:p="http://schemas.openxmlformats.org/presentationml/2006/main">
+  <p:cSld name="Slide 18">
+    <p:bg>
+      <p:bgPr>
+        <a:solidFill>
+          <a:srgbClr val="2A1B3D"/>
+        </a:solidFill>
+      </p:bgPr>
+    </p:bg>
+    <p:spTree>
+      <p:nvGrpSpPr>
+        <p:cNvPr id="1" name=""/>
+        <p:cNvGrpSpPr/>
+        <p:nvPr/>
+      </p:nvGrpSpPr>
+      <p:grpSpPr>
+        <a:xfrm>
+          <a:off x="0" y="0"/>
+          <a:ext cx="0" cy="0"/>
+          <a:chOff x="0" y="0"/>
+          <a:chExt cx="0" cy="0"/>
+        </a:xfrm>
+      </p:grpSpPr>
+      <p:sp>
+        <p:nvSpPr>
+          <p:cNvPr id="2" name="Text 0"/>
+          <p:cNvSpPr/>
+          <p:nvPr/>
+        </p:nvSpPr>
+        <p:spPr>
+          <a:xfrm>
+            <a:off x="548640" y="411480"/>
+            <a:ext cx="8046720" cy="320040"/>
+          </a:xfrm>
+          <a:prstGeom prst="rect">
+            <a:avLst/>
+          </a:prstGeom>
+          <a:noFill/>
+          <a:ln/>
+        </p:spPr>
+        <p:txBody>
+          <a:bodyPr wrap="square" lIns="0" tIns="0" rIns="0" bIns="0" rtlCol="0" anchor="ctr"/>
+          <a:lstStyle/>
+          <a:p>
+            <a:pPr indent="0" marL="0">
+              <a:buNone/>
+            </a:pPr>
+            <a:r>
+              <a:rPr lang="en-US" sz="1200" spc="300" kern="0" dirty="0">
+                <a:solidFill>
+                  <a:srgbClr val="A78BFA"/>
+                </a:solidFill>
+                <a:latin typeface="Courier New" pitchFamily="34" charset="0"/>
+                <a:ea typeface="Courier New" pitchFamily="34" charset="-122"/>
+                <a:cs typeface="Courier New" pitchFamily="34" charset="-120"/>
+              </a:rPr>
+              <a:t>WHAT YOU BUILT TODAY</a:t>
+            </a:r>
+            <a:endParaRPr lang="en-US" sz="1200" dirty="0"/>
+          </a:p>
+        </p:txBody>
+      </p:sp>
+      <p:sp>
+        <p:nvSpPr>
+          <p:cNvPr id="3" name="Text 1"/>
+          <p:cNvSpPr/>
+          <p:nvPr/>
+        </p:nvSpPr>
+        <p:spPr>
+          <a:xfrm>
+            <a:off x="548640" y="777240"/>
+            <a:ext cx="8046720" cy="777240"/>
+          </a:xfrm>
+          <a:prstGeom prst="rect">
+            <a:avLst/>
+          </a:prstGeom>
+          <a:noFill/>
+          <a:ln/>
+        </p:spPr>
+        <p:txBody>
+          <a:bodyPr wrap="square" lIns="0" tIns="0" rIns="0" bIns="0" rtlCol="0" anchor="ctr"/>
+          <a:lstStyle/>
+          <a:p>
+            <a:pPr indent="0" marL="0">
+              <a:buNone/>
+            </a:pPr>
+            <a:r>
+              <a:rPr lang="en-US" sz="2800" b="1" dirty="0">
+                <a:solidFill>
+                  <a:srgbClr val="FFFFFF"/>
+                </a:solidFill>
+                <a:latin typeface="Cambria" pitchFamily="34" charset="0"/>
+                <a:ea typeface="Cambria" pitchFamily="34" charset="-122"/>
+                <a:cs typeface="Cambria" pitchFamily="34" charset="-120"/>
+              </a:rPr>
+              <a:t>A verified, cooperative agent pipeline — in one notebook</a:t>
+            </a:r>
+            <a:endParaRPr lang="en-US" sz="2800" dirty="0"/>
+          </a:p>
+        </p:txBody>
+      </p:sp>
+      <p:sp>
+        <p:nvSpPr>
+          <p:cNvPr id="4" name="Text 2"/>
+          <p:cNvSpPr/>
+          <p:nvPr/>
+        </p:nvSpPr>
+        <p:spPr>
+          <a:xfrm>
+            <a:off x="594360" y="1691640"/>
+            <a:ext cx="457200" cy="457200"/>
+          </a:xfrm>
+          <a:prstGeom prst="rect">
+            <a:avLst/>
+          </a:prstGeom>
+          <a:noFill/>
+          <a:ln/>
+        </p:spPr>
+        <p:txBody>
+          <a:bodyPr wrap="square" lIns="0" tIns="0" rIns="0" bIns="0" rtlCol="0" anchor="ctr"/>
+          <a:lstStyle/>
+          <a:p>
+            <a:pPr indent="0" marL="0">
+              <a:buNone/>
+            </a:pPr>
+            <a:r>
+              <a:rPr lang="en-US" sz="2000" dirty="0">
+                <a:solidFill>
+                  <a:srgbClr val="000000"/>
+                </a:solidFill>
+              </a:rPr>
+              <a:t>🧠</a:t>
+            </a:r>
+            <a:endParaRPr lang="en-US" sz="2000" dirty="0"/>
+          </a:p>
+        </p:txBody>
+      </p:sp>
+      <p:sp>
+        <p:nvSpPr>
+          <p:cNvPr id="5" name="Text 3"/>
+          <p:cNvSpPr/>
+          <p:nvPr/>
+        </p:nvSpPr>
+        <p:spPr>
+          <a:xfrm>
+            <a:off x="1143000" y="1719072"/>
+            <a:ext cx="7406640" cy="457200"/>
+          </a:xfrm>
+          <a:prstGeom prst="rect">
+            <a:avLst/>
+          </a:prstGeom>
+          <a:noFill/>
+          <a:ln/>
+        </p:spPr>
+        <p:txBody>
+          <a:bodyPr wrap="square" lIns="0" tIns="0" rIns="0" bIns="0" rtlCol="0" anchor="ctr"/>
+          <a:lstStyle/>
+          <a:p>
+            <a:pPr indent="0" marL="0">
+              <a:buNone/>
+            </a:pPr>
+            <a:r>
+              <a:rPr lang="en-US" sz="1450" b="1" dirty="0">
+                <a:solidFill>
+                  <a:srgbClr val="FFFFFF"/>
+                </a:solidFill>
+                <a:latin typeface="Calibri" pitchFamily="34" charset="0"/>
+                <a:ea typeface="Calibri" pitchFamily="34" charset="-122"/>
+                <a:cs typeface="Calibri" pitchFamily="34" charset="-120"/>
+              </a:rPr>
+              <a:t>Agents = role + brain + tools + contract  </a:t>
+            </a:r>
+            <a:pPr indent="0" marL="0">
+              <a:buNone/>
+            </a:pPr>
+            <a:r>
+              <a:rPr lang="en-US" sz="1450" dirty="0">
+                <a:solidFill>
+                  <a:srgbClr val="BBA9DE"/>
+                </a:solidFill>
+                <a:latin typeface="Calibri" pitchFamily="34" charset="0"/>
+                <a:ea typeface="Calibri" pitchFamily="34" charset="-122"/>
+                <a:cs typeface="Calibri" pitchFamily="34" charset="-120"/>
+              </a:rPr>
+              <a:t>— no framework magic required</a:t>
+            </a:r>
+            <a:endParaRPr lang="en-US" sz="1450" dirty="0"/>
+          </a:p>
+        </p:txBody>
+      </p:sp>
+      <p:sp>
+        <p:nvSpPr>
+          <p:cNvPr id="6" name="Text 4"/>
+          <p:cNvSpPr/>
+          <p:nvPr/>
+        </p:nvSpPr>
+        <p:spPr>
+          <a:xfrm>
+            <a:off x="594360" y="2313432"/>
+            <a:ext cx="457200" cy="457200"/>
+          </a:xfrm>
+          <a:prstGeom prst="rect">
+            <a:avLst/>
+          </a:prstGeom>
+          <a:noFill/>
+          <a:ln/>
+        </p:spPr>
+        <p:txBody>
+          <a:bodyPr wrap="square" lIns="0" tIns="0" rIns="0" bIns="0" rtlCol="0" anchor="ctr"/>
+          <a:lstStyle/>
+          <a:p>
+            <a:pPr indent="0" marL="0">
+              <a:buNone/>
+            </a:pPr>
+            <a:r>
+              <a:rPr lang="en-US" sz="2000" dirty="0">
+                <a:solidFill>
+                  <a:srgbClr val="000000"/>
+                </a:solidFill>
+              </a:rPr>
+              <a:t>⚖️</a:t>
+            </a:r>
+            <a:endParaRPr lang="en-US" sz="2000" dirty="0"/>
+          </a:p>
+        </p:txBody>
+      </p:sp>
+      <p:sp>
+        <p:nvSpPr>
+          <p:cNvPr id="7" name="Text 5"/>
+          <p:cNvSpPr/>
+          <p:nvPr/>
+        </p:nvSpPr>
+        <p:spPr>
+          <a:xfrm>
+            <a:off x="1143000" y="2340864"/>
+            <a:ext cx="7406640" cy="457200"/>
+          </a:xfrm>
+          <a:prstGeom prst="rect">
+            <a:avLst/>
+          </a:prstGeom>
+          <a:noFill/>
+          <a:ln/>
+        </p:spPr>
+        <p:txBody>
+          <a:bodyPr wrap="square" lIns="0" tIns="0" rIns="0" bIns="0" rtlCol="0" anchor="ctr"/>
+          <a:lstStyle/>
+          <a:p>
+            <a:pPr indent="0" marL="0">
+              <a:buNone/>
+            </a:pPr>
+            <a:r>
+              <a:rPr lang="en-US" sz="1450" b="1" dirty="0">
+                <a:solidFill>
+                  <a:srgbClr val="FFFFFF"/>
+                </a:solidFill>
+                <a:latin typeface="Calibri" pitchFamily="34" charset="0"/>
+                <a:ea typeface="Calibri" pitchFamily="34" charset="-122"/>
+                <a:cs typeface="Calibri" pitchFamily="34" charset="-120"/>
+              </a:rPr>
+              <a:t>Tools measure, LLMs interpret  </a:t>
+            </a:r>
+            <a:pPr indent="0" marL="0">
+              <a:buNone/>
+            </a:pPr>
+            <a:r>
+              <a:rPr lang="en-US" sz="1450" dirty="0">
+                <a:solidFill>
+                  <a:srgbClr val="BBA9DE"/>
+                </a:solidFill>
+                <a:latin typeface="Calibri" pitchFamily="34" charset="0"/>
+                <a:ea typeface="Calibri" pitchFamily="34" charset="-122"/>
+                <a:cs typeface="Calibri" pitchFamily="34" charset="-120"/>
+              </a:rPr>
+              <a:t>— grounding beats guessing</a:t>
+            </a:r>
+            <a:endParaRPr lang="en-US" sz="1450" dirty="0"/>
+          </a:p>
+        </p:txBody>
+      </p:sp>
+      <p:sp>
+        <p:nvSpPr>
+          <p:cNvPr id="8" name="Text 6"/>
+          <p:cNvSpPr/>
+          <p:nvPr/>
+        </p:nvSpPr>
+        <p:spPr>
+          <a:xfrm>
+            <a:off x="594360" y="2935224"/>
+            <a:ext cx="457200" cy="457200"/>
+          </a:xfrm>
+          <a:prstGeom prst="rect">
+            <a:avLst/>
+          </a:prstGeom>
+          <a:noFill/>
+          <a:ln/>
+        </p:spPr>
+        <p:txBody>
+          <a:bodyPr wrap="square" lIns="0" tIns="0" rIns="0" bIns="0" rtlCol="0" anchor="ctr"/>
+          <a:lstStyle/>
+          <a:p>
+            <a:pPr indent="0" marL="0">
+              <a:buNone/>
+            </a:pPr>
+            <a:r>
+              <a:rPr lang="en-US" sz="2000" dirty="0">
+                <a:solidFill>
+                  <a:srgbClr val="000000"/>
+                </a:solidFill>
+              </a:rPr>
+              <a:t>🛡️</a:t>
+            </a:r>
+            <a:endParaRPr lang="en-US" sz="2000" dirty="0"/>
+          </a:p>
+        </p:txBody>
+      </p:sp>
+      <p:sp>
+        <p:nvSpPr>
+          <p:cNvPr id="9" name="Text 7"/>
+          <p:cNvSpPr/>
+          <p:nvPr/>
+        </p:nvSpPr>
+        <p:spPr>
+          <a:xfrm>
+            <a:off x="1143000" y="2962656"/>
+            <a:ext cx="7406640" cy="457200"/>
+          </a:xfrm>
+          <a:prstGeom prst="rect">
+            <a:avLst/>
+          </a:prstGeom>
+          <a:noFill/>
+          <a:ln/>
+        </p:spPr>
+        <p:txBody>
+          <a:bodyPr wrap="square" lIns="0" tIns="0" rIns="0" bIns="0" rtlCol="0" anchor="ctr"/>
+          <a:lstStyle/>
+          <a:p>
+            <a:pPr indent="0" marL="0">
+              <a:buNone/>
+            </a:pPr>
+            <a:r>
+              <a:rPr lang="en-US" sz="1450" b="1" dirty="0">
+                <a:solidFill>
+                  <a:srgbClr val="FFFFFF"/>
+                </a:solidFill>
+                <a:latin typeface="Calibri" pitchFamily="34" charset="0"/>
+                <a:ea typeface="Calibri" pitchFamily="34" charset="-122"/>
+                <a:cs typeface="Calibri" pitchFamily="34" charset="-120"/>
+              </a:rPr>
+              <a:t>Verification is what earns the trust  </a:t>
+            </a:r>
+            <a:pPr indent="0" marL="0">
+              <a:buNone/>
+            </a:pPr>
+            <a:r>
+              <a:rPr lang="en-US" sz="1450" dirty="0">
+                <a:solidFill>
+                  <a:srgbClr val="BBA9DE"/>
+                </a:solidFill>
+                <a:latin typeface="Calibri" pitchFamily="34" charset="0"/>
+                <a:ea typeface="Calibri" pitchFamily="34" charset="-122"/>
+                <a:cs typeface="Calibri" pitchFamily="34" charset="-120"/>
+              </a:rPr>
+              <a:t>— syntax → tests → metrics, cheapest first</a:t>
+            </a:r>
+            <a:endParaRPr lang="en-US" sz="1450" dirty="0"/>
+          </a:p>
+        </p:txBody>
+      </p:sp>
+      <p:sp>
+        <p:nvSpPr>
+          <p:cNvPr id="10" name="Text 8"/>
+          <p:cNvSpPr/>
+          <p:nvPr/>
+        </p:nvSpPr>
+        <p:spPr>
+          <a:xfrm>
+            <a:off x="594360" y="3557016"/>
+            <a:ext cx="457200" cy="457200"/>
+          </a:xfrm>
+          <a:prstGeom prst="rect">
+            <a:avLst/>
+          </a:prstGeom>
+          <a:noFill/>
+          <a:ln/>
+        </p:spPr>
+        <p:txBody>
+          <a:bodyPr wrap="square" lIns="0" tIns="0" rIns="0" bIns="0" rtlCol="0" anchor="ctr"/>
+          <a:lstStyle/>
+          <a:p>
+            <a:pPr indent="0" marL="0">
+              <a:buNone/>
+            </a:pPr>
+            <a:r>
+              <a:rPr lang="en-US" sz="2000" dirty="0">
+                <a:solidFill>
+                  <a:srgbClr val="000000"/>
+                </a:solidFill>
+              </a:rPr>
+              <a:t>💳</a:t>
+            </a:r>
+            <a:endParaRPr lang="en-US" sz="2000" dirty="0"/>
+          </a:p>
+        </p:txBody>
+      </p:sp>
+      <p:sp>
+        <p:nvSpPr>
+          <p:cNvPr id="11" name="Text 9"/>
+          <p:cNvSpPr/>
+          <p:nvPr/>
+        </p:nvSpPr>
+        <p:spPr>
+          <a:xfrm>
+            <a:off x="1143000" y="3584448"/>
+            <a:ext cx="7406640" cy="457200"/>
+          </a:xfrm>
+          <a:prstGeom prst="rect">
+            <a:avLst/>
+          </a:prstGeom>
+          <a:noFill/>
+          <a:ln/>
+        </p:spPr>
+        <p:txBody>
+          <a:bodyPr wrap="square" lIns="0" tIns="0" rIns="0" bIns="0" rtlCol="0" anchor="ctr"/>
+          <a:lstStyle/>
+          <a:p>
+            <a:pPr indent="0" marL="0">
+              <a:buNone/>
+            </a:pPr>
+            <a:r>
+              <a:rPr lang="en-US" sz="1450" b="1" dirty="0">
+                <a:solidFill>
+                  <a:srgbClr val="FFFFFF"/>
+                </a:solidFill>
+                <a:latin typeface="Calibri" pitchFamily="34" charset="0"/>
+                <a:ea typeface="Calibri" pitchFamily="34" charset="-122"/>
+                <a:cs typeface="Calibri" pitchFamily="34" charset="-120"/>
+              </a:rPr>
+              <a:t>Debt is a portfolio to manage  </a:t>
+            </a:r>
+            <a:pPr indent="0" marL="0">
+              <a:buNone/>
+            </a:pPr>
+            <a:r>
+              <a:rPr lang="en-US" sz="1450" dirty="0">
+                <a:solidFill>
+                  <a:srgbClr val="BBA9DE"/>
+                </a:solidFill>
+                <a:latin typeface="Calibri" pitchFamily="34" charset="0"/>
+                <a:ea typeface="Calibri" pitchFamily="34" charset="-122"/>
+                <a:cs typeface="Calibri" pitchFamily="34" charset="-120"/>
+              </a:rPr>
+              <a:t>— classify (BEACon-TD) → triage (interest ÷ principal) → resolve</a:t>
+            </a:r>
+            <a:endParaRPr lang="en-US" sz="1450" dirty="0"/>
+          </a:p>
+        </p:txBody>
+      </p:sp>
+      <p:sp>
+        <p:nvSpPr>
+          <p:cNvPr id="12" name="Shape 10"/>
+          <p:cNvSpPr/>
+          <p:nvPr/>
+        </p:nvSpPr>
+        <p:spPr>
+          <a:xfrm>
+            <a:off x="548640" y="4224528"/>
+            <a:ext cx="8046720" cy="0"/>
+          </a:xfrm>
+          <a:prstGeom prst="line">
+            <a:avLst/>
+          </a:prstGeom>
+          <a:noFill/>
+          <a:ln w="12700">
+            <a:solidFill>
+              <a:srgbClr val="4A3868"/>
+            </a:solidFill>
+            <a:prstDash val="solid"/>
+          </a:ln>
+        </p:spPr>
+      </p:sp>
+      <p:sp>
+        <p:nvSpPr>
+          <p:cNvPr id="13" name="Text 11"/>
+          <p:cNvSpPr/>
+          <p:nvPr/>
+        </p:nvSpPr>
+        <p:spPr>
+          <a:xfrm>
+            <a:off x="548640" y="4343400"/>
+            <a:ext cx="8046720" cy="274320"/>
+          </a:xfrm>
+          <a:prstGeom prst="rect">
+            <a:avLst/>
+          </a:prstGeom>
+          <a:noFill/>
+          <a:ln/>
+        </p:spPr>
+        <p:txBody>
+          <a:bodyPr wrap="square" lIns="0" tIns="0" rIns="0" bIns="0" rtlCol="0" anchor="ctr"/>
+          <a:lstStyle/>
+          <a:p>
+            <a:pPr indent="0" marL="0">
+              <a:buNone/>
+            </a:pPr>
+            <a:r>
+              <a:rPr lang="en-US" sz="1200" b="1" dirty="0">
+                <a:solidFill>
+                  <a:srgbClr val="A78BFA"/>
+                </a:solidFill>
+                <a:latin typeface="Calibri" pitchFamily="34" charset="0"/>
+                <a:ea typeface="Calibri" pitchFamily="34" charset="-122"/>
+                <a:cs typeface="Calibri" pitchFamily="34" charset="-120"/>
+              </a:rPr>
+              <a:t>Tools &amp; papers:  </a:t>
+            </a:r>
+            <a:pPr indent="0" marL="0">
+              <a:buNone/>
+            </a:pPr>
+            <a:r>
+              <a:rPr lang="en-US" sz="1200" dirty="0">
+                <a:solidFill>
+                  <a:srgbClr val="D8CDEE"/>
+                </a:solidFill>
+                <a:latin typeface="Calibri" pitchFamily="34" charset="0"/>
+                <a:ea typeface="Calibri" pitchFamily="34" charset="-122"/>
+                <a:cs typeface="Calibri" pitchFamily="34" charset="-120"/>
+              </a:rPr>
+              <a:t>PyExamine (MSR'25) · MLScent (CAIN'25) · BEACon-TD (JSS'25) · TD-Suite  —  github.com/KarthikShivasankar</a:t>
+            </a:r>
+            <a:endParaRPr lang="en-US" sz="1200" dirty="0"/>
+          </a:p>
+        </p:txBody>
+      </p:sp>
+      <p:sp>
+        <p:nvSpPr>
+          <p:cNvPr id="14" name="Text 12"/>
+          <p:cNvSpPr/>
+          <p:nvPr/>
+        </p:nvSpPr>
+        <p:spPr>
+          <a:xfrm>
+            <a:off x="548640" y="4681728"/>
+            <a:ext cx="8046720" cy="274320"/>
+          </a:xfrm>
+          <a:prstGeom prst="rect">
+            <a:avLst/>
+          </a:prstGeom>
+          <a:noFill/>
+          <a:ln/>
+        </p:spPr>
+        <p:txBody>
+          <a:bodyPr wrap="square" lIns="0" tIns="0" rIns="0" bIns="0" rtlCol="0" anchor="ctr"/>
+          <a:lstStyle/>
+          <a:p>
+            <a:pPr indent="0" marL="0">
+              <a:buNone/>
+            </a:pPr>
+            <a:r>
+              <a:rPr lang="en-US" sz="1050" dirty="0">
+                <a:solidFill>
+                  <a:srgbClr val="9C86C8"/>
+                </a:solidFill>
+                <a:latin typeface="Courier New" pitchFamily="34" charset="0"/>
+                <a:ea typeface="Courier New" pitchFamily="34" charset="-122"/>
+                <a:cs typeface="Courier New" pitchFamily="34" charset="-120"/>
+              </a:rPr>
+              <a:t>Karthik Shivashankar · karthik13sankar@outlook.com  ·  Adela Nedisan Videsjorden  ·  LLMA4SE 2026</a:t>
             </a:r>
             <a:endParaRPr lang="en-US" sz="1050" dirty="0"/>
           </a:p>
@@ -11139,6 +11579,1920 @@
 </file>
 
 <file path=ppt/slides/slide3.xml><?xml version="1.0" encoding="utf-8"?>
+<p:sld xmlns:a="http://schemas.openxmlformats.org/drawingml/2006/main" xmlns:r="http://schemas.openxmlformats.org/officeDocument/2006/relationships" xmlns:p="http://schemas.openxmlformats.org/presentationml/2006/main">
+  <p:cSld name="Slide 5">
+    <p:bg>
+      <p:bgPr>
+        <a:solidFill>
+          <a:srgbClr val="FFFFFF"/>
+        </a:solidFill>
+      </p:bgPr>
+    </p:bg>
+    <p:spTree>
+      <p:nvGrpSpPr>
+        <p:cNvPr id="1" name=""/>
+        <p:cNvGrpSpPr/>
+        <p:nvPr/>
+      </p:nvGrpSpPr>
+      <p:grpSpPr>
+        <a:xfrm>
+          <a:off x="0" y="0"/>
+          <a:ext cx="0" cy="0"/>
+          <a:chOff x="0" y="0"/>
+          <a:chExt cx="0" cy="0"/>
+        </a:xfrm>
+      </p:grpSpPr>
+      <p:sp>
+        <p:nvSpPr>
+          <p:cNvPr id="2" name="Text 0"/>
+          <p:cNvSpPr/>
+          <p:nvPr/>
+        </p:nvSpPr>
+        <p:spPr>
+          <a:xfrm>
+            <a:off x="502920" y="274320"/>
+            <a:ext cx="8138160" cy="274320"/>
+          </a:xfrm>
+          <a:prstGeom prst="rect">
+            <a:avLst/>
+          </a:prstGeom>
+          <a:noFill/>
+          <a:ln/>
+        </p:spPr>
+        <p:txBody>
+          <a:bodyPr wrap="square" lIns="0" tIns="0" rIns="0" bIns="0" rtlCol="0" anchor="ctr"/>
+          <a:lstStyle/>
+          <a:p>
+            <a:pPr indent="0" marL="0">
+              <a:buNone/>
+            </a:pPr>
+            <a:r>
+              <a:rPr lang="en-US" sz="1100" spc="300" kern="0" dirty="0">
+                <a:solidFill>
+                  <a:srgbClr val="6D28D9"/>
+                </a:solidFill>
+                <a:latin typeface="Courier New" pitchFamily="34" charset="0"/>
+                <a:ea typeface="Courier New" pitchFamily="34" charset="-122"/>
+                <a:cs typeface="Courier New" pitchFamily="34" charset="-120"/>
+              </a:rPr>
+              <a:t>SETUP · THE ONLY HARD SYNC POINT</a:t>
+            </a:r>
+            <a:endParaRPr lang="en-US" sz="1100" dirty="0"/>
+          </a:p>
+        </p:txBody>
+      </p:sp>
+      <p:sp>
+        <p:nvSpPr>
+          <p:cNvPr id="3" name="Text 1"/>
+          <p:cNvSpPr/>
+          <p:nvPr/>
+        </p:nvSpPr>
+        <p:spPr>
+          <a:xfrm>
+            <a:off x="502920" y="530352"/>
+            <a:ext cx="8138160" cy="685800"/>
+          </a:xfrm>
+          <a:prstGeom prst="rect">
+            <a:avLst/>
+          </a:prstGeom>
+          <a:noFill/>
+          <a:ln/>
+        </p:spPr>
+        <p:txBody>
+          <a:bodyPr wrap="square" lIns="0" tIns="0" rIns="0" bIns="0" rtlCol="0" anchor="ctr"/>
+          <a:lstStyle/>
+          <a:p>
+            <a:pPr indent="0" marL="0">
+              <a:buNone/>
+            </a:pPr>
+            <a:r>
+              <a:rPr lang="en-US" sz="3000" b="1" dirty="0">
+                <a:solidFill>
+                  <a:srgbClr val="2A1B3D"/>
+                </a:solidFill>
+                <a:latin typeface="Cambria" pitchFamily="34" charset="0"/>
+                <a:ea typeface="Cambria" pitchFamily="34" charset="-122"/>
+                <a:cs typeface="Cambria" pitchFamily="34" charset="-120"/>
+              </a:rPr>
+              <a:t>Your key, your budget, your brain</a:t>
+            </a:r>
+            <a:endParaRPr lang="en-US" sz="3000" dirty="0"/>
+          </a:p>
+        </p:txBody>
+      </p:sp>
+      <p:sp>
+        <p:nvSpPr>
+          <p:cNvPr id="4" name="Shape 2"/>
+          <p:cNvSpPr/>
+          <p:nvPr/>
+        </p:nvSpPr>
+        <p:spPr>
+          <a:xfrm>
+            <a:off x="502920" y="1417320"/>
+            <a:ext cx="3931920" cy="1463040"/>
+          </a:xfrm>
+          <a:prstGeom prst="roundRect">
+            <a:avLst>
+              <a:gd name="adj" fmla="val 5000"/>
+            </a:avLst>
+          </a:prstGeom>
+          <a:solidFill>
+            <a:srgbClr val="FFFFFF"/>
+          </a:solidFill>
+          <a:ln w="12700">
+            <a:solidFill>
+              <a:srgbClr val="E4DCF5"/>
+            </a:solidFill>
+            <a:prstDash val="solid"/>
+          </a:ln>
+          <a:effectLst>
+            <a:outerShdw sx="100000" sy="100000" kx="0" ky="0" algn="bl" rotWithShape="0" blurRad="88900" dist="25400" dir="5400000">
+              <a:srgbClr val="3A2A55">
+                <a:alpha val="14000"/>
+              </a:srgbClr>
+            </a:outerShdw>
+          </a:effectLst>
+        </p:spPr>
+        <p:txBody>
+          <a:bodyPr/>
+          <a:p/>
+        </p:txBody>
+      </p:sp>
+      <p:sp>
+        <p:nvSpPr>
+          <p:cNvPr id="5" name="Text 3"/>
+          <p:cNvSpPr/>
+          <p:nvPr/>
+        </p:nvSpPr>
+        <p:spPr>
+          <a:xfrm>
+            <a:off x="731520" y="1545336"/>
+            <a:ext cx="2103120" cy="365760"/>
+          </a:xfrm>
+          <a:prstGeom prst="rect">
+            <a:avLst/>
+          </a:prstGeom>
+          <a:noFill/>
+          <a:ln/>
+        </p:spPr>
+        <p:txBody>
+          <a:bodyPr wrap="square" lIns="0" tIns="0" rIns="0" bIns="0" rtlCol="0" anchor="ctr"/>
+          <a:lstStyle/>
+          <a:p>
+            <a:pPr indent="0" marL="0">
+              <a:buNone/>
+            </a:pPr>
+            <a:r>
+              <a:rPr lang="en-US" sz="1600" b="1" dirty="0">
+                <a:solidFill>
+                  <a:srgbClr val="2A1B3D"/>
+                </a:solidFill>
+                <a:latin typeface="Courier New" pitchFamily="34" charset="0"/>
+                <a:ea typeface="Courier New" pitchFamily="34" charset="-122"/>
+                <a:cs typeface="Courier New" pitchFamily="34" charset="-120"/>
+              </a:rPr>
+              <a:t>.env file</a:t>
+            </a:r>
+            <a:endParaRPr lang="en-US" sz="1600" dirty="0"/>
+          </a:p>
+        </p:txBody>
+      </p:sp>
+      <p:sp>
+        <p:nvSpPr>
+          <p:cNvPr id="6" name="Shape 4"/>
+          <p:cNvSpPr/>
+          <p:nvPr/>
+        </p:nvSpPr>
+        <p:spPr>
+          <a:xfrm>
+            <a:off x="2743200" y="1572768"/>
+            <a:ext cx="1508760" cy="310896"/>
+          </a:xfrm>
+          <a:prstGeom prst="roundRect">
+            <a:avLst>
+              <a:gd name="adj" fmla="val 50000"/>
+            </a:avLst>
+          </a:prstGeom>
+          <a:solidFill>
+            <a:srgbClr val="F3EFFB"/>
+          </a:solidFill>
+          <a:ln w="12700">
+            <a:solidFill>
+              <a:srgbClr val="A78BFA"/>
+            </a:solidFill>
+            <a:prstDash val="solid"/>
+          </a:ln>
+        </p:spPr>
+        <p:txBody>
+          <a:bodyPr/>
+          <a:p/>
+        </p:txBody>
+      </p:sp>
+      <p:sp>
+        <p:nvSpPr>
+          <p:cNvPr id="7" name="Text 5"/>
+          <p:cNvSpPr/>
+          <p:nvPr/>
+        </p:nvSpPr>
+        <p:spPr>
+          <a:xfrm>
+            <a:off x="2743200" y="1572768"/>
+            <a:ext cx="1508760" cy="310896"/>
+          </a:xfrm>
+          <a:prstGeom prst="rect">
+            <a:avLst/>
+          </a:prstGeom>
+          <a:noFill/>
+          <a:ln/>
+        </p:spPr>
+        <p:txBody>
+          <a:bodyPr wrap="square" lIns="0" tIns="0" rIns="0" bIns="0" rtlCol="0" anchor="ctr"/>
+          <a:lstStyle/>
+          <a:p>
+            <a:pPr algn="ctr" indent="0" marL="0">
+              <a:buNone/>
+            </a:pPr>
+            <a:r>
+              <a:rPr lang="en-US" sz="850" dirty="0">
+                <a:solidFill>
+                  <a:srgbClr val="6D28D9"/>
+                </a:solidFill>
+                <a:latin typeface="Courier New" pitchFamily="34" charset="0"/>
+                <a:ea typeface="Courier New" pitchFamily="34" charset="-122"/>
+                <a:cs typeface="Courier New" pitchFamily="34" charset="-120"/>
+              </a:rPr>
+              <a:t>Upload</a:t>
+            </a:r>
+            <a:endParaRPr lang="en-US" sz="850" dirty="0"/>
+          </a:p>
+        </p:txBody>
+      </p:sp>
+      <p:sp>
+        <p:nvSpPr>
+          <p:cNvPr id="8" name="Text 6"/>
+          <p:cNvSpPr/>
+          <p:nvPr/>
+        </p:nvSpPr>
+        <p:spPr>
+          <a:xfrm>
+            <a:off x="731520" y="1929384"/>
+            <a:ext cx="3520440" cy="640080"/>
+          </a:xfrm>
+          <a:prstGeom prst="rect">
+            <a:avLst/>
+          </a:prstGeom>
+          <a:noFill/>
+          <a:ln/>
+        </p:spPr>
+        <p:txBody>
+          <a:bodyPr wrap="square" lIns="0" tIns="0" rIns="0" bIns="0" rtlCol="0" anchor="ctr"/>
+          <a:lstStyle/>
+          <a:p>
+            <a:pPr indent="0" marL="0">
+              <a:buNone/>
+            </a:pPr>
+            <a:r>
+              <a:rPr lang="en-US" sz="1050" dirty="0">
+                <a:solidFill>
+                  <a:srgbClr val="3F3F49"/>
+                </a:solidFill>
+                <a:latin typeface="Calibri" pitchFamily="34" charset="0"/>
+                <a:ea typeface="Calibri" pitchFamily="34" charset="-122"/>
+                <a:cs typeface="Calibri" pitchFamily="34" charset="-120"/>
+              </a:rPr>
+              <a:t>Drop a .env into the file sidebar. The notebook parses it — and picks up OPENAI_MODEL while it is there.</a:t>
+            </a:r>
+            <a:endParaRPr lang="en-US" sz="1050" dirty="0"/>
+          </a:p>
+        </p:txBody>
+      </p:sp>
+      <p:sp>
+        <p:nvSpPr>
+          <p:cNvPr id="9" name="Text 7"/>
+          <p:cNvSpPr/>
+          <p:nvPr/>
+        </p:nvSpPr>
+        <p:spPr>
+          <a:xfrm>
+            <a:off x="731520" y="2569464"/>
+            <a:ext cx="3520440" cy="256032"/>
+          </a:xfrm>
+          <a:prstGeom prst="rect">
+            <a:avLst/>
+          </a:prstGeom>
+          <a:noFill/>
+          <a:ln/>
+        </p:spPr>
+        <p:txBody>
+          <a:bodyPr wrap="square" lIns="0" tIns="0" rIns="0" bIns="0" rtlCol="0" anchor="ctr"/>
+          <a:lstStyle/>
+          <a:p>
+            <a:pPr indent="0" marL="0">
+              <a:buNone/>
+            </a:pPr>
+            <a:r>
+              <a:rPr lang="en-US" sz="850" dirty="0">
+                <a:solidFill>
+                  <a:srgbClr val="6D28D9"/>
+                </a:solidFill>
+                <a:latin typeface="Courier New" pitchFamily="34" charset="0"/>
+                <a:ea typeface="Courier New" pitchFamily="34" charset="-122"/>
+                <a:cs typeface="Courier New" pitchFamily="34" charset="-120"/>
+              </a:rPr>
+              <a:t>OPENAI_API_KEY=sk-…</a:t>
+            </a:r>
+            <a:endParaRPr lang="en-US" sz="850" dirty="0"/>
+          </a:p>
+        </p:txBody>
+      </p:sp>
+      <p:sp>
+        <p:nvSpPr>
+          <p:cNvPr id="10" name="Shape 8"/>
+          <p:cNvSpPr/>
+          <p:nvPr/>
+        </p:nvSpPr>
+        <p:spPr>
+          <a:xfrm>
+            <a:off x="4709160" y="1417320"/>
+            <a:ext cx="3931920" cy="1463040"/>
+          </a:xfrm>
+          <a:prstGeom prst="roundRect">
+            <a:avLst>
+              <a:gd name="adj" fmla="val 5000"/>
+            </a:avLst>
+          </a:prstGeom>
+          <a:solidFill>
+            <a:srgbClr val="FFFFFF"/>
+          </a:solidFill>
+          <a:ln w="12700">
+            <a:solidFill>
+              <a:srgbClr val="E4DCF5"/>
+            </a:solidFill>
+            <a:prstDash val="solid"/>
+          </a:ln>
+          <a:effectLst>
+            <a:outerShdw sx="100000" sy="100000" kx="0" ky="0" algn="bl" rotWithShape="0" blurRad="88900" dist="25400" dir="5400000">
+              <a:srgbClr val="3A2A55">
+                <a:alpha val="14000"/>
+              </a:srgbClr>
+            </a:outerShdw>
+          </a:effectLst>
+        </p:spPr>
+        <p:txBody>
+          <a:bodyPr/>
+          <a:p/>
+        </p:txBody>
+      </p:sp>
+      <p:sp>
+        <p:nvSpPr>
+          <p:cNvPr id="11" name="Text 9"/>
+          <p:cNvSpPr/>
+          <p:nvPr/>
+        </p:nvSpPr>
+        <p:spPr>
+          <a:xfrm>
+            <a:off x="4937760" y="1545336"/>
+            <a:ext cx="2103120" cy="365760"/>
+          </a:xfrm>
+          <a:prstGeom prst="rect">
+            <a:avLst/>
+          </a:prstGeom>
+          <a:noFill/>
+          <a:ln/>
+        </p:spPr>
+        <p:txBody>
+          <a:bodyPr wrap="square" lIns="0" tIns="0" rIns="0" bIns="0" rtlCol="0" anchor="ctr"/>
+          <a:lstStyle/>
+          <a:p>
+            <a:pPr indent="0" marL="0">
+              <a:buNone/>
+            </a:pPr>
+            <a:r>
+              <a:rPr lang="en-US" sz="1600" b="1" dirty="0">
+                <a:solidFill>
+                  <a:srgbClr val="2A1B3D"/>
+                </a:solidFill>
+                <a:latin typeface="Courier New" pitchFamily="34" charset="0"/>
+                <a:ea typeface="Courier New" pitchFamily="34" charset="-122"/>
+                <a:cs typeface="Courier New" pitchFamily="34" charset="-120"/>
+              </a:rPr>
+              <a:t>Colab Secrets</a:t>
+            </a:r>
+            <a:endParaRPr lang="en-US" sz="1600" dirty="0"/>
+          </a:p>
+        </p:txBody>
+      </p:sp>
+      <p:sp>
+        <p:nvSpPr>
+          <p:cNvPr id="12" name="Shape 10"/>
+          <p:cNvSpPr/>
+          <p:nvPr/>
+        </p:nvSpPr>
+        <p:spPr>
+          <a:xfrm>
+            <a:off x="6949440" y="1572768"/>
+            <a:ext cx="1508760" cy="310896"/>
+          </a:xfrm>
+          <a:prstGeom prst="roundRect">
+            <a:avLst>
+              <a:gd name="adj" fmla="val 50000"/>
+            </a:avLst>
+          </a:prstGeom>
+          <a:solidFill>
+            <a:srgbClr val="F3EFFB"/>
+          </a:solidFill>
+          <a:ln w="12700">
+            <a:solidFill>
+              <a:srgbClr val="A78BFA"/>
+            </a:solidFill>
+            <a:prstDash val="solid"/>
+          </a:ln>
+        </p:spPr>
+        <p:txBody>
+          <a:bodyPr/>
+          <a:p/>
+        </p:txBody>
+      </p:sp>
+      <p:sp>
+        <p:nvSpPr>
+          <p:cNvPr id="13" name="Text 11"/>
+          <p:cNvSpPr/>
+          <p:nvPr/>
+        </p:nvSpPr>
+        <p:spPr>
+          <a:xfrm>
+            <a:off x="6949440" y="1572768"/>
+            <a:ext cx="1508760" cy="310896"/>
+          </a:xfrm>
+          <a:prstGeom prst="rect">
+            <a:avLst/>
+          </a:prstGeom>
+          <a:noFill/>
+          <a:ln/>
+        </p:spPr>
+        <p:txBody>
+          <a:bodyPr wrap="square" lIns="0" tIns="0" rIns="0" bIns="0" rtlCol="0" anchor="ctr"/>
+          <a:lstStyle/>
+          <a:p>
+            <a:pPr algn="ctr" indent="0" marL="0">
+              <a:buNone/>
+            </a:pPr>
+            <a:r>
+              <a:rPr lang="en-US" sz="850" dirty="0">
+                <a:solidFill>
+                  <a:srgbClr val="6D28D9"/>
+                </a:solidFill>
+                <a:latin typeface="Courier New" pitchFamily="34" charset="0"/>
+                <a:ea typeface="Courier New" pitchFamily="34" charset="-122"/>
+                <a:cs typeface="Courier New" pitchFamily="34" charset="-120"/>
+              </a:rPr>
+              <a:t>Recommended</a:t>
+            </a:r>
+            <a:endParaRPr lang="en-US" sz="850" dirty="0"/>
+          </a:p>
+        </p:txBody>
+      </p:sp>
+      <p:sp>
+        <p:nvSpPr>
+          <p:cNvPr id="14" name="Text 12"/>
+          <p:cNvSpPr/>
+          <p:nvPr/>
+        </p:nvSpPr>
+        <p:spPr>
+          <a:xfrm>
+            <a:off x="4937760" y="1929384"/>
+            <a:ext cx="3520440" cy="640080"/>
+          </a:xfrm>
+          <a:prstGeom prst="rect">
+            <a:avLst/>
+          </a:prstGeom>
+          <a:noFill/>
+          <a:ln/>
+        </p:spPr>
+        <p:txBody>
+          <a:bodyPr wrap="square" lIns="0" tIns="0" rIns="0" bIns="0" rtlCol="0" anchor="ctr"/>
+          <a:lstStyle/>
+          <a:p>
+            <a:pPr indent="0" marL="0">
+              <a:buNone/>
+            </a:pPr>
+            <a:r>
+              <a:rPr lang="en-US" sz="1050" dirty="0">
+                <a:solidFill>
+                  <a:srgbClr val="3F3F49"/>
+                </a:solidFill>
+                <a:latin typeface="Calibri" pitchFamily="34" charset="0"/>
+                <a:ea typeface="Calibri" pitchFamily="34" charset="-122"/>
+                <a:cs typeface="Calibri" pitchFamily="34" charset="-120"/>
+              </a:rPr>
+              <a:t>The 🔑 icon, left sidebar. Add OPENAI_API_KEY — and optionally OPENAI_MODEL — then enable notebook access.</a:t>
+            </a:r>
+            <a:endParaRPr lang="en-US" sz="1050" dirty="0"/>
+          </a:p>
+        </p:txBody>
+      </p:sp>
+      <p:sp>
+        <p:nvSpPr>
+          <p:cNvPr id="15" name="Text 13"/>
+          <p:cNvSpPr/>
+          <p:nvPr/>
+        </p:nvSpPr>
+        <p:spPr>
+          <a:xfrm>
+            <a:off x="4937760" y="2569464"/>
+            <a:ext cx="3520440" cy="256032"/>
+          </a:xfrm>
+          <a:prstGeom prst="rect">
+            <a:avLst/>
+          </a:prstGeom>
+          <a:noFill/>
+          <a:ln/>
+        </p:spPr>
+        <p:txBody>
+          <a:bodyPr wrap="square" lIns="0" tIns="0" rIns="0" bIns="0" rtlCol="0" anchor="ctr"/>
+          <a:lstStyle/>
+          <a:p>
+            <a:pPr indent="0" marL="0">
+              <a:buNone/>
+            </a:pPr>
+            <a:r>
+              <a:rPr lang="en-US" sz="850" dirty="0">
+                <a:solidFill>
+                  <a:srgbClr val="6D28D9"/>
+                </a:solidFill>
+                <a:latin typeface="Courier New" pitchFamily="34" charset="0"/>
+                <a:ea typeface="Courier New" pitchFamily="34" charset="-122"/>
+                <a:cs typeface="Courier New" pitchFamily="34" charset="-120"/>
+              </a:rPr>
+              <a:t>userdata.get("OPENAI_API_KEY")</a:t>
+            </a:r>
+            <a:endParaRPr lang="en-US" sz="850" dirty="0"/>
+          </a:p>
+        </p:txBody>
+      </p:sp>
+      <p:sp>
+        <p:nvSpPr>
+          <p:cNvPr id="16" name="Shape 14"/>
+          <p:cNvSpPr/>
+          <p:nvPr/>
+        </p:nvSpPr>
+        <p:spPr>
+          <a:xfrm>
+            <a:off x="502920" y="3044952"/>
+            <a:ext cx="3931920" cy="1463040"/>
+          </a:xfrm>
+          <a:prstGeom prst="roundRect">
+            <a:avLst>
+              <a:gd name="adj" fmla="val 5000"/>
+            </a:avLst>
+          </a:prstGeom>
+          <a:solidFill>
+            <a:srgbClr val="F3EFFB"/>
+          </a:solidFill>
+          <a:ln w="12700">
+            <a:solidFill>
+              <a:srgbClr val="E4DCF5"/>
+            </a:solidFill>
+            <a:prstDash val="solid"/>
+          </a:ln>
+          <a:effectLst>
+            <a:outerShdw sx="100000" sy="100000" kx="0" ky="0" algn="bl" rotWithShape="0" blurRad="88900" dist="25400" dir="5400000">
+              <a:srgbClr val="3A2A55">
+                <a:alpha val="14000"/>
+              </a:srgbClr>
+            </a:outerShdw>
+          </a:effectLst>
+        </p:spPr>
+        <p:txBody>
+          <a:bodyPr/>
+          <a:p/>
+        </p:txBody>
+      </p:sp>
+      <p:sp>
+        <p:nvSpPr>
+          <p:cNvPr id="17" name="Text 15"/>
+          <p:cNvSpPr/>
+          <p:nvPr/>
+        </p:nvSpPr>
+        <p:spPr>
+          <a:xfrm>
+            <a:off x="731520" y="3172968"/>
+            <a:ext cx="2103120" cy="365760"/>
+          </a:xfrm>
+          <a:prstGeom prst="rect">
+            <a:avLst/>
+          </a:prstGeom>
+          <a:noFill/>
+          <a:ln/>
+        </p:spPr>
+        <p:txBody>
+          <a:bodyPr wrap="square" lIns="0" tIns="0" rIns="0" bIns="0" rtlCol="0" anchor="ctr"/>
+          <a:lstStyle/>
+          <a:p>
+            <a:pPr indent="0" marL="0">
+              <a:buNone/>
+            </a:pPr>
+            <a:r>
+              <a:rPr lang="en-US" sz="1600" b="1" dirty="0">
+                <a:solidFill>
+                  <a:srgbClr val="2A1B3D"/>
+                </a:solidFill>
+                <a:latin typeface="Courier New" pitchFamily="34" charset="0"/>
+                <a:ea typeface="Courier New" pitchFamily="34" charset="-122"/>
+                <a:cs typeface="Courier New" pitchFamily="34" charset="-120"/>
+              </a:rPr>
+              <a:t>Hidden prompt</a:t>
+            </a:r>
+            <a:endParaRPr lang="en-US" sz="1600" dirty="0"/>
+          </a:p>
+        </p:txBody>
+      </p:sp>
+      <p:sp>
+        <p:nvSpPr>
+          <p:cNvPr id="18" name="Shape 16"/>
+          <p:cNvSpPr/>
+          <p:nvPr/>
+        </p:nvSpPr>
+        <p:spPr>
+          <a:xfrm>
+            <a:off x="2743200" y="3200400"/>
+            <a:ext cx="1508760" cy="310896"/>
+          </a:xfrm>
+          <a:prstGeom prst="roundRect">
+            <a:avLst>
+              <a:gd name="adj" fmla="val 50000"/>
+            </a:avLst>
+          </a:prstGeom>
+          <a:solidFill>
+            <a:srgbClr val="F3EFFB"/>
+          </a:solidFill>
+          <a:ln w="12700">
+            <a:solidFill>
+              <a:srgbClr val="A78BFA"/>
+            </a:solidFill>
+            <a:prstDash val="solid"/>
+          </a:ln>
+        </p:spPr>
+        <p:txBody>
+          <a:bodyPr/>
+          <a:p/>
+        </p:txBody>
+      </p:sp>
+      <p:sp>
+        <p:nvSpPr>
+          <p:cNvPr id="19" name="Text 17"/>
+          <p:cNvSpPr/>
+          <p:nvPr/>
+        </p:nvSpPr>
+        <p:spPr>
+          <a:xfrm>
+            <a:off x="2743200" y="3200400"/>
+            <a:ext cx="1508760" cy="310896"/>
+          </a:xfrm>
+          <a:prstGeom prst="rect">
+            <a:avLst/>
+          </a:prstGeom>
+          <a:noFill/>
+          <a:ln/>
+        </p:spPr>
+        <p:txBody>
+          <a:bodyPr wrap="square" lIns="0" tIns="0" rIns="0" bIns="0" rtlCol="0" anchor="ctr"/>
+          <a:lstStyle/>
+          <a:p>
+            <a:pPr algn="ctr" indent="0" marL="0">
+              <a:buNone/>
+            </a:pPr>
+            <a:r>
+              <a:rPr lang="en-US" sz="850" dirty="0">
+                <a:solidFill>
+                  <a:srgbClr val="6D28D9"/>
+                </a:solidFill>
+                <a:latin typeface="Courier New" pitchFamily="34" charset="0"/>
+                <a:ea typeface="Courier New" pitchFamily="34" charset="-122"/>
+                <a:cs typeface="Courier New" pitchFamily="34" charset="-120"/>
+              </a:rPr>
+              <a:t>Fallback</a:t>
+            </a:r>
+            <a:endParaRPr lang="en-US" sz="850" dirty="0"/>
+          </a:p>
+        </p:txBody>
+      </p:sp>
+      <p:sp>
+        <p:nvSpPr>
+          <p:cNvPr id="20" name="Text 18"/>
+          <p:cNvSpPr/>
+          <p:nvPr/>
+        </p:nvSpPr>
+        <p:spPr>
+          <a:xfrm>
+            <a:off x="731520" y="3557016"/>
+            <a:ext cx="3520440" cy="640080"/>
+          </a:xfrm>
+          <a:prstGeom prst="rect">
+            <a:avLst/>
+          </a:prstGeom>
+          <a:noFill/>
+          <a:ln/>
+        </p:spPr>
+        <p:txBody>
+          <a:bodyPr wrap="square" lIns="0" tIns="0" rIns="0" bIns="0" rtlCol="0" anchor="ctr"/>
+          <a:lstStyle/>
+          <a:p>
+            <a:pPr indent="0" marL="0">
+              <a:buNone/>
+            </a:pPr>
+            <a:r>
+              <a:rPr lang="en-US" sz="1050" dirty="0">
+                <a:solidFill>
+                  <a:srgbClr val="3F3F49"/>
+                </a:solidFill>
+                <a:latin typeface="Calibri" pitchFamily="34" charset="0"/>
+                <a:ea typeface="Calibri" pitchFamily="34" charset="-122"/>
+                <a:cs typeface="Calibri" pitchFamily="34" charset="-120"/>
+              </a:rPr>
+              <a:t>No file, no secret? The notebook asks, with the input masked. Never paste a key into a code cell.</a:t>
+            </a:r>
+            <a:endParaRPr lang="en-US" sz="1050" dirty="0"/>
+          </a:p>
+        </p:txBody>
+      </p:sp>
+      <p:sp>
+        <p:nvSpPr>
+          <p:cNvPr id="21" name="Text 19"/>
+          <p:cNvSpPr/>
+          <p:nvPr/>
+        </p:nvSpPr>
+        <p:spPr>
+          <a:xfrm>
+            <a:off x="731520" y="4197096"/>
+            <a:ext cx="3520440" cy="256032"/>
+          </a:xfrm>
+          <a:prstGeom prst="rect">
+            <a:avLst/>
+          </a:prstGeom>
+          <a:noFill/>
+          <a:ln/>
+        </p:spPr>
+        <p:txBody>
+          <a:bodyPr wrap="square" lIns="0" tIns="0" rIns="0" bIns="0" rtlCol="0" anchor="ctr"/>
+          <a:lstStyle/>
+          <a:p>
+            <a:pPr indent="0" marL="0">
+              <a:buNone/>
+            </a:pPr>
+            <a:r>
+              <a:rPr lang="en-US" sz="850" dirty="0">
+                <a:solidFill>
+                  <a:srgbClr val="6D28D9"/>
+                </a:solidFill>
+                <a:latin typeface="Courier New" pitchFamily="34" charset="0"/>
+                <a:ea typeface="Courier New" pitchFamily="34" charset="-122"/>
+                <a:cs typeface="Courier New" pitchFamily="34" charset="-120"/>
+              </a:rPr>
+              <a:t>getpass.getpass()</a:t>
+            </a:r>
+            <a:endParaRPr lang="en-US" sz="850" dirty="0"/>
+          </a:p>
+        </p:txBody>
+      </p:sp>
+      <p:sp>
+        <p:nvSpPr>
+          <p:cNvPr id="22" name="Shape 20"/>
+          <p:cNvSpPr/>
+          <p:nvPr/>
+        </p:nvSpPr>
+        <p:spPr>
+          <a:xfrm>
+            <a:off x="4709160" y="3044952"/>
+            <a:ext cx="3931920" cy="1463040"/>
+          </a:xfrm>
+          <a:prstGeom prst="roundRect">
+            <a:avLst>
+              <a:gd name="adj" fmla="val 5000"/>
+            </a:avLst>
+          </a:prstGeom>
+          <a:solidFill>
+            <a:srgbClr val="F3EFFB"/>
+          </a:solidFill>
+          <a:ln w="12700">
+            <a:solidFill>
+              <a:srgbClr val="E4DCF5"/>
+            </a:solidFill>
+            <a:prstDash val="solid"/>
+          </a:ln>
+          <a:effectLst>
+            <a:outerShdw sx="100000" sy="100000" kx="0" ky="0" algn="bl" rotWithShape="0" blurRad="88900" dist="25400" dir="5400000">
+              <a:srgbClr val="3A2A55">
+                <a:alpha val="14000"/>
+              </a:srgbClr>
+            </a:outerShdw>
+          </a:effectLst>
+        </p:spPr>
+        <p:txBody>
+          <a:bodyPr/>
+          <a:p/>
+        </p:txBody>
+      </p:sp>
+      <p:sp>
+        <p:nvSpPr>
+          <p:cNvPr id="23" name="Text 21"/>
+          <p:cNvSpPr/>
+          <p:nvPr/>
+        </p:nvSpPr>
+        <p:spPr>
+          <a:xfrm>
+            <a:off x="4937760" y="3172968"/>
+            <a:ext cx="2103120" cy="365760"/>
+          </a:xfrm>
+          <a:prstGeom prst="rect">
+            <a:avLst/>
+          </a:prstGeom>
+          <a:noFill/>
+          <a:ln/>
+        </p:spPr>
+        <p:txBody>
+          <a:bodyPr wrap="square" lIns="0" tIns="0" rIns="0" bIns="0" rtlCol="0" anchor="ctr"/>
+          <a:lstStyle/>
+          <a:p>
+            <a:pPr indent="0" marL="0">
+              <a:buNone/>
+            </a:pPr>
+            <a:r>
+              <a:rPr lang="en-US" sz="1600" b="1" dirty="0">
+                <a:solidFill>
+                  <a:srgbClr val="2A1B3D"/>
+                </a:solidFill>
+                <a:latin typeface="Courier New" pitchFamily="34" charset="0"/>
+                <a:ea typeface="Courier New" pitchFamily="34" charset="-122"/>
+                <a:cs typeface="Courier New" pitchFamily="34" charset="-120"/>
+              </a:rPr>
+              <a:t>The cost meter</a:t>
+            </a:r>
+            <a:endParaRPr lang="en-US" sz="1600" dirty="0"/>
+          </a:p>
+        </p:txBody>
+      </p:sp>
+      <p:sp>
+        <p:nvSpPr>
+          <p:cNvPr id="24" name="Shape 22"/>
+          <p:cNvSpPr/>
+          <p:nvPr/>
+        </p:nvSpPr>
+        <p:spPr>
+          <a:xfrm>
+            <a:off x="6949440" y="3200400"/>
+            <a:ext cx="1508760" cy="310896"/>
+          </a:xfrm>
+          <a:prstGeom prst="roundRect">
+            <a:avLst>
+              <a:gd name="adj" fmla="val 50000"/>
+            </a:avLst>
+          </a:prstGeom>
+          <a:solidFill>
+            <a:srgbClr val="F3EFFB"/>
+          </a:solidFill>
+          <a:ln w="12700">
+            <a:solidFill>
+              <a:srgbClr val="A78BFA"/>
+            </a:solidFill>
+            <a:prstDash val="solid"/>
+          </a:ln>
+        </p:spPr>
+        <p:txBody>
+          <a:bodyPr/>
+          <a:p/>
+        </p:txBody>
+      </p:sp>
+      <p:sp>
+        <p:nvSpPr>
+          <p:cNvPr id="25" name="Text 23"/>
+          <p:cNvSpPr/>
+          <p:nvPr/>
+        </p:nvSpPr>
+        <p:spPr>
+          <a:xfrm>
+            <a:off x="6949440" y="3200400"/>
+            <a:ext cx="1508760" cy="310896"/>
+          </a:xfrm>
+          <a:prstGeom prst="rect">
+            <a:avLst/>
+          </a:prstGeom>
+          <a:noFill/>
+          <a:ln/>
+        </p:spPr>
+        <p:txBody>
+          <a:bodyPr wrap="square" lIns="0" tIns="0" rIns="0" bIns="0" rtlCol="0" anchor="ctr"/>
+          <a:lstStyle/>
+          <a:p>
+            <a:pPr algn="ctr" indent="0" marL="0">
+              <a:buNone/>
+            </a:pPr>
+            <a:r>
+              <a:rPr lang="en-US" sz="850" dirty="0">
+                <a:solidFill>
+                  <a:srgbClr val="6D28D9"/>
+                </a:solidFill>
+                <a:latin typeface="Courier New" pitchFamily="34" charset="0"/>
+                <a:ea typeface="Courier New" pitchFamily="34" charset="-122"/>
+                <a:cs typeface="Courier New" pitchFamily="34" charset="-120"/>
+              </a:rPr>
+              <a:t>Budget</a:t>
+            </a:r>
+            <a:endParaRPr lang="en-US" sz="850" dirty="0"/>
+          </a:p>
+        </p:txBody>
+      </p:sp>
+      <p:sp>
+        <p:nvSpPr>
+          <p:cNvPr id="26" name="Text 24"/>
+          <p:cNvSpPr/>
+          <p:nvPr/>
+        </p:nvSpPr>
+        <p:spPr>
+          <a:xfrm>
+            <a:off x="4937760" y="3557016"/>
+            <a:ext cx="3520440" cy="640080"/>
+          </a:xfrm>
+          <a:prstGeom prst="rect">
+            <a:avLst/>
+          </a:prstGeom>
+          <a:noFill/>
+          <a:ln/>
+        </p:spPr>
+        <p:txBody>
+          <a:bodyPr wrap="square" lIns="0" tIns="0" rIns="0" bIns="0" rtlCol="0" anchor="ctr"/>
+          <a:lstStyle/>
+          <a:p>
+            <a:pPr indent="0" marL="0">
+              <a:buNone/>
+            </a:pPr>
+            <a:r>
+              <a:rPr lang="en-US" sz="1050" dirty="0">
+                <a:solidFill>
+                  <a:srgbClr val="3F3F49"/>
+                </a:solidFill>
+                <a:latin typeface="Calibri" pitchFamily="34" charset="0"/>
+                <a:ea typeface="Calibri" pitchFamily="34" charset="-122"/>
+                <a:cs typeface="Calibri" pitchFamily="34" charset="-120"/>
+              </a:rPr>
+              <a:t>Every call is counted. The whole notebook costs roughly $0.05–0.25 on gpt-4.1-mini. Check any time.</a:t>
+            </a:r>
+            <a:endParaRPr lang="en-US" sz="1050" dirty="0"/>
+          </a:p>
+        </p:txBody>
+      </p:sp>
+      <p:sp>
+        <p:nvSpPr>
+          <p:cNvPr id="27" name="Text 25"/>
+          <p:cNvSpPr/>
+          <p:nvPr/>
+        </p:nvSpPr>
+        <p:spPr>
+          <a:xfrm>
+            <a:off x="4937760" y="4197096"/>
+            <a:ext cx="3520440" cy="256032"/>
+          </a:xfrm>
+          <a:prstGeom prst="rect">
+            <a:avLst/>
+          </a:prstGeom>
+          <a:noFill/>
+          <a:ln/>
+        </p:spPr>
+        <p:txBody>
+          <a:bodyPr wrap="square" lIns="0" tIns="0" rIns="0" bIns="0" rtlCol="0" anchor="ctr"/>
+          <a:lstStyle/>
+          <a:p>
+            <a:pPr indent="0" marL="0">
+              <a:buNone/>
+            </a:pPr>
+            <a:r>
+              <a:rPr lang="en-US" sz="850" dirty="0">
+                <a:solidFill>
+                  <a:srgbClr val="6D28D9"/>
+                </a:solidFill>
+                <a:latin typeface="Courier New" pitchFamily="34" charset="0"/>
+                <a:ea typeface="Courier New" pitchFamily="34" charset="-122"/>
+                <a:cs typeface="Courier New" pitchFamily="34" charset="-120"/>
+              </a:rPr>
+              <a:t>cost_report()</a:t>
+            </a:r>
+            <a:endParaRPr lang="en-US" sz="850" dirty="0"/>
+          </a:p>
+        </p:txBody>
+      </p:sp>
+      <p:sp>
+        <p:nvSpPr>
+          <p:cNvPr id="28" name="Text 26"/>
+          <p:cNvSpPr/>
+          <p:nvPr/>
+        </p:nvSpPr>
+        <p:spPr>
+          <a:xfrm>
+            <a:off x="502920" y="4709160"/>
+            <a:ext cx="8138160" cy="320040"/>
+          </a:xfrm>
+          <a:prstGeom prst="rect">
+            <a:avLst/>
+          </a:prstGeom>
+          <a:noFill/>
+          <a:ln/>
+        </p:spPr>
+        <p:txBody>
+          <a:bodyPr wrap="square" lIns="0" tIns="0" rIns="0" bIns="0" rtlCol="0" anchor="ctr"/>
+          <a:lstStyle/>
+          <a:p>
+            <a:pPr algn="ctr" indent="0" marL="0">
+              <a:buNone/>
+            </a:pPr>
+            <a:r>
+              <a:rPr lang="en-US" sz="1400" i="1" dirty="0">
+                <a:solidFill>
+                  <a:srgbClr val="6D28D9"/>
+                </a:solidFill>
+                <a:latin typeface="Calibri" pitchFamily="34" charset="0"/>
+                <a:ea typeface="Calibri" pitchFamily="34" charset="-122"/>
+                <a:cs typeface="Calibri" pitchFamily="34" charset="-120"/>
+              </a:rPr>
+              <a:t>No GPU required. The brain is an API call — one llm() function for all six agents. The key lives in os.environ, so even Part 4's !debtbuster subprocess inherits it.</a:t>
+            </a:r>
+            <a:endParaRPr lang="en-US" sz="1400" dirty="0"/>
+          </a:p>
+        </p:txBody>
+      </p:sp>
+    </p:spTree>
+  </p:cSld>
+  <p:clrMapOvr>
+    <a:masterClrMapping/>
+  </p:clrMapOvr>
+</p:sld>
+</file>
+
+<file path=ppt/slides/slide4.xml><?xml version="1.0" encoding="utf-8"?>
+<p:sld xmlns:a="http://schemas.openxmlformats.org/drawingml/2006/main" xmlns:r="http://schemas.openxmlformats.org/officeDocument/2006/relationships" xmlns:p="http://schemas.openxmlformats.org/presentationml/2006/main">
+  <p:cSld name="Slide 6">
+    <p:bg>
+      <p:bgPr>
+        <a:solidFill>
+          <a:srgbClr val="FFFFFF"/>
+        </a:solidFill>
+      </p:bgPr>
+    </p:bg>
+    <p:spTree>
+      <p:nvGrpSpPr>
+        <p:cNvPr id="1" name=""/>
+        <p:cNvGrpSpPr/>
+        <p:nvPr/>
+      </p:nvGrpSpPr>
+      <p:grpSpPr>
+        <a:xfrm>
+          <a:off x="0" y="0"/>
+          <a:ext cx="0" cy="0"/>
+          <a:chOff x="0" y="0"/>
+          <a:chExt cx="0" cy="0"/>
+        </a:xfrm>
+      </p:grpSpPr>
+      <p:sp>
+        <p:nvSpPr>
+          <p:cNvPr id="2" name="Text 0"/>
+          <p:cNvSpPr/>
+          <p:nvPr/>
+        </p:nvSpPr>
+        <p:spPr>
+          <a:xfrm>
+            <a:off x="502920" y="274320"/>
+            <a:ext cx="8138160" cy="274320"/>
+          </a:xfrm>
+          <a:prstGeom prst="rect">
+            <a:avLst/>
+          </a:prstGeom>
+          <a:noFill/>
+          <a:ln/>
+        </p:spPr>
+        <p:txBody>
+          <a:bodyPr wrap="square" lIns="0" tIns="0" rIns="0" bIns="0" rtlCol="0" anchor="ctr"/>
+          <a:lstStyle/>
+          <a:p>
+            <a:pPr indent="0" marL="0">
+              <a:buNone/>
+            </a:pPr>
+            <a:r>
+              <a:rPr lang="en-US" sz="1100" spc="300" kern="0" dirty="0">
+                <a:solidFill>
+                  <a:srgbClr val="6D28D9"/>
+                </a:solidFill>
+                <a:latin typeface="Courier New" pitchFamily="34" charset="0"/>
+                <a:ea typeface="Courier New" pitchFamily="34" charset="-122"/>
+                <a:cs typeface="Courier New" pitchFamily="34" charset="-120"/>
+              </a:rPr>
+              <a:t>HOW THE NEXT THREE HOURS RUN</a:t>
+            </a:r>
+            <a:endParaRPr lang="en-US" sz="1100" dirty="0"/>
+          </a:p>
+        </p:txBody>
+      </p:sp>
+      <p:sp>
+        <p:nvSpPr>
+          <p:cNvPr id="3" name="Text 1"/>
+          <p:cNvSpPr/>
+          <p:nvPr/>
+        </p:nvSpPr>
+        <p:spPr>
+          <a:xfrm>
+            <a:off x="502920" y="530352"/>
+            <a:ext cx="8138160" cy="685800"/>
+          </a:xfrm>
+          <a:prstGeom prst="rect">
+            <a:avLst/>
+          </a:prstGeom>
+          <a:noFill/>
+          <a:ln/>
+        </p:spPr>
+        <p:txBody>
+          <a:bodyPr wrap="square" lIns="0" tIns="0" rIns="0" bIns="0" rtlCol="0" anchor="ctr"/>
+          <a:lstStyle/>
+          <a:p>
+            <a:pPr indent="0" marL="0">
+              <a:buNone/>
+            </a:pPr>
+            <a:r>
+              <a:rPr lang="en-US" sz="3000" b="1" dirty="0">
+                <a:solidFill>
+                  <a:srgbClr val="2A1B3D"/>
+                </a:solidFill>
+                <a:latin typeface="Cambria" pitchFamily="34" charset="0"/>
+                <a:ea typeface="Cambria" pitchFamily="34" charset="-122"/>
+                <a:cs typeface="Cambria" pitchFamily="34" charset="-120"/>
+              </a:rPr>
+              <a:t>The notebook tells you what to do</a:t>
+            </a:r>
+            <a:endParaRPr lang="en-US" sz="3000" dirty="0"/>
+          </a:p>
+        </p:txBody>
+      </p:sp>
+      <p:sp>
+        <p:nvSpPr>
+          <p:cNvPr id="4" name="Shape 2"/>
+          <p:cNvSpPr/>
+          <p:nvPr/>
+        </p:nvSpPr>
+        <p:spPr>
+          <a:xfrm>
+            <a:off x="502920" y="1417320"/>
+            <a:ext cx="3931920" cy="1389888"/>
+          </a:xfrm>
+          <a:prstGeom prst="roundRect">
+            <a:avLst>
+              <a:gd name="adj" fmla="val 5263"/>
+            </a:avLst>
+          </a:prstGeom>
+          <a:solidFill>
+            <a:srgbClr val="FFFFFF"/>
+          </a:solidFill>
+          <a:ln w="12700">
+            <a:solidFill>
+              <a:srgbClr val="E4DCF5"/>
+            </a:solidFill>
+            <a:prstDash val="solid"/>
+          </a:ln>
+          <a:effectLst>
+            <a:outerShdw sx="100000" sy="100000" kx="0" ky="0" algn="bl" rotWithShape="0" blurRad="88900" dist="25400" dir="5400000">
+              <a:srgbClr val="3A2A55">
+                <a:alpha val="14000"/>
+              </a:srgbClr>
+            </a:outerShdw>
+          </a:effectLst>
+        </p:spPr>
+        <p:txBody>
+          <a:bodyPr/>
+          <a:p/>
+        </p:txBody>
+      </p:sp>
+      <p:sp>
+        <p:nvSpPr>
+          <p:cNvPr id="5" name="Shape 3"/>
+          <p:cNvSpPr/>
+          <p:nvPr/>
+        </p:nvSpPr>
+        <p:spPr>
+          <a:xfrm>
+            <a:off x="731520" y="1618488"/>
+            <a:ext cx="457200" cy="457200"/>
+          </a:xfrm>
+          <a:prstGeom prst="ellipse">
+            <a:avLst/>
+          </a:prstGeom>
+          <a:solidFill>
+            <a:srgbClr val="F3EFFB"/>
+          </a:solidFill>
+          <a:ln/>
+        </p:spPr>
+        <p:txBody>
+          <a:bodyPr/>
+          <a:p/>
+        </p:txBody>
+      </p:sp>
+      <p:sp>
+        <p:nvSpPr>
+          <p:cNvPr id="6" name="Text 4"/>
+          <p:cNvSpPr/>
+          <p:nvPr/>
+        </p:nvSpPr>
+        <p:spPr>
+          <a:xfrm>
+            <a:off x="731520" y="1618488"/>
+            <a:ext cx="457200" cy="457200"/>
+          </a:xfrm>
+          <a:prstGeom prst="rect">
+            <a:avLst/>
+          </a:prstGeom>
+          <a:noFill/>
+          <a:ln/>
+        </p:spPr>
+        <p:txBody>
+          <a:bodyPr wrap="square" lIns="0" tIns="0" rIns="0" bIns="0" rtlCol="0" anchor="ctr"/>
+          <a:lstStyle/>
+          <a:p>
+            <a:pPr algn="ctr" indent="0" marL="0">
+              <a:buNone/>
+            </a:pPr>
+            <a:r>
+              <a:rPr lang="en-US" sz="1700" b="1" dirty="0">
+                <a:solidFill>
+                  <a:srgbClr val="FFFFFF"/>
+                </a:solidFill>
+                <a:latin typeface="Calibri" pitchFamily="34" charset="0"/>
+                <a:ea typeface="Calibri" pitchFamily="34" charset="-122"/>
+                <a:cs typeface="Calibri" pitchFamily="34" charset="-120"/>
+              </a:rPr>
+              <a:t>🎯</a:t>
+            </a:r>
+            <a:endParaRPr lang="en-US" sz="1700" dirty="0"/>
+          </a:p>
+        </p:txBody>
+      </p:sp>
+      <p:sp>
+        <p:nvSpPr>
+          <p:cNvPr id="7" name="Text 5"/>
+          <p:cNvSpPr/>
+          <p:nvPr/>
+        </p:nvSpPr>
+        <p:spPr>
+          <a:xfrm>
+            <a:off x="1325880" y="1600200"/>
+            <a:ext cx="2926080" cy="365760"/>
+          </a:xfrm>
+          <a:prstGeom prst="rect">
+            <a:avLst/>
+          </a:prstGeom>
+          <a:noFill/>
+          <a:ln/>
+        </p:spPr>
+        <p:txBody>
+          <a:bodyPr wrap="square" lIns="0" tIns="0" rIns="0" bIns="0" rtlCol="0" anchor="ctr"/>
+          <a:lstStyle/>
+          <a:p>
+            <a:pPr indent="0" marL="0">
+              <a:buNone/>
+            </a:pPr>
+            <a:r>
+              <a:rPr lang="en-US" sz="1600" b="1" dirty="0">
+                <a:solidFill>
+                  <a:srgbClr val="2A1B3D"/>
+                </a:solidFill>
+                <a:latin typeface="Cambria" pitchFamily="34" charset="0"/>
+                <a:ea typeface="Cambria" pitchFamily="34" charset="-122"/>
+                <a:cs typeface="Cambria" pitchFamily="34" charset="-120"/>
+              </a:rPr>
+              <a:t>Predict</a:t>
+            </a:r>
+            <a:endParaRPr lang="en-US" sz="1600" dirty="0"/>
+          </a:p>
+        </p:txBody>
+      </p:sp>
+      <p:sp>
+        <p:nvSpPr>
+          <p:cNvPr id="8" name="Text 6"/>
+          <p:cNvSpPr/>
+          <p:nvPr/>
+        </p:nvSpPr>
+        <p:spPr>
+          <a:xfrm>
+            <a:off x="1325880" y="1965960"/>
+            <a:ext cx="2926080" cy="731520"/>
+          </a:xfrm>
+          <a:prstGeom prst="rect">
+            <a:avLst/>
+          </a:prstGeom>
+          <a:noFill/>
+          <a:ln/>
+        </p:spPr>
+        <p:txBody>
+          <a:bodyPr wrap="square" lIns="0" tIns="0" rIns="0" bIns="0" rtlCol="0" anchor="ctr"/>
+          <a:lstStyle/>
+          <a:p>
+            <a:pPr indent="0" marL="0">
+              <a:buNone/>
+            </a:pPr>
+            <a:r>
+              <a:rPr lang="en-US" sz="1080" dirty="0">
+                <a:solidFill>
+                  <a:srgbClr val="3F3F49"/>
+                </a:solidFill>
+                <a:latin typeface="Calibri" pitchFamily="34" charset="0"/>
+                <a:ea typeface="Calibri" pitchFamily="34" charset="-122"/>
+                <a:cs typeface="Calibri" pitchFamily="34" charset="-120"/>
+              </a:rPr>
+              <a:t>Edit a MY_GUESS_… line BEFORE running the cell. The notebook grades you and keeps a running score. Four of these today.</a:t>
+            </a:r>
+            <a:endParaRPr lang="en-US" sz="1080" dirty="0"/>
+          </a:p>
+        </p:txBody>
+      </p:sp>
+      <p:sp>
+        <p:nvSpPr>
+          <p:cNvPr id="9" name="Shape 7"/>
+          <p:cNvSpPr/>
+          <p:nvPr/>
+        </p:nvSpPr>
+        <p:spPr>
+          <a:xfrm>
+            <a:off x="4709160" y="1417320"/>
+            <a:ext cx="3931920" cy="1389888"/>
+          </a:xfrm>
+          <a:prstGeom prst="roundRect">
+            <a:avLst>
+              <a:gd name="adj" fmla="val 5263"/>
+            </a:avLst>
+          </a:prstGeom>
+          <a:solidFill>
+            <a:srgbClr val="FFFFFF"/>
+          </a:solidFill>
+          <a:ln w="12700">
+            <a:solidFill>
+              <a:srgbClr val="E4DCF5"/>
+            </a:solidFill>
+            <a:prstDash val="solid"/>
+          </a:ln>
+          <a:effectLst>
+            <a:outerShdw sx="100000" sy="100000" kx="0" ky="0" algn="bl" rotWithShape="0" blurRad="88900" dist="25400" dir="5400000">
+              <a:srgbClr val="3A2A55">
+                <a:alpha val="14000"/>
+              </a:srgbClr>
+            </a:outerShdw>
+          </a:effectLst>
+        </p:spPr>
+        <p:txBody>
+          <a:bodyPr/>
+          <a:p/>
+        </p:txBody>
+      </p:sp>
+      <p:sp>
+        <p:nvSpPr>
+          <p:cNvPr id="10" name="Shape 8"/>
+          <p:cNvSpPr/>
+          <p:nvPr/>
+        </p:nvSpPr>
+        <p:spPr>
+          <a:xfrm>
+            <a:off x="4937760" y="1618488"/>
+            <a:ext cx="457200" cy="457200"/>
+          </a:xfrm>
+          <a:prstGeom prst="ellipse">
+            <a:avLst/>
+          </a:prstGeom>
+          <a:solidFill>
+            <a:srgbClr val="F3EFFB"/>
+          </a:solidFill>
+          <a:ln/>
+        </p:spPr>
+        <p:txBody>
+          <a:bodyPr/>
+          <a:p/>
+        </p:txBody>
+      </p:sp>
+      <p:sp>
+        <p:nvSpPr>
+          <p:cNvPr id="11" name="Text 9"/>
+          <p:cNvSpPr/>
+          <p:nvPr/>
+        </p:nvSpPr>
+        <p:spPr>
+          <a:xfrm>
+            <a:off x="4937760" y="1618488"/>
+            <a:ext cx="457200" cy="457200"/>
+          </a:xfrm>
+          <a:prstGeom prst="rect">
+            <a:avLst/>
+          </a:prstGeom>
+          <a:noFill/>
+          <a:ln/>
+        </p:spPr>
+        <p:txBody>
+          <a:bodyPr wrap="square" lIns="0" tIns="0" rIns="0" bIns="0" rtlCol="0" anchor="ctr"/>
+          <a:lstStyle/>
+          <a:p>
+            <a:pPr algn="ctr" indent="0" marL="0">
+              <a:buNone/>
+            </a:pPr>
+            <a:r>
+              <a:rPr lang="en-US" sz="1700" b="1" dirty="0">
+                <a:solidFill>
+                  <a:srgbClr val="FFFFFF"/>
+                </a:solidFill>
+                <a:latin typeface="Calibri" pitchFamily="34" charset="0"/>
+                <a:ea typeface="Calibri" pitchFamily="34" charset="-122"/>
+                <a:cs typeface="Calibri" pitchFamily="34" charset="-120"/>
+              </a:rPr>
+              <a:t>🧪</a:t>
+            </a:r>
+            <a:endParaRPr lang="en-US" sz="1700" dirty="0"/>
+          </a:p>
+        </p:txBody>
+      </p:sp>
+      <p:sp>
+        <p:nvSpPr>
+          <p:cNvPr id="12" name="Text 10"/>
+          <p:cNvSpPr/>
+          <p:nvPr/>
+        </p:nvSpPr>
+        <p:spPr>
+          <a:xfrm>
+            <a:off x="5532120" y="1600200"/>
+            <a:ext cx="2926080" cy="365760"/>
+          </a:xfrm>
+          <a:prstGeom prst="rect">
+            <a:avLst/>
+          </a:prstGeom>
+          <a:noFill/>
+          <a:ln/>
+        </p:spPr>
+        <p:txBody>
+          <a:bodyPr wrap="square" lIns="0" tIns="0" rIns="0" bIns="0" rtlCol="0" anchor="ctr"/>
+          <a:lstStyle/>
+          <a:p>
+            <a:pPr indent="0" marL="0">
+              <a:buNone/>
+            </a:pPr>
+            <a:r>
+              <a:rPr lang="en-US" sz="1600" b="1" dirty="0">
+                <a:solidFill>
+                  <a:srgbClr val="2A1B3D"/>
+                </a:solidFill>
+                <a:latin typeface="Cambria" pitchFamily="34" charset="0"/>
+                <a:ea typeface="Cambria" pitchFamily="34" charset="-122"/>
+                <a:cs typeface="Cambria" pitchFamily="34" charset="-120"/>
+              </a:rPr>
+              <a:t>Try it</a:t>
+            </a:r>
+            <a:endParaRPr lang="en-US" sz="1600" dirty="0"/>
+          </a:p>
+        </p:txBody>
+      </p:sp>
+      <p:sp>
+        <p:nvSpPr>
+          <p:cNvPr id="13" name="Text 11"/>
+          <p:cNvSpPr/>
+          <p:nvPr/>
+        </p:nvSpPr>
+        <p:spPr>
+          <a:xfrm>
+            <a:off x="5532120" y="1965960"/>
+            <a:ext cx="2926080" cy="731520"/>
+          </a:xfrm>
+          <a:prstGeom prst="rect">
+            <a:avLst/>
+          </a:prstGeom>
+          <a:noFill/>
+          <a:ln/>
+        </p:spPr>
+        <p:txBody>
+          <a:bodyPr wrap="square" lIns="0" tIns="0" rIns="0" bIns="0" rtlCol="0" anchor="ctr"/>
+          <a:lstStyle/>
+          <a:p>
+            <a:pPr indent="0" marL="0">
+              <a:buNone/>
+            </a:pPr>
+            <a:r>
+              <a:rPr lang="en-US" sz="1080" dirty="0">
+                <a:solidFill>
+                  <a:srgbClr val="3F3F49"/>
+                </a:solidFill>
+                <a:latin typeface="Calibri" pitchFamily="34" charset="0"/>
+                <a:ea typeface="Calibri" pitchFamily="34" charset="-122"/>
+                <a:cs typeface="Calibri" pitchFamily="34" charset="-120"/>
+              </a:rPr>
+              <a:t>Change one thing, re-run, watch what breaks. The fastest way to find out which line was load-bearing.</a:t>
+            </a:r>
+            <a:endParaRPr lang="en-US" sz="1080" dirty="0"/>
+          </a:p>
+        </p:txBody>
+      </p:sp>
+      <p:sp>
+        <p:nvSpPr>
+          <p:cNvPr id="14" name="Shape 12"/>
+          <p:cNvSpPr/>
+          <p:nvPr/>
+        </p:nvSpPr>
+        <p:spPr>
+          <a:xfrm>
+            <a:off x="502920" y="2990088"/>
+            <a:ext cx="3931920" cy="1389888"/>
+          </a:xfrm>
+          <a:prstGeom prst="roundRect">
+            <a:avLst>
+              <a:gd name="adj" fmla="val 5263"/>
+            </a:avLst>
+          </a:prstGeom>
+          <a:solidFill>
+            <a:srgbClr val="FFFFFF"/>
+          </a:solidFill>
+          <a:ln w="12700">
+            <a:solidFill>
+              <a:srgbClr val="E4DCF5"/>
+            </a:solidFill>
+            <a:prstDash val="solid"/>
+          </a:ln>
+          <a:effectLst>
+            <a:outerShdw sx="100000" sy="100000" kx="0" ky="0" algn="bl" rotWithShape="0" blurRad="88900" dist="25400" dir="5400000">
+              <a:srgbClr val="3A2A55">
+                <a:alpha val="14000"/>
+              </a:srgbClr>
+            </a:outerShdw>
+          </a:effectLst>
+        </p:spPr>
+        <p:txBody>
+          <a:bodyPr/>
+          <a:p/>
+        </p:txBody>
+      </p:sp>
+      <p:sp>
+        <p:nvSpPr>
+          <p:cNvPr id="15" name="Shape 13"/>
+          <p:cNvSpPr/>
+          <p:nvPr/>
+        </p:nvSpPr>
+        <p:spPr>
+          <a:xfrm>
+            <a:off x="731520" y="3191256"/>
+            <a:ext cx="457200" cy="457200"/>
+          </a:xfrm>
+          <a:prstGeom prst="ellipse">
+            <a:avLst/>
+          </a:prstGeom>
+          <a:solidFill>
+            <a:srgbClr val="F3EFFB"/>
+          </a:solidFill>
+          <a:ln/>
+        </p:spPr>
+        <p:txBody>
+          <a:bodyPr/>
+          <a:p/>
+        </p:txBody>
+      </p:sp>
+      <p:sp>
+        <p:nvSpPr>
+          <p:cNvPr id="16" name="Text 14"/>
+          <p:cNvSpPr/>
+          <p:nvPr/>
+        </p:nvSpPr>
+        <p:spPr>
+          <a:xfrm>
+            <a:off x="731520" y="3191256"/>
+            <a:ext cx="457200" cy="457200"/>
+          </a:xfrm>
+          <a:prstGeom prst="rect">
+            <a:avLst/>
+          </a:prstGeom>
+          <a:noFill/>
+          <a:ln/>
+        </p:spPr>
+        <p:txBody>
+          <a:bodyPr wrap="square" lIns="0" tIns="0" rIns="0" bIns="0" rtlCol="0" anchor="ctr"/>
+          <a:lstStyle/>
+          <a:p>
+            <a:pPr algn="ctr" indent="0" marL="0">
+              <a:buNone/>
+            </a:pPr>
+            <a:r>
+              <a:rPr lang="en-US" sz="1700" b="1" dirty="0">
+                <a:solidFill>
+                  <a:srgbClr val="FFFFFF"/>
+                </a:solidFill>
+                <a:latin typeface="Calibri" pitchFamily="34" charset="0"/>
+                <a:ea typeface="Calibri" pitchFamily="34" charset="-122"/>
+                <a:cs typeface="Calibri" pitchFamily="34" charset="-120"/>
+              </a:rPr>
+              <a:t>💬</a:t>
+            </a:r>
+            <a:endParaRPr lang="en-US" sz="1700" dirty="0"/>
+          </a:p>
+        </p:txBody>
+      </p:sp>
+      <p:sp>
+        <p:nvSpPr>
+          <p:cNvPr id="17" name="Text 15"/>
+          <p:cNvSpPr/>
+          <p:nvPr/>
+        </p:nvSpPr>
+        <p:spPr>
+          <a:xfrm>
+            <a:off x="1325880" y="3172968"/>
+            <a:ext cx="2926080" cy="365760"/>
+          </a:xfrm>
+          <a:prstGeom prst="rect">
+            <a:avLst/>
+          </a:prstGeom>
+          <a:noFill/>
+          <a:ln/>
+        </p:spPr>
+        <p:txBody>
+          <a:bodyPr wrap="square" lIns="0" tIns="0" rIns="0" bIns="0" rtlCol="0" anchor="ctr"/>
+          <a:lstStyle/>
+          <a:p>
+            <a:pPr indent="0" marL="0">
+              <a:buNone/>
+            </a:pPr>
+            <a:r>
+              <a:rPr lang="en-US" sz="1600" b="1" dirty="0">
+                <a:solidFill>
+                  <a:srgbClr val="2A1B3D"/>
+                </a:solidFill>
+                <a:latin typeface="Cambria" pitchFamily="34" charset="0"/>
+                <a:ea typeface="Cambria" pitchFamily="34" charset="-122"/>
+                <a:cs typeface="Cambria" pitchFamily="34" charset="-120"/>
+              </a:rPr>
+              <a:t>Discuss</a:t>
+            </a:r>
+            <a:endParaRPr lang="en-US" sz="1600" dirty="0"/>
+          </a:p>
+        </p:txBody>
+      </p:sp>
+      <p:sp>
+        <p:nvSpPr>
+          <p:cNvPr id="18" name="Text 16"/>
+          <p:cNvSpPr/>
+          <p:nvPr/>
+        </p:nvSpPr>
+        <p:spPr>
+          <a:xfrm>
+            <a:off x="1325880" y="3538728"/>
+            <a:ext cx="2926080" cy="731520"/>
+          </a:xfrm>
+          <a:prstGeom prst="rect">
+            <a:avLst/>
+          </a:prstGeom>
+          <a:noFill/>
+          <a:ln/>
+        </p:spPr>
+        <p:txBody>
+          <a:bodyPr wrap="square" lIns="0" tIns="0" rIns="0" bIns="0" rtlCol="0" anchor="ctr"/>
+          <a:lstStyle/>
+          <a:p>
+            <a:pPr indent="0" marL="0">
+              <a:buNone/>
+            </a:pPr>
+            <a:r>
+              <a:rPr lang="en-US" sz="1080" dirty="0">
+                <a:solidFill>
+                  <a:srgbClr val="3F3F49"/>
+                </a:solidFill>
+                <a:latin typeface="Calibri" pitchFamily="34" charset="0"/>
+                <a:ea typeface="Calibri" pitchFamily="34" charset="-122"/>
+                <a:cs typeface="Calibri" pitchFamily="34" charset="-120"/>
+              </a:rPr>
+              <a:t>Turn to your neighbour for 1–2 minutes. No single right answer — that is why we stop to ask.</a:t>
+            </a:r>
+            <a:endParaRPr lang="en-US" sz="1080" dirty="0"/>
+          </a:p>
+        </p:txBody>
+      </p:sp>
+      <p:sp>
+        <p:nvSpPr>
+          <p:cNvPr id="19" name="Shape 17"/>
+          <p:cNvSpPr/>
+          <p:nvPr/>
+        </p:nvSpPr>
+        <p:spPr>
+          <a:xfrm>
+            <a:off x="4709160" y="2990088"/>
+            <a:ext cx="3931920" cy="1389888"/>
+          </a:xfrm>
+          <a:prstGeom prst="roundRect">
+            <a:avLst>
+              <a:gd name="adj" fmla="val 5263"/>
+            </a:avLst>
+          </a:prstGeom>
+          <a:solidFill>
+            <a:srgbClr val="FFFFFF"/>
+          </a:solidFill>
+          <a:ln w="12700">
+            <a:solidFill>
+              <a:srgbClr val="E4DCF5"/>
+            </a:solidFill>
+            <a:prstDash val="solid"/>
+          </a:ln>
+          <a:effectLst>
+            <a:outerShdw sx="100000" sy="100000" kx="0" ky="0" algn="bl" rotWithShape="0" blurRad="88900" dist="25400" dir="5400000">
+              <a:srgbClr val="3A2A55">
+                <a:alpha val="14000"/>
+              </a:srgbClr>
+            </a:outerShdw>
+          </a:effectLst>
+        </p:spPr>
+        <p:txBody>
+          <a:bodyPr/>
+          <a:p/>
+        </p:txBody>
+      </p:sp>
+      <p:sp>
+        <p:nvSpPr>
+          <p:cNvPr id="20" name="Shape 18"/>
+          <p:cNvSpPr/>
+          <p:nvPr/>
+        </p:nvSpPr>
+        <p:spPr>
+          <a:xfrm>
+            <a:off x="4937760" y="3191256"/>
+            <a:ext cx="457200" cy="457200"/>
+          </a:xfrm>
+          <a:prstGeom prst="ellipse">
+            <a:avLst/>
+          </a:prstGeom>
+          <a:solidFill>
+            <a:srgbClr val="F3EFFB"/>
+          </a:solidFill>
+          <a:ln/>
+        </p:spPr>
+        <p:txBody>
+          <a:bodyPr/>
+          <a:p/>
+        </p:txBody>
+      </p:sp>
+      <p:sp>
+        <p:nvSpPr>
+          <p:cNvPr id="21" name="Text 19"/>
+          <p:cNvSpPr/>
+          <p:nvPr/>
+        </p:nvSpPr>
+        <p:spPr>
+          <a:xfrm>
+            <a:off x="4937760" y="3191256"/>
+            <a:ext cx="457200" cy="457200"/>
+          </a:xfrm>
+          <a:prstGeom prst="rect">
+            <a:avLst/>
+          </a:prstGeom>
+          <a:noFill/>
+          <a:ln/>
+        </p:spPr>
+        <p:txBody>
+          <a:bodyPr wrap="square" lIns="0" tIns="0" rIns="0" bIns="0" rtlCol="0" anchor="ctr"/>
+          <a:lstStyle/>
+          <a:p>
+            <a:pPr algn="ctr" indent="0" marL="0">
+              <a:buNone/>
+            </a:pPr>
+            <a:r>
+              <a:rPr lang="en-US" sz="1700" b="1" dirty="0">
+                <a:solidFill>
+                  <a:srgbClr val="FFFFFF"/>
+                </a:solidFill>
+                <a:latin typeface="Calibri" pitchFamily="34" charset="0"/>
+                <a:ea typeface="Calibri" pitchFamily="34" charset="-122"/>
+                <a:cs typeface="Calibri" pitchFamily="34" charset="-120"/>
+              </a:rPr>
+              <a:t>⏱</a:t>
+            </a:r>
+            <a:endParaRPr lang="en-US" sz="1700" dirty="0"/>
+          </a:p>
+        </p:txBody>
+      </p:sp>
+      <p:sp>
+        <p:nvSpPr>
+          <p:cNvPr id="22" name="Text 20"/>
+          <p:cNvSpPr/>
+          <p:nvPr/>
+        </p:nvSpPr>
+        <p:spPr>
+          <a:xfrm>
+            <a:off x="5532120" y="3172968"/>
+            <a:ext cx="2926080" cy="365760"/>
+          </a:xfrm>
+          <a:prstGeom prst="rect">
+            <a:avLst/>
+          </a:prstGeom>
+          <a:noFill/>
+          <a:ln/>
+        </p:spPr>
+        <p:txBody>
+          <a:bodyPr wrap="square" lIns="0" tIns="0" rIns="0" bIns="0" rtlCol="0" anchor="ctr"/>
+          <a:lstStyle/>
+          <a:p>
+            <a:pPr indent="0" marL="0">
+              <a:buNone/>
+            </a:pPr>
+            <a:r>
+              <a:rPr lang="en-US" sz="1600" b="1" dirty="0">
+                <a:solidFill>
+                  <a:srgbClr val="2A1B3D"/>
+                </a:solidFill>
+                <a:latin typeface="Cambria" pitchFamily="34" charset="0"/>
+                <a:ea typeface="Cambria" pitchFamily="34" charset="-122"/>
+                <a:cs typeface="Cambria" pitchFamily="34" charset="-120"/>
+              </a:rPr>
+              <a:t>Pit stop</a:t>
+            </a:r>
+            <a:endParaRPr lang="en-US" sz="1600" dirty="0"/>
+          </a:p>
+        </p:txBody>
+      </p:sp>
+      <p:sp>
+        <p:nvSpPr>
+          <p:cNvPr id="23" name="Text 21"/>
+          <p:cNvSpPr/>
+          <p:nvPr/>
+        </p:nvSpPr>
+        <p:spPr>
+          <a:xfrm>
+            <a:off x="5532120" y="3538728"/>
+            <a:ext cx="2926080" cy="731520"/>
+          </a:xfrm>
+          <a:prstGeom prst="rect">
+            <a:avLst/>
+          </a:prstGeom>
+          <a:noFill/>
+          <a:ln/>
+        </p:spPr>
+        <p:txBody>
+          <a:bodyPr wrap="square" lIns="0" tIns="0" rIns="0" bIns="0" rtlCol="0" anchor="ctr"/>
+          <a:lstStyle/>
+          <a:p>
+            <a:pPr indent="0" marL="0">
+              <a:buNone/>
+            </a:pPr>
+            <a:r>
+              <a:rPr lang="en-US" sz="1080" dirty="0">
+                <a:solidFill>
+                  <a:srgbClr val="3F3F49"/>
+                </a:solidFill>
+                <a:latin typeface="Calibri" pitchFamily="34" charset="0"/>
+                <a:ea typeface="Calibri" pitchFamily="34" charset="-122"/>
+                <a:cs typeface="Calibri" pitchFamily="34" charset="-120"/>
+              </a:rPr>
+              <a:t>pit_stop("Part 2") prints elapsed vs budgeted time and tells you whether to do the exercise or skip it.</a:t>
+            </a:r>
+            <a:endParaRPr lang="en-US" sz="1080" dirty="0"/>
+          </a:p>
+        </p:txBody>
+      </p:sp>
+      <p:sp>
+        <p:nvSpPr>
+          <p:cNvPr id="24" name="Text 22"/>
+          <p:cNvSpPr/>
+          <p:nvPr/>
+        </p:nvSpPr>
+        <p:spPr>
+          <a:xfrm>
+            <a:off x="502920" y="4617720"/>
+            <a:ext cx="8138160" cy="457200"/>
+          </a:xfrm>
+          <a:prstGeom prst="rect">
+            <a:avLst/>
+          </a:prstGeom>
+          <a:noFill/>
+          <a:ln/>
+        </p:spPr>
+        <p:txBody>
+          <a:bodyPr wrap="square" lIns="0" tIns="0" rIns="0" bIns="0" rtlCol="0" anchor="ctr"/>
+          <a:lstStyle/>
+          <a:p>
+            <a:pPr algn="ctr" indent="0" marL="0">
+              <a:buNone/>
+            </a:pPr>
+            <a:r>
+              <a:rPr lang="en-US" sz="1250" i="1" dirty="0">
+                <a:solidFill>
+                  <a:srgbClr val="6B6B76"/>
+                </a:solidFill>
+                <a:latin typeface="Calibri" pitchFamily="34" charset="0"/>
+                <a:ea typeface="Calibri" pitchFamily="34" charset="-122"/>
+                <a:cs typeface="Calibri" pitchFamily="34" charset="-120"/>
+              </a:rPr>
+              <a:t>✍️ Exercises have click-to-reveal solutions, and every Part ends with a save-and-self-check cell — fall behind, skip the exercise, and you can still start the next Part.</a:t>
+            </a:r>
+            <a:endParaRPr lang="en-US" sz="1250" dirty="0"/>
+          </a:p>
+        </p:txBody>
+      </p:sp>
+    </p:spTree>
+  </p:cSld>
+  <p:clrMapOvr>
+    <a:masterClrMapping/>
+  </p:clrMapOvr>
+</p:sld>
+</file>
+
+<file path=ppt/slides/slide5.xml><?xml version="1.0" encoding="utf-8"?>
 <p:sld xmlns:a="http://schemas.openxmlformats.org/drawingml/2006/main" xmlns:r="http://schemas.openxmlformats.org/officeDocument/2006/relationships" xmlns:p="http://schemas.openxmlformats.org/presentationml/2006/main">
   <p:cSld name="Slide 3">
     <p:bg>
@@ -11848,7 +14202,7 @@
 </p:sld>
 </file>
 
-<file path=ppt/slides/slide4.xml><?xml version="1.0" encoding="utf-8"?>
+<file path=ppt/slides/slide6.xml><?xml version="1.0" encoding="utf-8"?>
 <p:sld xmlns:a="http://schemas.openxmlformats.org/drawingml/2006/main" xmlns:r="http://schemas.openxmlformats.org/officeDocument/2006/relationships" xmlns:p="http://schemas.openxmlformats.org/presentationml/2006/main">
   <p:cSld name="Slide 4">
     <p:bg>
@@ -12293,7 +14647,7 @@
 </p:sld>
 </file>
 
-<file path=ppt/slides/slide5.xml><?xml version="1.0" encoding="utf-8"?>
+<file path=ppt/slides/slide7.xml><?xml version="1.0" encoding="utf-8"?>
 <p:sld xmlns:a="http://schemas.openxmlformats.org/drawingml/2006/main" xmlns:r="http://schemas.openxmlformats.org/officeDocument/2006/relationships" xmlns:p="http://schemas.openxmlformats.org/presentationml/2006/main">
   <p:cSld name="Slide 5">
     <p:bg>
@@ -13310,7 +15664,7 @@
 </p:sld>
 </file>
 
-<file path=ppt/slides/slide6.xml><?xml version="1.0" encoding="utf-8"?>
+<file path=ppt/slides/slide8.xml><?xml version="1.0" encoding="utf-8"?>
 <p:sld xmlns:a="http://schemas.openxmlformats.org/drawingml/2006/main" xmlns:r="http://schemas.openxmlformats.org/officeDocument/2006/relationships" xmlns:p="http://schemas.openxmlformats.org/presentationml/2006/main">
   <p:cSld name="Slide 6">
     <p:bg>
@@ -14143,7 +16497,7 @@
 </p:sld>
 </file>
 
-<file path=ppt/slides/slide7.xml><?xml version="1.0" encoding="utf-8"?>
+<file path=ppt/slides/slide9.xml><?xml version="1.0" encoding="utf-8"?>
 <p:sld xmlns:a="http://schemas.openxmlformats.org/drawingml/2006/main" xmlns:r="http://schemas.openxmlformats.org/officeDocument/2006/relationships" xmlns:p="http://schemas.openxmlformats.org/presentationml/2006/main">
   <p:cSld name="Slide 7">
     <p:bg>
@@ -14679,1374 +17033,6 @@
               <a:t>This split is what makes an agent auditable: every claim traces back to a tool that measured it.</a:t>
             </a:r>
             <a:endParaRPr lang="en-US" sz="1400" dirty="0"/>
-          </a:p>
-        </p:txBody>
-      </p:sp>
-    </p:spTree>
-  </p:cSld>
-  <p:clrMapOvr>
-    <a:masterClrMapping/>
-  </p:clrMapOvr>
-</p:sld>
-</file>
-
-<file path=ppt/slides/slide8.xml><?xml version="1.0" encoding="utf-8"?>
-<p:sld xmlns:a="http://schemas.openxmlformats.org/drawingml/2006/main" xmlns:r="http://schemas.openxmlformats.org/officeDocument/2006/relationships" xmlns:p="http://schemas.openxmlformats.org/presentationml/2006/main">
-  <p:cSld name="Slide 8">
-    <p:bg>
-      <p:bgPr>
-        <a:solidFill>
-          <a:srgbClr val="2A1B3D"/>
-        </a:solidFill>
-      </p:bgPr>
-    </p:bg>
-    <p:spTree>
-      <p:nvGrpSpPr>
-        <p:cNvPr id="1" name=""/>
-        <p:cNvGrpSpPr/>
-        <p:nvPr/>
-      </p:nvGrpSpPr>
-      <p:grpSpPr>
-        <a:xfrm>
-          <a:off x="0" y="0"/>
-          <a:ext cx="0" cy="0"/>
-          <a:chOff x="0" y="0"/>
-          <a:chExt cx="0" cy="0"/>
-        </a:xfrm>
-      </p:grpSpPr>
-      <p:sp>
-        <p:nvSpPr>
-          <p:cNvPr id="2" name="Text 0"/>
-          <p:cNvSpPr/>
-          <p:nvPr/>
-        </p:nvSpPr>
-        <p:spPr>
-          <a:xfrm>
-            <a:off x="548640" y="685800"/>
-            <a:ext cx="914400" cy="731520"/>
-          </a:xfrm>
-          <a:prstGeom prst="rect">
-            <a:avLst/>
-          </a:prstGeom>
-          <a:noFill/>
-          <a:ln/>
-        </p:spPr>
-        <p:txBody>
-          <a:bodyPr wrap="square" lIns="0" tIns="0" rIns="0" bIns="0" rtlCol="0" anchor="ctr"/>
-          <a:lstStyle/>
-          <a:p>
-            <a:pPr indent="0" marL="0">
-              <a:buNone/>
-            </a:pPr>
-            <a:r>
-              <a:rPr lang="en-US" sz="4000" dirty="0">
-                <a:solidFill>
-                  <a:srgbClr val="000000"/>
-                </a:solidFill>
-              </a:rPr>
-              <a:t>⌨️</a:t>
-            </a:r>
-            <a:endParaRPr lang="en-US" sz="4000" dirty="0"/>
-          </a:p>
-        </p:txBody>
-      </p:sp>
-      <p:sp>
-        <p:nvSpPr>
-          <p:cNvPr id="3" name="Text 1"/>
-          <p:cNvSpPr/>
-          <p:nvPr/>
-        </p:nvSpPr>
-        <p:spPr>
-          <a:xfrm>
-            <a:off x="548640" y="1463040"/>
-            <a:ext cx="8046720" cy="320040"/>
-          </a:xfrm>
-          <a:prstGeom prst="rect">
-            <a:avLst/>
-          </a:prstGeom>
-          <a:noFill/>
-          <a:ln/>
-        </p:spPr>
-        <p:txBody>
-          <a:bodyPr wrap="square" lIns="0" tIns="0" rIns="0" bIns="0" rtlCol="0" anchor="ctr"/>
-          <a:lstStyle/>
-          <a:p>
-            <a:pPr indent="0" marL="0">
-              <a:buNone/>
-            </a:pPr>
-            <a:r>
-              <a:rPr lang="en-US" sz="1300" spc="300" kern="0" dirty="0">
-                <a:solidFill>
-                  <a:srgbClr val="A78BFA"/>
-                </a:solidFill>
-                <a:latin typeface="Courier New" pitchFamily="34" charset="0"/>
-                <a:ea typeface="Courier New" pitchFamily="34" charset="-122"/>
-                <a:cs typeface="Courier New" pitchFamily="34" charset="-120"/>
-              </a:rPr>
-              <a:t>HANDS-ON · PART 1</a:t>
-            </a:r>
-            <a:endParaRPr lang="en-US" sz="1300" dirty="0"/>
-          </a:p>
-        </p:txBody>
-      </p:sp>
-      <p:sp>
-        <p:nvSpPr>
-          <p:cNvPr id="4" name="Text 2"/>
-          <p:cNvSpPr/>
-          <p:nvPr/>
-        </p:nvSpPr>
-        <p:spPr>
-          <a:xfrm>
-            <a:off x="548640" y="1828800"/>
-            <a:ext cx="8046720" cy="777240"/>
-          </a:xfrm>
-          <a:prstGeom prst="rect">
-            <a:avLst/>
-          </a:prstGeom>
-          <a:noFill/>
-          <a:ln/>
-        </p:spPr>
-        <p:txBody>
-          <a:bodyPr wrap="square" lIns="0" tIns="0" rIns="0" bIns="0" rtlCol="0" anchor="ctr"/>
-          <a:lstStyle/>
-          <a:p>
-            <a:pPr indent="0" marL="0">
-              <a:buNone/>
-            </a:pPr>
-            <a:r>
-              <a:rPr lang="en-US" sz="3600" b="1" dirty="0">
-                <a:solidFill>
-                  <a:srgbClr val="FFFFFF"/>
-                </a:solidFill>
-                <a:latin typeface="Cambria" pitchFamily="34" charset="0"/>
-                <a:ea typeface="Cambria" pitchFamily="34" charset="-122"/>
-                <a:cs typeface="Cambria" pitchFamily="34" charset="-120"/>
-              </a:rPr>
-              <a:t>Build the Code Auditor</a:t>
-            </a:r>
-            <a:endParaRPr lang="en-US" sz="3600" dirty="0"/>
-          </a:p>
-        </p:txBody>
-      </p:sp>
-      <p:sp>
-        <p:nvSpPr>
-          <p:cNvPr id="5" name="Text 3"/>
-          <p:cNvSpPr/>
-          <p:nvPr/>
-        </p:nvSpPr>
-        <p:spPr>
-          <a:xfrm>
-            <a:off x="594360" y="2697480"/>
-            <a:ext cx="6949440" cy="1463040"/>
-          </a:xfrm>
-          <a:prstGeom prst="rect">
-            <a:avLst/>
-          </a:prstGeom>
-          <a:noFill/>
-          <a:ln/>
-        </p:spPr>
-        <p:txBody>
-          <a:bodyPr wrap="square" lIns="0" tIns="0" rIns="0" bIns="0" rtlCol="0" anchor="ctr"/>
-          <a:lstStyle/>
-          <a:p>
-            <a:pPr marL="342900" indent="-342900">
-              <a:lnSpc>
-                <a:spcPts val="2600"/>
-              </a:lnSpc>
-              <a:buSzPct val="100000"/>
-              <a:buChar char="→"/>
-            </a:pPr>
-            <a:r>
-              <a:rPr lang="en-US" sz="1550" dirty="0">
-                <a:solidFill>
-                  <a:srgbClr val="E4DAF6"/>
-                </a:solidFill>
-                <a:latin typeface="Calibri" pitchFamily="34" charset="0"/>
-                <a:ea typeface="Calibri" pitchFamily="34" charset="-122"/>
-                <a:cs typeface="Calibri" pitchFamily="34" charset="-120"/>
-              </a:rPr>
-              <a:t>Meet the patient: a working-but-smelly inventory module (+ its test safety-net)</a:t>
-            </a:r>
-            <a:endParaRPr lang="en-US" sz="1550" dirty="0"/>
-          </a:p>
-          <a:p>
-            <a:pPr marL="342900" indent="-342900">
-              <a:lnSpc>
-                <a:spcPts val="2600"/>
-              </a:lnSpc>
-              <a:buSzPct val="100000"/>
-              <a:buChar char="→"/>
-            </a:pPr>
-            <a:r>
-              <a:rPr lang="en-US" sz="1550" dirty="0">
-                <a:solidFill>
-                  <a:srgbClr val="E4DAF6"/>
-                </a:solidFill>
-                <a:latin typeface="Calibri" pitchFamily="34" charset="0"/>
-                <a:ea typeface="Calibri" pitchFamily="34" charset="-122"/>
-                <a:cs typeface="Calibri" pitchFamily="34" charset="-120"/>
-              </a:rPr>
-              <a:t>Wrap radon, pylint, PyExamine &amp; MLScent as agent tools</a:t>
-            </a:r>
-            <a:endParaRPr lang="en-US" sz="1550" dirty="0"/>
-          </a:p>
-          <a:p>
-            <a:pPr marL="342900" indent="-342900">
-              <a:lnSpc>
-                <a:spcPts val="2600"/>
-              </a:lnSpc>
-              <a:buSzPct val="100000"/>
-              <a:buChar char="→"/>
-            </a:pPr>
-            <a:r>
-              <a:rPr lang="en-US" sz="1550" dirty="0">
-                <a:solidFill>
-                  <a:srgbClr val="E4DAF6"/>
-                </a:solidFill>
-                <a:latin typeface="Calibri" pitchFamily="34" charset="0"/>
-                <a:ea typeface="Calibri" pitchFamily="34" charset="-122"/>
-                <a:cs typeface="Calibri" pitchFamily="34" charset="-120"/>
-              </a:rPr>
-              <a:t>One llm() helper, the Agent class, and your first structured JSON audit</a:t>
-            </a:r>
-            <a:endParaRPr lang="en-US" sz="1550" dirty="0"/>
-          </a:p>
-          <a:p>
-            <a:pPr marL="342900" indent="-342900">
-              <a:lnSpc>
-                <a:spcPts val="2600"/>
-              </a:lnSpc>
-              <a:buSzPct val="100000"/>
-              <a:buChar char="→"/>
-            </a:pPr>
-            <a:r>
-              <a:rPr lang="en-US" sz="1550" dirty="0">
-                <a:solidFill>
-                  <a:srgbClr val="E4DAF6"/>
-                </a:solidFill>
-                <a:latin typeface="Calibri" pitchFamily="34" charset="0"/>
-                <a:ea typeface="Calibri" pitchFamily="34" charset="-122"/>
-                <a:cs typeface="Calibri" pitchFamily="34" charset="-120"/>
-              </a:rPr>
-              <a:t>Same skeleton, new eyes: an ML Auditor that catches == np.nan &amp; missing zero_grad()</a:t>
-            </a:r>
-            <a:endParaRPr lang="en-US" sz="1550" dirty="0"/>
-          </a:p>
-          <a:p>
-            <a:pPr marL="342900" indent="-342900">
-              <a:lnSpc>
-                <a:spcPts val="2600"/>
-              </a:lnSpc>
-              <a:buSzPct val="100000"/>
-              <a:buChar char="→"/>
-            </a:pPr>
-            <a:r>
-              <a:rPr lang="en-US" sz="1550" dirty="0">
-                <a:solidFill>
-                  <a:srgbClr val="E4DAF6"/>
-                </a:solidFill>
-                <a:latin typeface="Calibri" pitchFamily="34" charset="0"/>
-                <a:ea typeface="Calibri" pitchFamily="34" charset="-122"/>
-                <a:cs typeface="Calibri" pitchFamily="34" charset="-120"/>
-              </a:rPr>
-              <a:t>Exercise 1: give the auditor a magic-number AST detector</a:t>
-            </a:r>
-            <a:endParaRPr lang="en-US" sz="1550" dirty="0"/>
-          </a:p>
-        </p:txBody>
-      </p:sp>
-      <p:sp>
-        <p:nvSpPr>
-          <p:cNvPr id="6" name="Shape 4"/>
-          <p:cNvSpPr/>
-          <p:nvPr/>
-        </p:nvSpPr>
-        <p:spPr>
-          <a:xfrm>
-            <a:off x="548640" y="4434840"/>
-            <a:ext cx="1554480" cy="310896"/>
-          </a:xfrm>
-          <a:prstGeom prst="roundRect">
-            <a:avLst>
-              <a:gd name="adj" fmla="val 50000"/>
-            </a:avLst>
-          </a:prstGeom>
-          <a:solidFill>
-            <a:srgbClr val="3D2A5C"/>
-          </a:solidFill>
-          <a:ln w="12700">
-            <a:solidFill>
-              <a:srgbClr val="6D28D9"/>
-            </a:solidFill>
-            <a:prstDash val="solid"/>
-          </a:ln>
-        </p:spPr>
-      </p:sp>
-      <p:sp>
-        <p:nvSpPr>
-          <p:cNvPr id="7" name="Text 5"/>
-          <p:cNvSpPr/>
-          <p:nvPr/>
-        </p:nvSpPr>
-        <p:spPr>
-          <a:xfrm>
-            <a:off x="548640" y="4434840"/>
-            <a:ext cx="1554480" cy="310896"/>
-          </a:xfrm>
-          <a:prstGeom prst="rect">
-            <a:avLst/>
-          </a:prstGeom>
-          <a:noFill/>
-          <a:ln/>
-        </p:spPr>
-        <p:txBody>
-          <a:bodyPr wrap="square" lIns="0" tIns="0" rIns="0" bIns="0" rtlCol="0" anchor="ctr"/>
-          <a:lstStyle/>
-          <a:p>
-            <a:pPr algn="ctr" indent="0" marL="0">
-              <a:buNone/>
-            </a:pPr>
-            <a:r>
-              <a:rPr lang="en-US" sz="1050" b="1" dirty="0">
-                <a:solidFill>
-                  <a:srgbClr val="E9DFFF"/>
-                </a:solidFill>
-                <a:latin typeface="Courier New" pitchFamily="34" charset="0"/>
-                <a:ea typeface="Courier New" pitchFamily="34" charset="-122"/>
-                <a:cs typeface="Courier New" pitchFamily="34" charset="-120"/>
-              </a:rPr>
-              <a:t>~50 MINUTES</a:t>
-            </a:r>
-            <a:endParaRPr lang="en-US" sz="1050" dirty="0"/>
-          </a:p>
-        </p:txBody>
-      </p:sp>
-      <p:sp>
-        <p:nvSpPr>
-          <p:cNvPr id="8" name="Shape 6"/>
-          <p:cNvSpPr/>
-          <p:nvPr/>
-        </p:nvSpPr>
-        <p:spPr>
-          <a:xfrm>
-            <a:off x="2240280" y="4434840"/>
-            <a:ext cx="3749040" cy="310896"/>
-          </a:xfrm>
-          <a:prstGeom prst="roundRect">
-            <a:avLst>
-              <a:gd name="adj" fmla="val 50000"/>
-            </a:avLst>
-          </a:prstGeom>
-          <a:solidFill>
-            <a:srgbClr val="3D2A5C"/>
-          </a:solidFill>
-          <a:ln w="12700">
-            <a:solidFill>
-              <a:srgbClr val="6D28D9"/>
-            </a:solidFill>
-            <a:prstDash val="solid"/>
-          </a:ln>
-        </p:spPr>
-      </p:sp>
-      <p:sp>
-        <p:nvSpPr>
-          <p:cNvPr id="9" name="Text 7"/>
-          <p:cNvSpPr/>
-          <p:nvPr/>
-        </p:nvSpPr>
-        <p:spPr>
-          <a:xfrm>
-            <a:off x="2240280" y="4434840"/>
-            <a:ext cx="3749040" cy="310896"/>
-          </a:xfrm>
-          <a:prstGeom prst="rect">
-            <a:avLst/>
-          </a:prstGeom>
-          <a:noFill/>
-          <a:ln/>
-        </p:spPr>
-        <p:txBody>
-          <a:bodyPr wrap="square" lIns="0" tIns="0" rIns="0" bIns="0" rtlCol="0" anchor="ctr"/>
-          <a:lstStyle/>
-          <a:p>
-            <a:pPr algn="ctr" indent="0" marL="0">
-              <a:buNone/>
-            </a:pPr>
-            <a:r>
-              <a:rPr lang="en-US" sz="1050" dirty="0">
-                <a:solidFill>
-                  <a:srgbClr val="E9DFFF"/>
-                </a:solidFill>
-                <a:latin typeface="Courier New" pitchFamily="34" charset="0"/>
-                <a:ea typeface="Courier New" pitchFamily="34" charset="-122"/>
-                <a:cs typeface="Courier New" pitchFamily="34" charset="-120"/>
-              </a:rPr>
-              <a:t>STUCK &gt; 3 MIN? RAISE YOUR HAND ✋</a:t>
-            </a:r>
-            <a:endParaRPr lang="en-US" sz="1050" dirty="0"/>
-          </a:p>
-        </p:txBody>
-      </p:sp>
-    </p:spTree>
-  </p:cSld>
-  <p:clrMapOvr>
-    <a:masterClrMapping/>
-  </p:clrMapOvr>
-</p:sld>
-</file>
-
-<file path=ppt/slides/slide9.xml><?xml version="1.0" encoding="utf-8"?>
-<p:sld xmlns:a="http://schemas.openxmlformats.org/drawingml/2006/main" xmlns:r="http://schemas.openxmlformats.org/officeDocument/2006/relationships" xmlns:p="http://schemas.openxmlformats.org/presentationml/2006/main">
-  <p:cSld name="Slide 9">
-    <p:bg>
-      <p:bgPr>
-        <a:solidFill>
-          <a:srgbClr val="FFFFFF"/>
-        </a:solidFill>
-      </p:bgPr>
-    </p:bg>
-    <p:spTree>
-      <p:nvGrpSpPr>
-        <p:cNvPr id="1" name=""/>
-        <p:cNvGrpSpPr/>
-        <p:nvPr/>
-      </p:nvGrpSpPr>
-      <p:grpSpPr>
-        <a:xfrm>
-          <a:off x="0" y="0"/>
-          <a:ext cx="0" cy="0"/>
-          <a:chOff x="0" y="0"/>
-          <a:chExt cx="0" cy="0"/>
-        </a:xfrm>
-      </p:grpSpPr>
-      <p:sp>
-        <p:nvSpPr>
-          <p:cNvPr id="2" name="Text 0"/>
-          <p:cNvSpPr/>
-          <p:nvPr/>
-        </p:nvSpPr>
-        <p:spPr>
-          <a:xfrm>
-            <a:off x="502920" y="274320"/>
-            <a:ext cx="8138160" cy="274320"/>
-          </a:xfrm>
-          <a:prstGeom prst="rect">
-            <a:avLst/>
-          </a:prstGeom>
-          <a:noFill/>
-          <a:ln/>
-        </p:spPr>
-        <p:txBody>
-          <a:bodyPr wrap="square" lIns="0" tIns="0" rIns="0" bIns="0" rtlCol="0" anchor="ctr"/>
-          <a:lstStyle/>
-          <a:p>
-            <a:pPr indent="0" marL="0">
-              <a:buNone/>
-            </a:pPr>
-            <a:r>
-              <a:rPr lang="en-US" sz="1100" spc="300" kern="0" dirty="0">
-                <a:solidFill>
-                  <a:srgbClr val="6D28D9"/>
-                </a:solidFill>
-                <a:latin typeface="Courier New" pitchFamily="34" charset="0"/>
-                <a:ea typeface="Courier New" pitchFamily="34" charset="-122"/>
-                <a:cs typeface="Courier New" pitchFamily="34" charset="-120"/>
-              </a:rPr>
-              <a:t>PART 2 PREVIEW</a:t>
-            </a:r>
-            <a:endParaRPr lang="en-US" sz="1100" dirty="0"/>
-          </a:p>
-        </p:txBody>
-      </p:sp>
-      <p:sp>
-        <p:nvSpPr>
-          <p:cNvPr id="3" name="Text 1"/>
-          <p:cNvSpPr/>
-          <p:nvPr/>
-        </p:nvSpPr>
-        <p:spPr>
-          <a:xfrm>
-            <a:off x="502920" y="530352"/>
-            <a:ext cx="8138160" cy="685800"/>
-          </a:xfrm>
-          <a:prstGeom prst="rect">
-            <a:avLst/>
-          </a:prstGeom>
-          <a:noFill/>
-          <a:ln/>
-        </p:spPr>
-        <p:txBody>
-          <a:bodyPr wrap="square" lIns="0" tIns="0" rIns="0" bIns="0" rtlCol="0" anchor="ctr"/>
-          <a:lstStyle/>
-          <a:p>
-            <a:pPr indent="0" marL="0">
-              <a:buNone/>
-            </a:pPr>
-            <a:r>
-              <a:rPr lang="en-US" sz="3000" b="1" dirty="0">
-                <a:solidFill>
-                  <a:srgbClr val="2A1B3D"/>
-                </a:solidFill>
-                <a:latin typeface="Cambria" pitchFamily="34" charset="0"/>
-                <a:ea typeface="Cambria" pitchFamily="34" charset="-122"/>
-                <a:cs typeface="Cambria" pitchFamily="34" charset="-120"/>
-              </a:rPr>
-              <a:t>From one agent to a cooperating team</a:t>
-            </a:r>
-            <a:endParaRPr lang="en-US" sz="3000" dirty="0"/>
-          </a:p>
-        </p:txBody>
-      </p:sp>
-      <p:sp>
-        <p:nvSpPr>
-          <p:cNvPr id="4" name="Shape 2"/>
-          <p:cNvSpPr/>
-          <p:nvPr/>
-        </p:nvSpPr>
-        <p:spPr>
-          <a:xfrm>
-            <a:off x="502920" y="1828800"/>
-            <a:ext cx="2286000" cy="1143000"/>
-          </a:xfrm>
-          <a:prstGeom prst="roundRect">
-            <a:avLst>
-              <a:gd name="adj" fmla="val 6400"/>
-            </a:avLst>
-          </a:prstGeom>
-          <a:solidFill>
-            <a:srgbClr val="FFFFFF"/>
-          </a:solidFill>
-          <a:ln w="12700">
-            <a:solidFill>
-              <a:srgbClr val="E4DCF5"/>
-            </a:solidFill>
-            <a:prstDash val="solid"/>
-          </a:ln>
-          <a:effectLst>
-            <a:outerShdw sx="100000" sy="100000" kx="0" ky="0" algn="bl" rotWithShape="0" blurRad="88900" dist="25400" dir="5400000">
-              <a:srgbClr val="3A2A55">
-                <a:alpha val="14000"/>
-              </a:srgbClr>
-            </a:outerShdw>
-          </a:effectLst>
-        </p:spPr>
-      </p:sp>
-      <p:sp>
-        <p:nvSpPr>
-          <p:cNvPr id="5" name="Text 3"/>
-          <p:cNvSpPr/>
-          <p:nvPr/>
-        </p:nvSpPr>
-        <p:spPr>
-          <a:xfrm>
-            <a:off x="502920" y="1956816"/>
-            <a:ext cx="2286000" cy="320040"/>
-          </a:xfrm>
-          <a:prstGeom prst="rect">
-            <a:avLst/>
-          </a:prstGeom>
-          <a:noFill/>
-          <a:ln/>
-        </p:spPr>
-        <p:txBody>
-          <a:bodyPr wrap="square" lIns="0" tIns="0" rIns="0" bIns="0" rtlCol="0" anchor="ctr"/>
-          <a:lstStyle/>
-          <a:p>
-            <a:pPr algn="ctr" indent="0" marL="0">
-              <a:buNone/>
-            </a:pPr>
-            <a:r>
-              <a:rPr lang="en-US" sz="1500" b="1" dirty="0">
-                <a:solidFill>
-                  <a:srgbClr val="2A1B3D"/>
-                </a:solidFill>
-                <a:latin typeface="Cambria" pitchFamily="34" charset="0"/>
-                <a:ea typeface="Cambria" pitchFamily="34" charset="-122"/>
-                <a:cs typeface="Cambria" pitchFamily="34" charset="-120"/>
-              </a:rPr>
-              <a:t>🕵️ Auditor</a:t>
-            </a:r>
-            <a:endParaRPr lang="en-US" sz="1500" dirty="0"/>
-          </a:p>
-        </p:txBody>
-      </p:sp>
-      <p:sp>
-        <p:nvSpPr>
-          <p:cNvPr id="6" name="Text 4"/>
-          <p:cNvSpPr/>
-          <p:nvPr/>
-        </p:nvSpPr>
-        <p:spPr>
-          <a:xfrm>
-            <a:off x="612648" y="2286000"/>
-            <a:ext cx="2066544" cy="594360"/>
-          </a:xfrm>
-          <a:prstGeom prst="rect">
-            <a:avLst/>
-          </a:prstGeom>
-          <a:noFill/>
-          <a:ln/>
-        </p:spPr>
-        <p:txBody>
-          <a:bodyPr wrap="square" lIns="0" tIns="0" rIns="0" bIns="0" rtlCol="0" anchor="ctr"/>
-          <a:lstStyle/>
-          <a:p>
-            <a:pPr algn="ctr" indent="0" marL="0">
-              <a:buNone/>
-            </a:pPr>
-            <a:r>
-              <a:rPr lang="en-US" sz="950" dirty="0">
-                <a:solidFill>
-                  <a:srgbClr val="6B6B76"/>
-                </a:solidFill>
-                <a:latin typeface="Calibri" pitchFamily="34" charset="0"/>
-                <a:ea typeface="Calibri" pitchFamily="34" charset="-122"/>
-                <a:cs typeface="Calibri" pitchFamily="34" charset="-120"/>
-              </a:rPr>
-              <a:t>tools + LLM →</a:t>
-            </a:r>
-            <a:endParaRPr lang="en-US" sz="950" dirty="0"/>
-          </a:p>
-          <a:p>
-            <a:pPr algn="ctr" indent="0" marL="0">
-              <a:buNone/>
-            </a:pPr>
-            <a:r>
-              <a:rPr lang="en-US" sz="950" dirty="0">
-                <a:solidFill>
-                  <a:srgbClr val="6B6B76"/>
-                </a:solidFill>
-                <a:latin typeface="Calibri" pitchFamily="34" charset="0"/>
-                <a:ea typeface="Calibri" pitchFamily="34" charset="-122"/>
-                <a:cs typeface="Calibri" pitchFamily="34" charset="-120"/>
-              </a:rPr>
-              <a:t>JSON findings</a:t>
-            </a:r>
-            <a:endParaRPr lang="en-US" sz="950" dirty="0"/>
-          </a:p>
-        </p:txBody>
-      </p:sp>
-      <p:sp>
-        <p:nvSpPr>
-          <p:cNvPr id="7" name="Shape 5"/>
-          <p:cNvSpPr/>
-          <p:nvPr/>
-        </p:nvSpPr>
-        <p:spPr>
-          <a:xfrm>
-            <a:off x="3429000" y="1828800"/>
-            <a:ext cx="2286000" cy="1143000"/>
-          </a:xfrm>
-          <a:prstGeom prst="roundRect">
-            <a:avLst>
-              <a:gd name="adj" fmla="val 6400"/>
-            </a:avLst>
-          </a:prstGeom>
-          <a:solidFill>
-            <a:srgbClr val="FFFFFF"/>
-          </a:solidFill>
-          <a:ln w="12700">
-            <a:solidFill>
-              <a:srgbClr val="E4DCF5"/>
-            </a:solidFill>
-            <a:prstDash val="solid"/>
-          </a:ln>
-          <a:effectLst>
-            <a:outerShdw sx="100000" sy="100000" kx="0" ky="0" algn="bl" rotWithShape="0" blurRad="88900" dist="25400" dir="5400000">
-              <a:srgbClr val="3A2A55">
-                <a:alpha val="14000"/>
-              </a:srgbClr>
-            </a:outerShdw>
-          </a:effectLst>
-        </p:spPr>
-      </p:sp>
-      <p:sp>
-        <p:nvSpPr>
-          <p:cNvPr id="8" name="Text 6"/>
-          <p:cNvSpPr/>
-          <p:nvPr/>
-        </p:nvSpPr>
-        <p:spPr>
-          <a:xfrm>
-            <a:off x="3429000" y="1956816"/>
-            <a:ext cx="2286000" cy="320040"/>
-          </a:xfrm>
-          <a:prstGeom prst="rect">
-            <a:avLst/>
-          </a:prstGeom>
-          <a:noFill/>
-          <a:ln/>
-        </p:spPr>
-        <p:txBody>
-          <a:bodyPr wrap="square" lIns="0" tIns="0" rIns="0" bIns="0" rtlCol="0" anchor="ctr"/>
-          <a:lstStyle/>
-          <a:p>
-            <a:pPr algn="ctr" indent="0" marL="0">
-              <a:buNone/>
-            </a:pPr>
-            <a:r>
-              <a:rPr lang="en-US" sz="1500" b="1" dirty="0">
-                <a:solidFill>
-                  <a:srgbClr val="2A1B3D"/>
-                </a:solidFill>
-                <a:latin typeface="Cambria" pitchFamily="34" charset="0"/>
-                <a:ea typeface="Cambria" pitchFamily="34" charset="-122"/>
-                <a:cs typeface="Cambria" pitchFamily="34" charset="-120"/>
-              </a:rPr>
-              <a:t>🔧 Refactorer</a:t>
-            </a:r>
-            <a:endParaRPr lang="en-US" sz="1500" dirty="0"/>
-          </a:p>
-        </p:txBody>
-      </p:sp>
-      <p:sp>
-        <p:nvSpPr>
-          <p:cNvPr id="9" name="Text 7"/>
-          <p:cNvSpPr/>
-          <p:nvPr/>
-        </p:nvSpPr>
-        <p:spPr>
-          <a:xfrm>
-            <a:off x="3538728" y="2286000"/>
-            <a:ext cx="2066544" cy="594360"/>
-          </a:xfrm>
-          <a:prstGeom prst="rect">
-            <a:avLst/>
-          </a:prstGeom>
-          <a:noFill/>
-          <a:ln/>
-        </p:spPr>
-        <p:txBody>
-          <a:bodyPr wrap="square" lIns="0" tIns="0" rIns="0" bIns="0" rtlCol="0" anchor="ctr"/>
-          <a:lstStyle/>
-          <a:p>
-            <a:pPr algn="ctr" indent="0" marL="0">
-              <a:buNone/>
-            </a:pPr>
-            <a:r>
-              <a:rPr lang="en-US" sz="950" dirty="0">
-                <a:solidFill>
-                  <a:srgbClr val="6B6B76"/>
-                </a:solidFill>
-                <a:latin typeface="Calibri" pitchFamily="34" charset="0"/>
-                <a:ea typeface="Calibri" pitchFamily="34" charset="-122"/>
-                <a:cs typeface="Calibri" pitchFamily="34" charset="-120"/>
-              </a:rPr>
-              <a:t>rewrites module</a:t>
-            </a:r>
-            <a:endParaRPr lang="en-US" sz="950" dirty="0"/>
-          </a:p>
-          <a:p>
-            <a:pPr algn="ctr" indent="0" marL="0">
-              <a:buNone/>
-            </a:pPr>
-            <a:r>
-              <a:rPr lang="en-US" sz="950" dirty="0">
-                <a:solidFill>
-                  <a:srgbClr val="6B6B76"/>
-                </a:solidFill>
-                <a:latin typeface="Calibri" pitchFamily="34" charset="0"/>
-                <a:ea typeface="Calibri" pitchFamily="34" charset="-122"/>
-                <a:cs typeface="Calibri" pitchFamily="34" charset="-120"/>
-              </a:rPr>
-              <a:t>under hard invariants</a:t>
-            </a:r>
-            <a:endParaRPr lang="en-US" sz="950" dirty="0"/>
-          </a:p>
-        </p:txBody>
-      </p:sp>
-      <p:sp>
-        <p:nvSpPr>
-          <p:cNvPr id="10" name="Shape 8"/>
-          <p:cNvSpPr/>
-          <p:nvPr/>
-        </p:nvSpPr>
-        <p:spPr>
-          <a:xfrm>
-            <a:off x="6355080" y="1828800"/>
-            <a:ext cx="2286000" cy="1143000"/>
-          </a:xfrm>
-          <a:prstGeom prst="roundRect">
-            <a:avLst>
-              <a:gd name="adj" fmla="val 6400"/>
-            </a:avLst>
-          </a:prstGeom>
-          <a:solidFill>
-            <a:srgbClr val="F3EFFB"/>
-          </a:solidFill>
-          <a:ln w="12700">
-            <a:solidFill>
-              <a:srgbClr val="E4DCF5"/>
-            </a:solidFill>
-            <a:prstDash val="solid"/>
-          </a:ln>
-          <a:effectLst>
-            <a:outerShdw sx="100000" sy="100000" kx="0" ky="0" algn="bl" rotWithShape="0" blurRad="88900" dist="25400" dir="5400000">
-              <a:srgbClr val="3A2A55">
-                <a:alpha val="14000"/>
-              </a:srgbClr>
-            </a:outerShdw>
-          </a:effectLst>
-        </p:spPr>
-      </p:sp>
-      <p:sp>
-        <p:nvSpPr>
-          <p:cNvPr id="11" name="Text 9"/>
-          <p:cNvSpPr/>
-          <p:nvPr/>
-        </p:nvSpPr>
-        <p:spPr>
-          <a:xfrm>
-            <a:off x="6355080" y="1956816"/>
-            <a:ext cx="2286000" cy="320040"/>
-          </a:xfrm>
-          <a:prstGeom prst="rect">
-            <a:avLst/>
-          </a:prstGeom>
-          <a:noFill/>
-          <a:ln/>
-        </p:spPr>
-        <p:txBody>
-          <a:bodyPr wrap="square" lIns="0" tIns="0" rIns="0" bIns="0" rtlCol="0" anchor="ctr"/>
-          <a:lstStyle/>
-          <a:p>
-            <a:pPr algn="ctr" indent="0" marL="0">
-              <a:buNone/>
-            </a:pPr>
-            <a:r>
-              <a:rPr lang="en-US" sz="1500" b="1" dirty="0">
-                <a:solidFill>
-                  <a:srgbClr val="2A1B3D"/>
-                </a:solidFill>
-                <a:latin typeface="Cambria" pitchFamily="34" charset="0"/>
-                <a:ea typeface="Cambria" pitchFamily="34" charset="-122"/>
-                <a:cs typeface="Cambria" pitchFamily="34" charset="-120"/>
-              </a:rPr>
-              <a:t>🛡️ QA Verifier</a:t>
-            </a:r>
-            <a:endParaRPr lang="en-US" sz="1500" dirty="0"/>
-          </a:p>
-        </p:txBody>
-      </p:sp>
-      <p:sp>
-        <p:nvSpPr>
-          <p:cNvPr id="12" name="Text 10"/>
-          <p:cNvSpPr/>
-          <p:nvPr/>
-        </p:nvSpPr>
-        <p:spPr>
-          <a:xfrm>
-            <a:off x="6464808" y="2286000"/>
-            <a:ext cx="2066544" cy="594360"/>
-          </a:xfrm>
-          <a:prstGeom prst="rect">
-            <a:avLst/>
-          </a:prstGeom>
-          <a:noFill/>
-          <a:ln/>
-        </p:spPr>
-        <p:txBody>
-          <a:bodyPr wrap="square" lIns="0" tIns="0" rIns="0" bIns="0" rtlCol="0" anchor="ctr"/>
-          <a:lstStyle/>
-          <a:p>
-            <a:pPr algn="ctr" indent="0" marL="0">
-              <a:buNone/>
-            </a:pPr>
-            <a:r>
-              <a:rPr lang="en-US" sz="950" dirty="0">
-                <a:solidFill>
-                  <a:srgbClr val="6B6B76"/>
-                </a:solidFill>
-                <a:latin typeface="Calibri" pitchFamily="34" charset="0"/>
-                <a:ea typeface="Calibri" pitchFamily="34" charset="-122"/>
-                <a:cs typeface="Calibri" pitchFamily="34" charset="-120"/>
-              </a:rPr>
-              <a:t>syntax → tests → metrics</a:t>
-            </a:r>
-            <a:endParaRPr lang="en-US" sz="950" dirty="0"/>
-          </a:p>
-          <a:p>
-            <a:pPr algn="ctr" indent="0" marL="0">
-              <a:buNone/>
-            </a:pPr>
-            <a:r>
-              <a:rPr lang="en-US" sz="950" dirty="0">
-                <a:solidFill>
-                  <a:srgbClr val="6B6B76"/>
-                </a:solidFill>
-                <a:latin typeface="Calibri" pitchFamily="34" charset="0"/>
-                <a:ea typeface="Calibri" pitchFamily="34" charset="-122"/>
-                <a:cs typeface="Calibri" pitchFamily="34" charset="-120"/>
-              </a:rPr>
-              <a:t>NO LLM inside</a:t>
-            </a:r>
-            <a:endParaRPr lang="en-US" sz="950" dirty="0"/>
-          </a:p>
-        </p:txBody>
-      </p:sp>
-      <p:sp>
-        <p:nvSpPr>
-          <p:cNvPr id="13" name="Shape 11"/>
-          <p:cNvSpPr/>
-          <p:nvPr/>
-        </p:nvSpPr>
-        <p:spPr>
-          <a:xfrm>
-            <a:off x="2788920" y="2395728"/>
-            <a:ext cx="640080" cy="0"/>
-          </a:xfrm>
-          <a:prstGeom prst="line">
-            <a:avLst/>
-          </a:prstGeom>
-          <a:noFill/>
-          <a:ln w="31750">
-            <a:solidFill>
-              <a:srgbClr val="6D28D9"/>
-            </a:solidFill>
-            <a:prstDash val="solid"/>
-            <a:tailEnd type="arrow"/>
-          </a:ln>
-        </p:spPr>
-      </p:sp>
-      <p:sp>
-        <p:nvSpPr>
-          <p:cNvPr id="14" name="Shape 12"/>
-          <p:cNvSpPr/>
-          <p:nvPr/>
-        </p:nvSpPr>
-        <p:spPr>
-          <a:xfrm>
-            <a:off x="5715000" y="2395728"/>
-            <a:ext cx="640080" cy="0"/>
-          </a:xfrm>
-          <a:prstGeom prst="line">
-            <a:avLst/>
-          </a:prstGeom>
-          <a:noFill/>
-          <a:ln w="31750">
-            <a:solidFill>
-              <a:srgbClr val="6D28D9"/>
-            </a:solidFill>
-            <a:prstDash val="solid"/>
-            <a:tailEnd type="arrow"/>
-          </a:ln>
-        </p:spPr>
-      </p:sp>
-      <p:sp>
-        <p:nvSpPr>
-          <p:cNvPr id="15" name="Text 13"/>
-          <p:cNvSpPr/>
-          <p:nvPr/>
-        </p:nvSpPr>
-        <p:spPr>
-          <a:xfrm>
-            <a:off x="2697480" y="2048256"/>
-            <a:ext cx="868680" cy="228600"/>
-          </a:xfrm>
-          <a:prstGeom prst="rect">
-            <a:avLst/>
-          </a:prstGeom>
-          <a:noFill/>
-          <a:ln/>
-        </p:spPr>
-        <p:txBody>
-          <a:bodyPr wrap="square" lIns="0" tIns="0" rIns="0" bIns="0" rtlCol="0" anchor="ctr"/>
-          <a:lstStyle/>
-          <a:p>
-            <a:pPr algn="ctr" indent="0" marL="0">
-              <a:buNone/>
-            </a:pPr>
-            <a:r>
-              <a:rPr lang="en-US" sz="850" dirty="0">
-                <a:solidFill>
-                  <a:srgbClr val="6B6B76"/>
-                </a:solidFill>
-                <a:latin typeface="Courier New" pitchFamily="34" charset="0"/>
-                <a:ea typeface="Courier New" pitchFamily="34" charset="-122"/>
-                <a:cs typeface="Courier New" pitchFamily="34" charset="-120"/>
-              </a:rPr>
-              <a:t>findings</a:t>
-            </a:r>
-            <a:endParaRPr lang="en-US" sz="850" dirty="0"/>
-          </a:p>
-        </p:txBody>
-      </p:sp>
-      <p:sp>
-        <p:nvSpPr>
-          <p:cNvPr id="16" name="Text 14"/>
-          <p:cNvSpPr/>
-          <p:nvPr/>
-        </p:nvSpPr>
-        <p:spPr>
-          <a:xfrm>
-            <a:off x="5605272" y="2048256"/>
-            <a:ext cx="868680" cy="228600"/>
-          </a:xfrm>
-          <a:prstGeom prst="rect">
-            <a:avLst/>
-          </a:prstGeom>
-          <a:noFill/>
-          <a:ln/>
-        </p:spPr>
-        <p:txBody>
-          <a:bodyPr wrap="square" lIns="0" tIns="0" rIns="0" bIns="0" rtlCol="0" anchor="ctr"/>
-          <a:lstStyle/>
-          <a:p>
-            <a:pPr algn="ctr" indent="0" marL="0">
-              <a:buNone/>
-            </a:pPr>
-            <a:r>
-              <a:rPr lang="en-US" sz="850" dirty="0">
-                <a:solidFill>
-                  <a:srgbClr val="6B6B76"/>
-                </a:solidFill>
-                <a:latin typeface="Courier New" pitchFamily="34" charset="0"/>
-                <a:ea typeface="Courier New" pitchFamily="34" charset="-122"/>
-                <a:cs typeface="Courier New" pitchFamily="34" charset="-120"/>
-              </a:rPr>
-              <a:t>candidate</a:t>
-            </a:r>
-            <a:endParaRPr lang="en-US" sz="850" dirty="0"/>
-          </a:p>
-        </p:txBody>
-      </p:sp>
-      <p:sp>
-        <p:nvSpPr>
-          <p:cNvPr id="17" name="Shape 15"/>
-          <p:cNvSpPr/>
-          <p:nvPr/>
-        </p:nvSpPr>
-        <p:spPr>
-          <a:xfrm>
-            <a:off x="3429000" y="3657600"/>
-            <a:ext cx="2286000" cy="914400"/>
-          </a:xfrm>
-          <a:prstGeom prst="roundRect">
-            <a:avLst>
-              <a:gd name="adj" fmla="val 8000"/>
-            </a:avLst>
-          </a:prstGeom>
-          <a:solidFill>
-            <a:srgbClr val="EFE9FA"/>
-          </a:solidFill>
-          <a:ln w="12700">
-            <a:solidFill>
-              <a:srgbClr val="E4DCF5"/>
-            </a:solidFill>
-            <a:prstDash val="solid"/>
-          </a:ln>
-          <a:effectLst>
-            <a:outerShdw sx="100000" sy="100000" kx="0" ky="0" algn="bl" rotWithShape="0" blurRad="88900" dist="25400" dir="5400000">
-              <a:srgbClr val="3A2A55">
-                <a:alpha val="14000"/>
-              </a:srgbClr>
-            </a:outerShdw>
-          </a:effectLst>
-        </p:spPr>
-      </p:sp>
-      <p:sp>
-        <p:nvSpPr>
-          <p:cNvPr id="18" name="Text 16"/>
-          <p:cNvSpPr/>
-          <p:nvPr/>
-        </p:nvSpPr>
-        <p:spPr>
-          <a:xfrm>
-            <a:off x="3429000" y="3785616"/>
-            <a:ext cx="2286000" cy="320040"/>
-          </a:xfrm>
-          <a:prstGeom prst="rect">
-            <a:avLst/>
-          </a:prstGeom>
-          <a:noFill/>
-          <a:ln/>
-        </p:spPr>
-        <p:txBody>
-          <a:bodyPr wrap="square" lIns="0" tIns="0" rIns="0" bIns="0" rtlCol="0" anchor="ctr"/>
-          <a:lstStyle/>
-          <a:p>
-            <a:pPr algn="ctr" indent="0" marL="0">
-              <a:buNone/>
-            </a:pPr>
-            <a:r>
-              <a:rPr lang="en-US" sz="1500" b="1" dirty="0">
-                <a:solidFill>
-                  <a:srgbClr val="2A1B3D"/>
-                </a:solidFill>
-                <a:latin typeface="Cambria" pitchFamily="34" charset="0"/>
-                <a:ea typeface="Cambria" pitchFamily="34" charset="-122"/>
-                <a:cs typeface="Cambria" pitchFamily="34" charset="-120"/>
-              </a:rPr>
-              <a:t>🎛️ Orchestrator</a:t>
-            </a:r>
-            <a:endParaRPr lang="en-US" sz="1500" dirty="0"/>
-          </a:p>
-        </p:txBody>
-      </p:sp>
-      <p:sp>
-        <p:nvSpPr>
-          <p:cNvPr id="19" name="Text 17"/>
-          <p:cNvSpPr/>
-          <p:nvPr/>
-        </p:nvSpPr>
-        <p:spPr>
-          <a:xfrm>
-            <a:off x="3538728" y="4114800"/>
-            <a:ext cx="2066544" cy="365760"/>
-          </a:xfrm>
-          <a:prstGeom prst="rect">
-            <a:avLst/>
-          </a:prstGeom>
-          <a:noFill/>
-          <a:ln/>
-        </p:spPr>
-        <p:txBody>
-          <a:bodyPr wrap="square" lIns="0" tIns="0" rIns="0" bIns="0" rtlCol="0" anchor="ctr"/>
-          <a:lstStyle/>
-          <a:p>
-            <a:pPr algn="ctr" indent="0" marL="0">
-              <a:buNone/>
-            </a:pPr>
-            <a:r>
-              <a:rPr lang="en-US" sz="950" dirty="0">
-                <a:solidFill>
-                  <a:srgbClr val="6B6B76"/>
-                </a:solidFill>
-                <a:latin typeface="Calibri" pitchFamily="34" charset="0"/>
-                <a:ea typeface="Calibri" pitchFamily="34" charset="-122"/>
-                <a:cs typeface="Calibri" pitchFamily="34" charset="-120"/>
-              </a:rPr>
-              <a:t>retry loop + iteration budget</a:t>
-            </a:r>
-            <a:endParaRPr lang="en-US" sz="950" dirty="0"/>
-          </a:p>
-          <a:p>
-            <a:pPr algn="ctr" indent="0" marL="0">
-              <a:buNone/>
-            </a:pPr>
-            <a:r>
-              <a:rPr lang="en-US" sz="950" dirty="0">
-                <a:solidFill>
-                  <a:srgbClr val="6B6B76"/>
-                </a:solidFill>
-                <a:latin typeface="Calibri" pitchFamily="34" charset="0"/>
-                <a:ea typeface="Calibri" pitchFamily="34" charset="-122"/>
-                <a:cs typeface="Calibri" pitchFamily="34" charset="-120"/>
-              </a:rPr>
-              <a:t>+ audit trail</a:t>
-            </a:r>
-            <a:endParaRPr lang="en-US" sz="950" dirty="0"/>
-          </a:p>
-        </p:txBody>
-      </p:sp>
-      <p:sp>
-        <p:nvSpPr>
-          <p:cNvPr id="20" name="Shape 18"/>
-          <p:cNvSpPr/>
-          <p:nvPr/>
-        </p:nvSpPr>
-        <p:spPr>
-          <a:xfrm>
-            <a:off x="7498080" y="2971800"/>
-            <a:ext cx="0" cy="1143000"/>
-          </a:xfrm>
-          <a:prstGeom prst="line">
-            <a:avLst/>
-          </a:prstGeom>
-          <a:noFill/>
-          <a:ln w="25400">
-            <a:solidFill>
-              <a:srgbClr val="C0392B"/>
-            </a:solidFill>
-            <a:prstDash val="dash"/>
-          </a:ln>
-        </p:spPr>
-      </p:sp>
-      <p:sp>
-        <p:nvSpPr>
-          <p:cNvPr id="21" name="Shape 19"/>
-          <p:cNvSpPr/>
-          <p:nvPr/>
-        </p:nvSpPr>
-        <p:spPr>
-          <a:xfrm>
-            <a:off x="5715000" y="4114800"/>
-            <a:ext cx="1783080" cy="0"/>
-          </a:xfrm>
-          <a:prstGeom prst="line">
-            <a:avLst/>
-          </a:prstGeom>
-          <a:noFill/>
-          <a:ln w="25400">
-            <a:solidFill>
-              <a:srgbClr val="C0392B"/>
-            </a:solidFill>
-            <a:prstDash val="dash"/>
-            <a:headEnd type="arrow"/>
-          </a:ln>
-        </p:spPr>
-      </p:sp>
-      <p:sp>
-        <p:nvSpPr>
-          <p:cNvPr id="22" name="Shape 20"/>
-          <p:cNvSpPr/>
-          <p:nvPr/>
-        </p:nvSpPr>
-        <p:spPr>
-          <a:xfrm>
-            <a:off x="2560320" y="4114800"/>
-            <a:ext cx="868680" cy="0"/>
-          </a:xfrm>
-          <a:prstGeom prst="line">
-            <a:avLst/>
-          </a:prstGeom>
-          <a:noFill/>
-          <a:ln w="25400">
-            <a:solidFill>
-              <a:srgbClr val="1E8E5A"/>
-            </a:solidFill>
-            <a:prstDash val="solid"/>
-            <a:headEnd type="arrow"/>
-          </a:ln>
-        </p:spPr>
-      </p:sp>
-      <p:sp>
-        <p:nvSpPr>
-          <p:cNvPr id="23" name="Shape 21"/>
-          <p:cNvSpPr/>
-          <p:nvPr/>
-        </p:nvSpPr>
-        <p:spPr>
-          <a:xfrm>
-            <a:off x="2560320" y="2971800"/>
-            <a:ext cx="0" cy="1143000"/>
-          </a:xfrm>
-          <a:prstGeom prst="line">
-            <a:avLst/>
-          </a:prstGeom>
-          <a:noFill/>
-          <a:ln w="25400">
-            <a:solidFill>
-              <a:srgbClr val="1E8E5A"/>
-            </a:solidFill>
-            <a:prstDash val="solid"/>
-          </a:ln>
-        </p:spPr>
-      </p:sp>
-      <p:sp>
-        <p:nvSpPr>
-          <p:cNvPr id="24" name="Text 22"/>
-          <p:cNvSpPr/>
-          <p:nvPr/>
-        </p:nvSpPr>
-        <p:spPr>
-          <a:xfrm>
-            <a:off x="5806440" y="4160520"/>
-            <a:ext cx="1737360" cy="228600"/>
-          </a:xfrm>
-          <a:prstGeom prst="rect">
-            <a:avLst/>
-          </a:prstGeom>
-          <a:noFill/>
-          <a:ln/>
-        </p:spPr>
-        <p:txBody>
-          <a:bodyPr wrap="square" lIns="0" tIns="0" rIns="0" bIns="0" rtlCol="0" anchor="ctr"/>
-          <a:lstStyle/>
-          <a:p>
-            <a:pPr algn="ctr" indent="0" marL="0">
-              <a:buNone/>
-            </a:pPr>
-            <a:r>
-              <a:rPr lang="en-US" sz="850" dirty="0">
-                <a:solidFill>
-                  <a:srgbClr val="C0392B"/>
-                </a:solidFill>
-                <a:latin typeface="Courier New" pitchFamily="34" charset="0"/>
-                <a:ea typeface="Courier New" pitchFamily="34" charset="-122"/>
-                <a:cs typeface="Courier New" pitchFamily="34" charset="-120"/>
-              </a:rPr>
-              <a:t>❌ reject + failure notes</a:t>
-            </a:r>
-            <a:endParaRPr lang="en-US" sz="850" dirty="0"/>
-          </a:p>
-        </p:txBody>
-      </p:sp>
-      <p:sp>
-        <p:nvSpPr>
-          <p:cNvPr id="25" name="Text 23"/>
-          <p:cNvSpPr/>
-          <p:nvPr/>
-        </p:nvSpPr>
-        <p:spPr>
-          <a:xfrm>
-            <a:off x="1051560" y="4160520"/>
-            <a:ext cx="1554480" cy="228600"/>
-          </a:xfrm>
-          <a:prstGeom prst="rect">
-            <a:avLst/>
-          </a:prstGeom>
-          <a:noFill/>
-          <a:ln/>
-        </p:spPr>
-        <p:txBody>
-          <a:bodyPr wrap="square" lIns="0" tIns="0" rIns="0" bIns="0" rtlCol="0" anchor="ctr"/>
-          <a:lstStyle/>
-          <a:p>
-            <a:pPr algn="ctr" indent="0" marL="0">
-              <a:buNone/>
-            </a:pPr>
-            <a:r>
-              <a:rPr lang="en-US" sz="850" dirty="0">
-                <a:solidFill>
-                  <a:srgbClr val="1E8E5A"/>
-                </a:solidFill>
-                <a:latin typeface="Courier New" pitchFamily="34" charset="0"/>
-                <a:ea typeface="Courier New" pitchFamily="34" charset="-122"/>
-                <a:cs typeface="Courier New" pitchFamily="34" charset="-120"/>
-              </a:rPr>
-              <a:t>✅ accept / retry</a:t>
-            </a:r>
-            <a:endParaRPr lang="en-US" sz="850" dirty="0"/>
-          </a:p>
-        </p:txBody>
-      </p:sp>
-      <p:sp>
-        <p:nvSpPr>
-          <p:cNvPr id="26" name="Text 24"/>
-          <p:cNvSpPr/>
-          <p:nvPr/>
-        </p:nvSpPr>
-        <p:spPr>
-          <a:xfrm>
-            <a:off x="502920" y="4754880"/>
-            <a:ext cx="8138160" cy="320040"/>
-          </a:xfrm>
-          <a:prstGeom prst="rect">
-            <a:avLst/>
-          </a:prstGeom>
-          <a:noFill/>
-          <a:ln/>
-        </p:spPr>
-        <p:txBody>
-          <a:bodyPr wrap="square" lIns="0" tIns="0" rIns="0" bIns="0" rtlCol="0" anchor="ctr"/>
-          <a:lstStyle/>
-          <a:p>
-            <a:pPr algn="ctr" indent="0" marL="0">
-              <a:buNone/>
-            </a:pPr>
-            <a:r>
-              <a:rPr lang="en-US" sz="1350" i="1" dirty="0">
-                <a:solidFill>
-                  <a:srgbClr val="6D28D9"/>
-                </a:solidFill>
-                <a:latin typeface="Calibri" pitchFamily="34" charset="0"/>
-                <a:ea typeface="Calibri" pitchFamily="34" charset="-122"/>
-                <a:cs typeface="Calibri" pitchFamily="34" charset="-120"/>
-              </a:rPr>
-              <a:t>The QA agent is deliberately NOT an LLM — never let the fox audit the henhouse.</a:t>
-            </a:r>
-            <a:endParaRPr lang="en-US" sz="1350" dirty="0"/>
           </a:p>
         </p:txBody>
       </p:sp>
